--- a/docs/ppt/豆包战队-5分钟演讲-最终版.pptx
+++ b/docs/ppt/豆包战队-5分钟演讲-最终版.pptx
@@ -1,19 +1,17 @@
 
 <file path=ppt/presentation.xml><?xml version="1.0" encoding="utf-8"?>
-<p:presentation xmlns:a="http://schemas.openxmlformats.org/drawingml/2006/main" xmlns:r="http://schemas.openxmlformats.org/officeDocument/2006/relationships" xmlns:p="http://schemas.openxmlformats.org/presentationml/2006/main" saveSubsetFonts="1" autoCompressPictures="0">
+<p:presentation xmlns:a="http://schemas.openxmlformats.org/drawingml/2006/main" xmlns:r="http://schemas.openxmlformats.org/officeDocument/2006/relationships" xmlns:p="http://schemas.openxmlformats.org/presentationml/2006/main" autoCompressPictures="0">
   <p:sldMasterIdLst>
     <p:sldMasterId id="2147483648" r:id="rId1"/>
   </p:sldMasterIdLst>
   <p:sldIdLst>
-    <p:sldId id="256" r:id="rId7"/>
-    <p:sldId id="257" r:id="rId8"/>
-    <p:sldId id="258" r:id="rId9"/>
-    <p:sldId id="259" r:id="rId10"/>
-    <p:sldId id="260" r:id="rId11"/>
-    <p:sldId id="261" r:id="rId12"/>
-    <p:sldId id="262" r:id="rId13"/>
+    <p:sldId id="256" r:id="rId3"/>
+    <p:sldId id="257" r:id="rId4"/>
+    <p:sldId id="258" r:id="rId5"/>
+    <p:sldId id="259" r:id="rId6"/>
+    <p:sldId id="260" r:id="rId7"/>
   </p:sldIdLst>
-  <p:sldSz cx="12191695" cy="6858000" type="screen4x3"/>
+  <p:sldSz cx="12191365" cy="6858000" type="screen4x3"/>
   <p:notesSz cx="6858000" cy="9144000"/>
   <p:defaultTextStyle>
     <a:defPPr>
@@ -110,6 +108,22 @@
       </a:defRPr>
     </a:lvl9pPr>
   </p:defaultTextStyle>
+  <p:extLst>
+    <p:ext uri="{EFAFB233-063F-42B5-8137-9DF3F51BA10A}">
+      <p15:sldGuideLst xmlns:p15="http://schemas.microsoft.com/office/powerpoint/2012/main">
+        <p15:guide id="1" orient="horz" pos="2160" userDrawn="1">
+          <p15:clr>
+            <a:srgbClr val="A4A3A4"/>
+          </p15:clr>
+        </p15:guide>
+        <p15:guide id="2" pos="2880" userDrawn="1">
+          <p15:clr>
+            <a:srgbClr val="A4A3A4"/>
+          </p15:clr>
+        </p15:guide>
+      </p15:sldGuideLst>
+    </p:ext>
+  </p:extLst>
 </p:presentation>
 </file>
 
@@ -294,7 +308,6 @@
           <a:p>
             <a:fld id="{5BCAD085-E8A6-8845-BD4E-CB4CCA059FC4}" type="datetimeFigureOut">
               <a:rPr lang="en-US" smtClean="0"/>
-              <a:t>1/27/13</a:t>
             </a:fld>
             <a:endParaRPr lang="en-US"/>
           </a:p>
@@ -336,18 +349,12 @@
           <a:p>
             <a:fld id="{C1FF6DA9-008F-8B48-92A6-B652298478BF}" type="slidenum">
               <a:rPr lang="en-US" smtClean="0"/>
-              <a:t>‹#›</a:t>
             </a:fld>
             <a:endParaRPr lang="en-US"/>
           </a:p>
         </p:txBody>
       </p:sp>
     </p:spTree>
-    <p:extLst>
-      <p:ext uri="{BB962C8B-B14F-4D97-AF65-F5344CB8AC3E}">
-        <p14:creationId xmlns:p14="http://schemas.microsoft.com/office/powerpoint/2010/main" val="3168075583"/>
-      </p:ext>
-    </p:extLst>
   </p:cSld>
   <p:clrMapOvr>
     <a:masterClrMapping/>
@@ -415,6 +422,7 @@
               <a:rPr lang="en-US" smtClean="0"/>
               <a:t>Click to edit Master text styles</a:t>
             </a:r>
+            <a:endParaRPr lang="en-US" smtClean="0"/>
           </a:p>
           <a:p>
             <a:pPr lvl="1"/>
@@ -422,6 +430,7 @@
               <a:rPr lang="en-US" smtClean="0"/>
               <a:t>Second level</a:t>
             </a:r>
+            <a:endParaRPr lang="en-US" smtClean="0"/>
           </a:p>
           <a:p>
             <a:pPr lvl="2"/>
@@ -429,6 +438,7 @@
               <a:rPr lang="en-US" smtClean="0"/>
               <a:t>Third level</a:t>
             </a:r>
+            <a:endParaRPr lang="en-US" smtClean="0"/>
           </a:p>
           <a:p>
             <a:pPr lvl="3"/>
@@ -436,6 +446,7 @@
               <a:rPr lang="en-US" smtClean="0"/>
               <a:t>Fourth level</a:t>
             </a:r>
+            <a:endParaRPr lang="en-US" smtClean="0"/>
           </a:p>
           <a:p>
             <a:pPr lvl="4"/>
@@ -464,7 +475,6 @@
           <a:p>
             <a:fld id="{5BCAD085-E8A6-8845-BD4E-CB4CCA059FC4}" type="datetimeFigureOut">
               <a:rPr lang="en-US" smtClean="0"/>
-              <a:t>1/27/13</a:t>
             </a:fld>
             <a:endParaRPr lang="en-US"/>
           </a:p>
@@ -506,18 +516,12 @@
           <a:p>
             <a:fld id="{C1FF6DA9-008F-8B48-92A6-B652298478BF}" type="slidenum">
               <a:rPr lang="en-US" smtClean="0"/>
-              <a:t>‹#›</a:t>
             </a:fld>
             <a:endParaRPr lang="en-US"/>
           </a:p>
         </p:txBody>
       </p:sp>
     </p:spTree>
-    <p:extLst>
-      <p:ext uri="{BB962C8B-B14F-4D97-AF65-F5344CB8AC3E}">
-        <p14:creationId xmlns:p14="http://schemas.microsoft.com/office/powerpoint/2010/main" val="2910927964"/>
-      </p:ext>
-    </p:extLst>
   </p:cSld>
   <p:clrMapOvr>
     <a:masterClrMapping/>
@@ -595,6 +599,7 @@
               <a:rPr lang="en-US" smtClean="0"/>
               <a:t>Click to edit Master text styles</a:t>
             </a:r>
+            <a:endParaRPr lang="en-US" smtClean="0"/>
           </a:p>
           <a:p>
             <a:pPr lvl="1"/>
@@ -602,6 +607,7 @@
               <a:rPr lang="en-US" smtClean="0"/>
               <a:t>Second level</a:t>
             </a:r>
+            <a:endParaRPr lang="en-US" smtClean="0"/>
           </a:p>
           <a:p>
             <a:pPr lvl="2"/>
@@ -609,6 +615,7 @@
               <a:rPr lang="en-US" smtClean="0"/>
               <a:t>Third level</a:t>
             </a:r>
+            <a:endParaRPr lang="en-US" smtClean="0"/>
           </a:p>
           <a:p>
             <a:pPr lvl="3"/>
@@ -616,6 +623,7 @@
               <a:rPr lang="en-US" smtClean="0"/>
               <a:t>Fourth level</a:t>
             </a:r>
+            <a:endParaRPr lang="en-US" smtClean="0"/>
           </a:p>
           <a:p>
             <a:pPr lvl="4"/>
@@ -644,7 +652,6 @@
           <a:p>
             <a:fld id="{5BCAD085-E8A6-8845-BD4E-CB4CCA059FC4}" type="datetimeFigureOut">
               <a:rPr lang="en-US" smtClean="0"/>
-              <a:t>1/27/13</a:t>
             </a:fld>
             <a:endParaRPr lang="en-US"/>
           </a:p>
@@ -686,18 +693,12 @@
           <a:p>
             <a:fld id="{C1FF6DA9-008F-8B48-92A6-B652298478BF}" type="slidenum">
               <a:rPr lang="en-US" smtClean="0"/>
-              <a:t>‹#›</a:t>
             </a:fld>
             <a:endParaRPr lang="en-US"/>
           </a:p>
         </p:txBody>
       </p:sp>
     </p:spTree>
-    <p:extLst>
-      <p:ext uri="{BB962C8B-B14F-4D97-AF65-F5344CB8AC3E}">
-        <p14:creationId xmlns:p14="http://schemas.microsoft.com/office/powerpoint/2010/main" val="3612223792"/>
-      </p:ext>
-    </p:extLst>
   </p:cSld>
   <p:clrMapOvr>
     <a:masterClrMapping/>
@@ -765,6 +766,7 @@
               <a:rPr lang="en-US" smtClean="0"/>
               <a:t>Click to edit Master text styles</a:t>
             </a:r>
+            <a:endParaRPr lang="en-US" smtClean="0"/>
           </a:p>
           <a:p>
             <a:pPr lvl="1"/>
@@ -772,6 +774,7 @@
               <a:rPr lang="en-US" smtClean="0"/>
               <a:t>Second level</a:t>
             </a:r>
+            <a:endParaRPr lang="en-US" smtClean="0"/>
           </a:p>
           <a:p>
             <a:pPr lvl="2"/>
@@ -779,6 +782,7 @@
               <a:rPr lang="en-US" smtClean="0"/>
               <a:t>Third level</a:t>
             </a:r>
+            <a:endParaRPr lang="en-US" smtClean="0"/>
           </a:p>
           <a:p>
             <a:pPr lvl="3"/>
@@ -786,6 +790,7 @@
               <a:rPr lang="en-US" smtClean="0"/>
               <a:t>Fourth level</a:t>
             </a:r>
+            <a:endParaRPr lang="en-US" smtClean="0"/>
           </a:p>
           <a:p>
             <a:pPr lvl="4"/>
@@ -814,7 +819,6 @@
           <a:p>
             <a:fld id="{5BCAD085-E8A6-8845-BD4E-CB4CCA059FC4}" type="datetimeFigureOut">
               <a:rPr lang="en-US" smtClean="0"/>
-              <a:t>1/27/13</a:t>
             </a:fld>
             <a:endParaRPr lang="en-US"/>
           </a:p>
@@ -856,18 +860,12 @@
           <a:p>
             <a:fld id="{C1FF6DA9-008F-8B48-92A6-B652298478BF}" type="slidenum">
               <a:rPr lang="en-US" smtClean="0"/>
-              <a:t>‹#›</a:t>
             </a:fld>
             <a:endParaRPr lang="en-US"/>
           </a:p>
         </p:txBody>
       </p:sp>
     </p:spTree>
-    <p:extLst>
-      <p:ext uri="{BB962C8B-B14F-4D97-AF65-F5344CB8AC3E}">
-        <p14:creationId xmlns:p14="http://schemas.microsoft.com/office/powerpoint/2010/main" val="2614314258"/>
-      </p:ext>
-    </p:extLst>
   </p:cSld>
   <p:clrMapOvr>
     <a:masterClrMapping/>
@@ -1040,6 +1038,7 @@
               <a:rPr lang="en-US" smtClean="0"/>
               <a:t>Click to edit Master text styles</a:t>
             </a:r>
+            <a:endParaRPr lang="en-US" smtClean="0"/>
           </a:p>
         </p:txBody>
       </p:sp>
@@ -1060,7 +1059,6 @@
           <a:p>
             <a:fld id="{5BCAD085-E8A6-8845-BD4E-CB4CCA059FC4}" type="datetimeFigureOut">
               <a:rPr lang="en-US" smtClean="0"/>
-              <a:t>1/27/13</a:t>
             </a:fld>
             <a:endParaRPr lang="en-US"/>
           </a:p>
@@ -1102,18 +1100,12 @@
           <a:p>
             <a:fld id="{C1FF6DA9-008F-8B48-92A6-B652298478BF}" type="slidenum">
               <a:rPr lang="en-US" smtClean="0"/>
-              <a:t>‹#›</a:t>
             </a:fld>
             <a:endParaRPr lang="en-US"/>
           </a:p>
         </p:txBody>
       </p:sp>
     </p:spTree>
-    <p:extLst>
-      <p:ext uri="{BB962C8B-B14F-4D97-AF65-F5344CB8AC3E}">
-        <p14:creationId xmlns:p14="http://schemas.microsoft.com/office/powerpoint/2010/main" val="960648375"/>
-      </p:ext>
-    </p:extLst>
   </p:cSld>
   <p:clrMapOvr>
     <a:masterClrMapping/>
@@ -1214,6 +1206,7 @@
               <a:rPr lang="en-US" smtClean="0"/>
               <a:t>Click to edit Master text styles</a:t>
             </a:r>
+            <a:endParaRPr lang="en-US" smtClean="0"/>
           </a:p>
           <a:p>
             <a:pPr lvl="1"/>
@@ -1221,6 +1214,7 @@
               <a:rPr lang="en-US" smtClean="0"/>
               <a:t>Second level</a:t>
             </a:r>
+            <a:endParaRPr lang="en-US" smtClean="0"/>
           </a:p>
           <a:p>
             <a:pPr lvl="2"/>
@@ -1228,6 +1222,7 @@
               <a:rPr lang="en-US" smtClean="0"/>
               <a:t>Third level</a:t>
             </a:r>
+            <a:endParaRPr lang="en-US" smtClean="0"/>
           </a:p>
           <a:p>
             <a:pPr lvl="3"/>
@@ -1235,6 +1230,7 @@
               <a:rPr lang="en-US" smtClean="0"/>
               <a:t>Fourth level</a:t>
             </a:r>
+            <a:endParaRPr lang="en-US" smtClean="0"/>
           </a:p>
           <a:p>
             <a:pPr lvl="4"/>
@@ -1299,6 +1295,7 @@
               <a:rPr lang="en-US" smtClean="0"/>
               <a:t>Click to edit Master text styles</a:t>
             </a:r>
+            <a:endParaRPr lang="en-US" smtClean="0"/>
           </a:p>
           <a:p>
             <a:pPr lvl="1"/>
@@ -1306,6 +1303,7 @@
               <a:rPr lang="en-US" smtClean="0"/>
               <a:t>Second level</a:t>
             </a:r>
+            <a:endParaRPr lang="en-US" smtClean="0"/>
           </a:p>
           <a:p>
             <a:pPr lvl="2"/>
@@ -1313,6 +1311,7 @@
               <a:rPr lang="en-US" smtClean="0"/>
               <a:t>Third level</a:t>
             </a:r>
+            <a:endParaRPr lang="en-US" smtClean="0"/>
           </a:p>
           <a:p>
             <a:pPr lvl="3"/>
@@ -1320,6 +1319,7 @@
               <a:rPr lang="en-US" smtClean="0"/>
               <a:t>Fourth level</a:t>
             </a:r>
+            <a:endParaRPr lang="en-US" smtClean="0"/>
           </a:p>
           <a:p>
             <a:pPr lvl="4"/>
@@ -1348,7 +1348,6 @@
           <a:p>
             <a:fld id="{5BCAD085-E8A6-8845-BD4E-CB4CCA059FC4}" type="datetimeFigureOut">
               <a:rPr lang="en-US" smtClean="0"/>
-              <a:t>1/27/13</a:t>
             </a:fld>
             <a:endParaRPr lang="en-US"/>
           </a:p>
@@ -1390,18 +1389,12 @@
           <a:p>
             <a:fld id="{C1FF6DA9-008F-8B48-92A6-B652298478BF}" type="slidenum">
               <a:rPr lang="en-US" smtClean="0"/>
-              <a:t>‹#›</a:t>
             </a:fld>
             <a:endParaRPr lang="en-US"/>
           </a:p>
         </p:txBody>
       </p:sp>
     </p:spTree>
-    <p:extLst>
-      <p:ext uri="{BB962C8B-B14F-4D97-AF65-F5344CB8AC3E}">
-        <p14:creationId xmlns:p14="http://schemas.microsoft.com/office/powerpoint/2010/main" val="2782244947"/>
-      </p:ext>
-    </p:extLst>
   </p:cSld>
   <p:clrMapOvr>
     <a:masterClrMapping/>
@@ -1515,6 +1508,7 @@
               <a:rPr lang="en-US" smtClean="0"/>
               <a:t>Click to edit Master text styles</a:t>
             </a:r>
+            <a:endParaRPr lang="en-US" smtClean="0"/>
           </a:p>
         </p:txBody>
       </p:sp>
@@ -1571,6 +1565,7 @@
               <a:rPr lang="en-US" smtClean="0"/>
               <a:t>Click to edit Master text styles</a:t>
             </a:r>
+            <a:endParaRPr lang="en-US" smtClean="0"/>
           </a:p>
           <a:p>
             <a:pPr lvl="1"/>
@@ -1578,6 +1573,7 @@
               <a:rPr lang="en-US" smtClean="0"/>
               <a:t>Second level</a:t>
             </a:r>
+            <a:endParaRPr lang="en-US" smtClean="0"/>
           </a:p>
           <a:p>
             <a:pPr lvl="2"/>
@@ -1585,6 +1581,7 @@
               <a:rPr lang="en-US" smtClean="0"/>
               <a:t>Third level</a:t>
             </a:r>
+            <a:endParaRPr lang="en-US" smtClean="0"/>
           </a:p>
           <a:p>
             <a:pPr lvl="3"/>
@@ -1592,6 +1589,7 @@
               <a:rPr lang="en-US" smtClean="0"/>
               <a:t>Fourth level</a:t>
             </a:r>
+            <a:endParaRPr lang="en-US" smtClean="0"/>
           </a:p>
           <a:p>
             <a:pPr lvl="4"/>
@@ -1665,6 +1663,7 @@
               <a:rPr lang="en-US" smtClean="0"/>
               <a:t>Click to edit Master text styles</a:t>
             </a:r>
+            <a:endParaRPr lang="en-US" smtClean="0"/>
           </a:p>
         </p:txBody>
       </p:sp>
@@ -1721,6 +1720,7 @@
               <a:rPr lang="en-US" smtClean="0"/>
               <a:t>Click to edit Master text styles</a:t>
             </a:r>
+            <a:endParaRPr lang="en-US" smtClean="0"/>
           </a:p>
           <a:p>
             <a:pPr lvl="1"/>
@@ -1728,6 +1728,7 @@
               <a:rPr lang="en-US" smtClean="0"/>
               <a:t>Second level</a:t>
             </a:r>
+            <a:endParaRPr lang="en-US" smtClean="0"/>
           </a:p>
           <a:p>
             <a:pPr lvl="2"/>
@@ -1735,6 +1736,7 @@
               <a:rPr lang="en-US" smtClean="0"/>
               <a:t>Third level</a:t>
             </a:r>
+            <a:endParaRPr lang="en-US" smtClean="0"/>
           </a:p>
           <a:p>
             <a:pPr lvl="3"/>
@@ -1742,6 +1744,7 @@
               <a:rPr lang="en-US" smtClean="0"/>
               <a:t>Fourth level</a:t>
             </a:r>
+            <a:endParaRPr lang="en-US" smtClean="0"/>
           </a:p>
           <a:p>
             <a:pPr lvl="4"/>
@@ -1770,7 +1773,6 @@
           <a:p>
             <a:fld id="{5BCAD085-E8A6-8845-BD4E-CB4CCA059FC4}" type="datetimeFigureOut">
               <a:rPr lang="en-US" smtClean="0"/>
-              <a:t>1/27/13</a:t>
             </a:fld>
             <a:endParaRPr lang="en-US"/>
           </a:p>
@@ -1812,18 +1814,12 @@
           <a:p>
             <a:fld id="{C1FF6DA9-008F-8B48-92A6-B652298478BF}" type="slidenum">
               <a:rPr lang="en-US" smtClean="0"/>
-              <a:t>‹#›</a:t>
             </a:fld>
             <a:endParaRPr lang="en-US"/>
           </a:p>
         </p:txBody>
       </p:sp>
     </p:spTree>
-    <p:extLst>
-      <p:ext uri="{BB962C8B-B14F-4D97-AF65-F5344CB8AC3E}">
-        <p14:creationId xmlns:p14="http://schemas.microsoft.com/office/powerpoint/2010/main" val="990158736"/>
-      </p:ext>
-    </p:extLst>
   </p:cSld>
   <p:clrMapOvr>
     <a:masterClrMapping/>
@@ -1888,7 +1884,6 @@
           <a:p>
             <a:fld id="{5BCAD085-E8A6-8845-BD4E-CB4CCA059FC4}" type="datetimeFigureOut">
               <a:rPr lang="en-US" smtClean="0"/>
-              <a:t>1/27/13</a:t>
             </a:fld>
             <a:endParaRPr lang="en-US"/>
           </a:p>
@@ -1930,18 +1925,12 @@
           <a:p>
             <a:fld id="{C1FF6DA9-008F-8B48-92A6-B652298478BF}" type="slidenum">
               <a:rPr lang="en-US" smtClean="0"/>
-              <a:t>‹#›</a:t>
             </a:fld>
             <a:endParaRPr lang="en-US"/>
           </a:p>
         </p:txBody>
       </p:sp>
     </p:spTree>
-    <p:extLst>
-      <p:ext uri="{BB962C8B-B14F-4D97-AF65-F5344CB8AC3E}">
-        <p14:creationId xmlns:p14="http://schemas.microsoft.com/office/powerpoint/2010/main" val="727027711"/>
-      </p:ext>
-    </p:extLst>
   </p:cSld>
   <p:clrMapOvr>
     <a:masterClrMapping/>
@@ -1983,7 +1972,6 @@
           <a:p>
             <a:fld id="{5BCAD085-E8A6-8845-BD4E-CB4CCA059FC4}" type="datetimeFigureOut">
               <a:rPr lang="en-US" smtClean="0"/>
-              <a:t>1/27/13</a:t>
             </a:fld>
             <a:endParaRPr lang="en-US"/>
           </a:p>
@@ -2025,18 +2013,12 @@
           <a:p>
             <a:fld id="{C1FF6DA9-008F-8B48-92A6-B652298478BF}" type="slidenum">
               <a:rPr lang="en-US" smtClean="0"/>
-              <a:t>‹#›</a:t>
             </a:fld>
             <a:endParaRPr lang="en-US"/>
           </a:p>
         </p:txBody>
       </p:sp>
     </p:spTree>
-    <p:extLst>
-      <p:ext uri="{BB962C8B-B14F-4D97-AF65-F5344CB8AC3E}">
-        <p14:creationId xmlns:p14="http://schemas.microsoft.com/office/powerpoint/2010/main" val="1212999818"/>
-      </p:ext>
-    </p:extLst>
   </p:cSld>
   <p:clrMapOvr>
     <a:masterClrMapping/>
@@ -2146,6 +2128,7 @@
               <a:rPr lang="en-US" smtClean="0"/>
               <a:t>Click to edit Master text styles</a:t>
             </a:r>
+            <a:endParaRPr lang="en-US" smtClean="0"/>
           </a:p>
           <a:p>
             <a:pPr lvl="1"/>
@@ -2153,6 +2136,7 @@
               <a:rPr lang="en-US" smtClean="0"/>
               <a:t>Second level</a:t>
             </a:r>
+            <a:endParaRPr lang="en-US" smtClean="0"/>
           </a:p>
           <a:p>
             <a:pPr lvl="2"/>
@@ -2160,6 +2144,7 @@
               <a:rPr lang="en-US" smtClean="0"/>
               <a:t>Third level</a:t>
             </a:r>
+            <a:endParaRPr lang="en-US" smtClean="0"/>
           </a:p>
           <a:p>
             <a:pPr lvl="3"/>
@@ -2167,6 +2152,7 @@
               <a:rPr lang="en-US" smtClean="0"/>
               <a:t>Fourth level</a:t>
             </a:r>
+            <a:endParaRPr lang="en-US" smtClean="0"/>
           </a:p>
           <a:p>
             <a:pPr lvl="4"/>
@@ -2240,6 +2226,7 @@
               <a:rPr lang="en-US" smtClean="0"/>
               <a:t>Click to edit Master text styles</a:t>
             </a:r>
+            <a:endParaRPr lang="en-US" smtClean="0"/>
           </a:p>
         </p:txBody>
       </p:sp>
@@ -2260,7 +2247,6 @@
           <a:p>
             <a:fld id="{5BCAD085-E8A6-8845-BD4E-CB4CCA059FC4}" type="datetimeFigureOut">
               <a:rPr lang="en-US" smtClean="0"/>
-              <a:t>1/27/13</a:t>
             </a:fld>
             <a:endParaRPr lang="en-US"/>
           </a:p>
@@ -2302,18 +2288,12 @@
           <a:p>
             <a:fld id="{C1FF6DA9-008F-8B48-92A6-B652298478BF}" type="slidenum">
               <a:rPr lang="en-US" smtClean="0"/>
-              <a:t>‹#›</a:t>
             </a:fld>
             <a:endParaRPr lang="en-US"/>
           </a:p>
         </p:txBody>
       </p:sp>
     </p:spTree>
-    <p:extLst>
-      <p:ext uri="{BB962C8B-B14F-4D97-AF65-F5344CB8AC3E}">
-        <p14:creationId xmlns:p14="http://schemas.microsoft.com/office/powerpoint/2010/main" val="1840726560"/>
-      </p:ext>
-    </p:extLst>
   </p:cSld>
   <p:clrMapOvr>
     <a:masterClrMapping/>
@@ -2493,6 +2473,7 @@
               <a:rPr lang="en-US" smtClean="0"/>
               <a:t>Click to edit Master text styles</a:t>
             </a:r>
+            <a:endParaRPr lang="en-US" smtClean="0"/>
           </a:p>
         </p:txBody>
       </p:sp>
@@ -2513,7 +2494,6 @@
           <a:p>
             <a:fld id="{5BCAD085-E8A6-8845-BD4E-CB4CCA059FC4}" type="datetimeFigureOut">
               <a:rPr lang="en-US" smtClean="0"/>
-              <a:t>1/27/13</a:t>
             </a:fld>
             <a:endParaRPr lang="en-US"/>
           </a:p>
@@ -2555,18 +2535,12 @@
           <a:p>
             <a:fld id="{C1FF6DA9-008F-8B48-92A6-B652298478BF}" type="slidenum">
               <a:rPr lang="en-US" smtClean="0"/>
-              <a:t>‹#›</a:t>
             </a:fld>
             <a:endParaRPr lang="en-US"/>
           </a:p>
         </p:txBody>
       </p:sp>
     </p:spTree>
-    <p:extLst>
-      <p:ext uri="{BB962C8B-B14F-4D97-AF65-F5344CB8AC3E}">
-        <p14:creationId xmlns:p14="http://schemas.microsoft.com/office/powerpoint/2010/main" val="3889236939"/>
-      </p:ext>
-    </p:extLst>
   </p:cSld>
   <p:clrMapOvr>
     <a:masterClrMapping/>
@@ -2659,6 +2633,7 @@
               <a:rPr lang="en-US" smtClean="0"/>
               <a:t>Click to edit Master text styles</a:t>
             </a:r>
+            <a:endParaRPr lang="en-US" smtClean="0"/>
           </a:p>
           <a:p>
             <a:pPr lvl="1"/>
@@ -2666,6 +2641,7 @@
               <a:rPr lang="en-US" smtClean="0"/>
               <a:t>Second level</a:t>
             </a:r>
+            <a:endParaRPr lang="en-US" smtClean="0"/>
           </a:p>
           <a:p>
             <a:pPr lvl="2"/>
@@ -2673,6 +2649,7 @@
               <a:rPr lang="en-US" smtClean="0"/>
               <a:t>Third level</a:t>
             </a:r>
+            <a:endParaRPr lang="en-US" smtClean="0"/>
           </a:p>
           <a:p>
             <a:pPr lvl="3"/>
@@ -2680,6 +2657,7 @@
               <a:rPr lang="en-US" smtClean="0"/>
               <a:t>Fourth level</a:t>
             </a:r>
+            <a:endParaRPr lang="en-US" smtClean="0"/>
           </a:p>
           <a:p>
             <a:pPr lvl="4"/>
@@ -2726,7 +2704,6 @@
           <a:p>
             <a:fld id="{5BCAD085-E8A6-8845-BD4E-CB4CCA059FC4}" type="datetimeFigureOut">
               <a:rPr lang="en-US" smtClean="0"/>
-              <a:t>1/27/13</a:t>
             </a:fld>
             <a:endParaRPr lang="en-US"/>
           </a:p>
@@ -2804,18 +2781,12 @@
           <a:p>
             <a:fld id="{C1FF6DA9-008F-8B48-92A6-B652298478BF}" type="slidenum">
               <a:rPr lang="en-US" smtClean="0"/>
-              <a:t>‹#›</a:t>
             </a:fld>
             <a:endParaRPr lang="en-US"/>
           </a:p>
         </p:txBody>
       </p:sp>
     </p:spTree>
-    <p:extLst>
-      <p:ext uri="{BB962C8B-B14F-4D97-AF65-F5344CB8AC3E}">
-        <p14:creationId xmlns:p14="http://schemas.microsoft.com/office/powerpoint/2010/main" val="2209977519"/>
-      </p:ext>
-    </p:extLst>
   </p:cSld>
   <p:clrMap bg1="lt1" tx1="dk1" bg2="lt2" tx2="dk2" accent1="accent1" accent2="accent2" accent3="accent3" accent4="accent4" accent5="accent5" accent6="accent6" hlink="hlink" folHlink="folHlink"/>
   <p:sldLayoutIdLst>
@@ -2853,7 +2824,7 @@
         <a:spcBef>
           <a:spcPct val="20000"/>
         </a:spcBef>
-        <a:buFont typeface="Arial"/>
+        <a:buFont typeface="Arial" panose="020B0604020202020204"/>
         <a:buChar char="•"/>
         <a:defRPr sz="3200" kern="1200">
           <a:solidFill>
@@ -2868,7 +2839,7 @@
         <a:spcBef>
           <a:spcPct val="20000"/>
         </a:spcBef>
-        <a:buFont typeface="Arial"/>
+        <a:buFont typeface="Arial" panose="020B0604020202020204"/>
         <a:buChar char="–"/>
         <a:defRPr sz="2800" kern="1200">
           <a:solidFill>
@@ -2883,7 +2854,7 @@
         <a:spcBef>
           <a:spcPct val="20000"/>
         </a:spcBef>
-        <a:buFont typeface="Arial"/>
+        <a:buFont typeface="Arial" panose="020B0604020202020204"/>
         <a:buChar char="•"/>
         <a:defRPr sz="2400" kern="1200">
           <a:solidFill>
@@ -2898,7 +2869,7 @@
         <a:spcBef>
           <a:spcPct val="20000"/>
         </a:spcBef>
-        <a:buFont typeface="Arial"/>
+        <a:buFont typeface="Arial" panose="020B0604020202020204"/>
         <a:buChar char="–"/>
         <a:defRPr sz="2000" kern="1200">
           <a:solidFill>
@@ -2913,7 +2884,7 @@
         <a:spcBef>
           <a:spcPct val="20000"/>
         </a:spcBef>
-        <a:buFont typeface="Arial"/>
+        <a:buFont typeface="Arial" panose="020B0604020202020204"/>
         <a:buChar char="»"/>
         <a:defRPr sz="2000" kern="1200">
           <a:solidFill>
@@ -2928,7 +2899,7 @@
         <a:spcBef>
           <a:spcPct val="20000"/>
         </a:spcBef>
-        <a:buFont typeface="Arial"/>
+        <a:buFont typeface="Arial" panose="020B0604020202020204"/>
         <a:buChar char="•"/>
         <a:defRPr sz="2000" kern="1200">
           <a:solidFill>
@@ -2943,7 +2914,7 @@
         <a:spcBef>
           <a:spcPct val="20000"/>
         </a:spcBef>
-        <a:buFont typeface="Arial"/>
+        <a:buFont typeface="Arial" panose="020B0604020202020204"/>
         <a:buChar char="•"/>
         <a:defRPr sz="2000" kern="1200">
           <a:solidFill>
@@ -2958,7 +2929,7 @@
         <a:spcBef>
           <a:spcPct val="20000"/>
         </a:spcBef>
-        <a:buFont typeface="Arial"/>
+        <a:buFont typeface="Arial" panose="020B0604020202020204"/>
         <a:buChar char="•"/>
         <a:defRPr sz="2000" kern="1200">
           <a:solidFill>
@@ -2973,7 +2944,7 @@
         <a:spcBef>
           <a:spcPct val="20000"/>
         </a:spcBef>
-        <a:buFont typeface="Arial"/>
+        <a:buFont typeface="Arial" panose="020B0604020202020204"/>
         <a:buChar char="•"/>
         <a:defRPr sz="2000" kern="1200">
           <a:solidFill>
@@ -3085,7 +3056,7 @@
 </file>
 
 <file path=ppt/slides/slide1.xml><?xml version="1.0" encoding="utf-8"?>
-<p:sld xmlns:a="http://schemas.openxmlformats.org/drawingml/2006/main" xmlns:p="http://schemas.openxmlformats.org/presentationml/2006/main" xmlns:r="http://schemas.openxmlformats.org/officeDocument/2006/relationships">
+<p:sld xmlns:a="http://schemas.openxmlformats.org/drawingml/2006/main" xmlns:r="http://schemas.openxmlformats.org/officeDocument/2006/relationships" xmlns:p="http://schemas.openxmlformats.org/presentationml/2006/main">
   <p:cSld>
     <p:spTree>
       <p:nvGrpSpPr>
@@ -3096,58 +3067,14 @@
       <p:grpSpPr/>
       <p:sp>
         <p:nvSpPr>
-          <p:cNvPr id="2" name="Rectangle 1"/>
-          <p:cNvSpPr/>
-          <p:nvPr/>
-        </p:nvSpPr>
-        <p:spPr>
-          <a:xfrm>
-            <a:off x="8351215" y="0"/>
-            <a:ext cx="3840480" cy="2377440"/>
-          </a:xfrm>
-          <a:prstGeom prst="rect">
-            <a:avLst/>
-          </a:prstGeom>
-          <a:solidFill>
-            <a:srgbClr val="EFF4FE"/>
-          </a:solidFill>
-          <a:ln>
-            <a:noFill/>
-          </a:ln>
-          <a:effectLst/>
-        </p:spPr>
-        <p:style>
-          <a:lnRef idx="1">
-            <a:schemeClr val="accent1"/>
-          </a:lnRef>
-          <a:fillRef idx="3">
-            <a:schemeClr val="accent1"/>
-          </a:fillRef>
-          <a:effectRef idx="2">
-            <a:schemeClr val="accent1"/>
-          </a:effectRef>
-          <a:fontRef idx="minor">
-            <a:schemeClr val="lt1"/>
-          </a:fontRef>
-        </p:style>
-        <p:txBody>
-          <a:bodyPr rtlCol="0" anchor="ctr"/>
-          <a:lstStyle/>
-          <a:p>
-            <a:pPr algn="ctr"/>
-          </a:p>
-        </p:txBody>
-      </p:sp>
-      <p:sp>
-        <p:nvSpPr>
           <p:cNvPr id="3" name="Rounded Rectangle 2"/>
           <p:cNvSpPr/>
           <p:nvPr/>
         </p:nvSpPr>
         <p:spPr>
           <a:xfrm>
-            <a:off x="758952" y="502920"/>
-            <a:ext cx="402336" cy="402336"/>
+            <a:off x="758952" y="457200"/>
+            <a:ext cx="384048" cy="384048"/>
           </a:xfrm>
           <a:prstGeom prst="roundRect">
             <a:avLst/>
@@ -3190,8 +3117,8 @@
         </p:nvSpPr>
         <p:spPr>
           <a:xfrm>
-            <a:off x="758952" y="530352"/>
-            <a:ext cx="402336" cy="365760"/>
+            <a:off x="758952" y="484632"/>
+            <a:ext cx="384048" cy="347472"/>
           </a:xfrm>
           <a:prstGeom prst="rect">
             <a:avLst/>
@@ -3206,18 +3133,24 @@
           <a:p>
             <a:pPr algn="ctr">
               <a:lnSpc>
-                <a:spcPct val="135000"/>
+                <a:spcPct val="140000"/>
               </a:lnSpc>
             </a:pPr>
             <a:r>
-              <a:rPr sz="1700" b="1">
+              <a:rPr sz="1600" b="1">
                 <a:solidFill>
                   <a:srgbClr val="FFFFFF"/>
                 </a:solidFill>
-                <a:latin typeface="微软雅黑"/>
+                <a:latin typeface="微软雅黑" panose="020B0503020204020204" charset="-122"/>
               </a:rPr>
               <a:t>析</a:t>
             </a:r>
+            <a:endParaRPr sz="1600" b="1">
+              <a:solidFill>
+                <a:srgbClr val="FFFFFF"/>
+              </a:solidFill>
+              <a:latin typeface="微软雅黑" panose="020B0503020204020204" charset="-122"/>
+            </a:endParaRPr>
           </a:p>
         </p:txBody>
       </p:sp>
@@ -3229,8 +3162,8 @@
         </p:nvSpPr>
         <p:spPr>
           <a:xfrm>
-            <a:off x="1298448" y="566928"/>
-            <a:ext cx="8229600" cy="365760"/>
+            <a:off x="1271016" y="521207"/>
+            <a:ext cx="8686800" cy="347472"/>
           </a:xfrm>
           <a:prstGeom prst="rect">
             <a:avLst/>
@@ -3245,18 +3178,24 @@
           <a:p>
             <a:pPr algn="l">
               <a:lnSpc>
-                <a:spcPct val="135000"/>
+                <a:spcPct val="140000"/>
               </a:lnSpc>
             </a:pPr>
             <a:r>
-              <a:rPr sz="1400" b="0">
+              <a:rPr sz="1300" b="0">
                 <a:solidFill>
                   <a:srgbClr val="64748B"/>
                 </a:solidFill>
-                <a:latin typeface="微软雅黑"/>
+                <a:latin typeface="微软雅黑" panose="020B0503020204020204" charset="-122"/>
               </a:rPr>
               <a:t>粤港澳大湾区 AI Coding 创新大赛 · 方向一「AI + 教学管理助手」</a:t>
             </a:r>
+            <a:endParaRPr sz="1300" b="0">
+              <a:solidFill>
+                <a:srgbClr val="64748B"/>
+              </a:solidFill>
+              <a:latin typeface="微软雅黑" panose="020B0503020204020204" charset="-122"/>
+            </a:endParaRPr>
           </a:p>
         </p:txBody>
       </p:sp>
@@ -3268,8 +3207,8 @@
         </p:nvSpPr>
         <p:spPr>
           <a:xfrm>
-            <a:off x="758952" y="1920240"/>
-            <a:ext cx="10058400" cy="1188720"/>
+            <a:off x="758952" y="1783080"/>
+            <a:ext cx="10058400" cy="1143000"/>
           </a:xfrm>
           <a:prstGeom prst="rect">
             <a:avLst/>
@@ -3284,18 +3223,24 @@
           <a:p>
             <a:pPr algn="l">
               <a:lnSpc>
-                <a:spcPct val="135000"/>
+                <a:spcPct val="140000"/>
               </a:lnSpc>
             </a:pPr>
             <a:r>
-              <a:rPr sz="6600" b="1">
+              <a:rPr sz="6200" b="1">
                 <a:solidFill>
                   <a:srgbClr val="0F172A"/>
                 </a:solidFill>
-                <a:latin typeface="微软雅黑"/>
+                <a:latin typeface="微软雅黑" panose="020B0503020204020204" charset="-122"/>
               </a:rPr>
               <a:t>析知 XiZhi</a:t>
             </a:r>
+            <a:endParaRPr sz="6200" b="1">
+              <a:solidFill>
+                <a:srgbClr val="0F172A"/>
+              </a:solidFill>
+              <a:latin typeface="微软雅黑" panose="020B0503020204020204" charset="-122"/>
+            </a:endParaRPr>
           </a:p>
         </p:txBody>
       </p:sp>
@@ -3307,8 +3252,8 @@
         </p:nvSpPr>
         <p:spPr>
           <a:xfrm>
-            <a:off x="777240" y="3017520"/>
-            <a:ext cx="10058400" cy="548640"/>
+            <a:off x="777240" y="2788920"/>
+            <a:ext cx="10058400" cy="502920"/>
           </a:xfrm>
           <a:prstGeom prst="rect">
             <a:avLst/>
@@ -3323,18 +3268,24 @@
           <a:p>
             <a:pPr algn="l">
               <a:lnSpc>
-                <a:spcPct val="135000"/>
+                <a:spcPct val="140000"/>
               </a:lnSpc>
             </a:pPr>
             <a:r>
-              <a:rPr sz="2600" b="1">
+              <a:rPr sz="2400" b="1">
                 <a:solidFill>
                   <a:srgbClr val="3B82F6"/>
                 </a:solidFill>
-                <a:latin typeface="微软雅黑"/>
+                <a:latin typeface="微软雅黑" panose="020B0503020204020204" charset="-122"/>
               </a:rPr>
               <a:t>多模态教学智能体</a:t>
             </a:r>
+            <a:endParaRPr sz="2400" b="1">
+              <a:solidFill>
+                <a:srgbClr val="3B82F6"/>
+              </a:solidFill>
+              <a:latin typeface="微软雅黑" panose="020B0503020204020204" charset="-122"/>
+            </a:endParaRPr>
           </a:p>
         </p:txBody>
       </p:sp>
@@ -3346,8 +3297,8 @@
         </p:nvSpPr>
         <p:spPr>
           <a:xfrm>
-            <a:off x="795528" y="3657600"/>
-            <a:ext cx="1005840" cy="64008"/>
+            <a:off x="795528" y="3383280"/>
+            <a:ext cx="914400" cy="59436"/>
           </a:xfrm>
           <a:prstGeom prst="rect">
             <a:avLst/>
@@ -3390,8 +3341,8 @@
         </p:nvSpPr>
         <p:spPr>
           <a:xfrm>
-            <a:off x="758952" y="3931920"/>
-            <a:ext cx="9509760" cy="1005840"/>
+            <a:off x="758952" y="3611880"/>
+            <a:ext cx="10424160" cy="502920"/>
           </a:xfrm>
           <a:prstGeom prst="rect">
             <a:avLst/>
@@ -3406,34 +3357,24 @@
           <a:p>
             <a:pPr algn="l">
               <a:lnSpc>
-                <a:spcPct val="160000"/>
+                <a:spcPct val="140000"/>
               </a:lnSpc>
             </a:pPr>
             <a:r>
-              <a:rPr sz="1700" b="0">
+              <a:rPr sz="1600" b="0">
                 <a:solidFill>
                   <a:srgbClr val="1A1A1A"/>
                 </a:solidFill>
-                <a:latin typeface="微软雅黑"/>
+                <a:latin typeface="微软雅黑" panose="020B0503020204020204" charset="-122"/>
               </a:rPr>
               <a:t>把讲义和板书，变成可检索、可溯源、有依赖关系的知识骨架</a:t>
             </a:r>
-          </a:p>
-          <a:p>
-            <a:pPr algn="l">
-              <a:lnSpc>
-                <a:spcPct val="160000"/>
-              </a:lnSpc>
-            </a:pPr>
-            <a:r>
-              <a:rPr sz="1700" b="0">
-                <a:solidFill>
-                  <a:srgbClr val="1A1A1A"/>
-                </a:solidFill>
-                <a:latin typeface="微软雅黑"/>
-              </a:rPr>
-              <a:t>再据此做苏格拉底式答疑 —— 别直接给答案，帮我搞懂我卡在哪</a:t>
-            </a:r>
+            <a:endParaRPr sz="1600" b="0">
+              <a:solidFill>
+                <a:srgbClr val="1A1A1A"/>
+              </a:solidFill>
+              <a:latin typeface="微软雅黑" panose="020B0503020204020204" charset="-122"/>
+            </a:endParaRPr>
           </a:p>
         </p:txBody>
       </p:sp>
@@ -3445,8 +3386,8 @@
         </p:nvSpPr>
         <p:spPr>
           <a:xfrm>
-            <a:off x="758952" y="5257800"/>
-            <a:ext cx="1737360" cy="457200"/>
+            <a:off x="758952" y="4041648"/>
+            <a:ext cx="10424160" cy="457200"/>
           </a:xfrm>
           <a:prstGeom prst="rect">
             <a:avLst/>
@@ -3461,18 +3402,24 @@
           <a:p>
             <a:pPr algn="l">
               <a:lnSpc>
-                <a:spcPct val="135000"/>
+                <a:spcPct val="140000"/>
               </a:lnSpc>
             </a:pPr>
             <a:r>
-              <a:rPr sz="3000" b="1">
-                <a:solidFill>
-                  <a:srgbClr val="06B6D4"/>
-                </a:solidFill>
-                <a:latin typeface="Consolas"/>
+              <a:rPr sz="1600" b="1">
+                <a:solidFill>
+                  <a:srgbClr val="3B82F6"/>
+                </a:solidFill>
+                <a:latin typeface="微软雅黑" panose="020B0503020204020204" charset="-122"/>
               </a:rPr>
-              <a:t>3</a:t>
-            </a:r>
+              <a:t>别直接给答案，帮我搞懂我卡在哪。</a:t>
+            </a:r>
+            <a:endParaRPr sz="1600" b="1">
+              <a:solidFill>
+                <a:srgbClr val="3B82F6"/>
+              </a:solidFill>
+              <a:latin typeface="微软雅黑" panose="020B0503020204020204" charset="-122"/>
+            </a:endParaRPr>
           </a:p>
         </p:txBody>
       </p:sp>
@@ -3484,8 +3431,8 @@
         </p:nvSpPr>
         <p:spPr>
           <a:xfrm>
-            <a:off x="758952" y="5742432"/>
-            <a:ext cx="1737360" cy="320040"/>
+            <a:off x="758952" y="4846320"/>
+            <a:ext cx="1463040" cy="457200"/>
           </a:xfrm>
           <a:prstGeom prst="rect">
             <a:avLst/>
@@ -3500,18 +3447,24 @@
           <a:p>
             <a:pPr algn="l">
               <a:lnSpc>
-                <a:spcPct val="135000"/>
+                <a:spcPct val="140000"/>
               </a:lnSpc>
             </a:pPr>
             <a:r>
-              <a:rPr sz="1300" b="0">
-                <a:solidFill>
-                  <a:srgbClr val="64748B"/>
-                </a:solidFill>
-                <a:latin typeface="微软雅黑"/>
+              <a:rPr sz="2700" b="1">
+                <a:solidFill>
+                  <a:srgbClr val="06B6D4"/>
+                </a:solidFill>
+                <a:latin typeface="Consolas" panose="020B0609020204030204"/>
               </a:rPr>
-              <a:t>阶段管线</a:t>
-            </a:r>
+              <a:t>3</a:t>
+            </a:r>
+            <a:endParaRPr sz="2700" b="1">
+              <a:solidFill>
+                <a:srgbClr val="06B6D4"/>
+              </a:solidFill>
+              <a:latin typeface="Consolas" panose="020B0609020204030204"/>
+            </a:endParaRPr>
           </a:p>
         </p:txBody>
       </p:sp>
@@ -3523,8 +3476,8 @@
         </p:nvSpPr>
         <p:spPr>
           <a:xfrm>
-            <a:off x="2679192" y="5257800"/>
-            <a:ext cx="1737360" cy="457200"/>
+            <a:off x="758952" y="5321808"/>
+            <a:ext cx="1463040" cy="274320"/>
           </a:xfrm>
           <a:prstGeom prst="rect">
             <a:avLst/>
@@ -3539,18 +3492,24 @@
           <a:p>
             <a:pPr algn="l">
               <a:lnSpc>
-                <a:spcPct val="135000"/>
+                <a:spcPct val="140000"/>
               </a:lnSpc>
             </a:pPr>
             <a:r>
-              <a:rPr sz="3000" b="1">
-                <a:solidFill>
-                  <a:srgbClr val="06B6D4"/>
-                </a:solidFill>
-                <a:latin typeface="Consolas"/>
+              <a:rPr sz="1100" b="0">
+                <a:solidFill>
+                  <a:srgbClr val="64748B"/>
+                </a:solidFill>
+                <a:latin typeface="微软雅黑" panose="020B0503020204020204" charset="-122"/>
               </a:rPr>
-              <a:t>213</a:t>
-            </a:r>
+              <a:t>阶段管线</a:t>
+            </a:r>
+            <a:endParaRPr sz="1100" b="0">
+              <a:solidFill>
+                <a:srgbClr val="64748B"/>
+              </a:solidFill>
+              <a:latin typeface="微软雅黑" panose="020B0503020204020204" charset="-122"/>
+            </a:endParaRPr>
           </a:p>
         </p:txBody>
       </p:sp>
@@ -3562,8 +3521,8 @@
         </p:nvSpPr>
         <p:spPr>
           <a:xfrm>
-            <a:off x="2679192" y="5742432"/>
-            <a:ext cx="1737360" cy="320040"/>
+            <a:off x="2359152" y="4846320"/>
+            <a:ext cx="1463040" cy="457200"/>
           </a:xfrm>
           <a:prstGeom prst="rect">
             <a:avLst/>
@@ -3578,18 +3537,24 @@
           <a:p>
             <a:pPr algn="l">
               <a:lnSpc>
-                <a:spcPct val="135000"/>
+                <a:spcPct val="140000"/>
               </a:lnSpc>
             </a:pPr>
             <a:r>
-              <a:rPr sz="1300" b="0">
-                <a:solidFill>
-                  <a:srgbClr val="64748B"/>
-                </a:solidFill>
-                <a:latin typeface="微软雅黑"/>
+              <a:rPr sz="2700" b="1">
+                <a:solidFill>
+                  <a:srgbClr val="06B6D4"/>
+                </a:solidFill>
+                <a:latin typeface="Consolas" panose="020B0609020204030204"/>
               </a:rPr>
-              <a:t>知识点</a:t>
-            </a:r>
+              <a:t>213</a:t>
+            </a:r>
+            <a:endParaRPr sz="2700" b="1">
+              <a:solidFill>
+                <a:srgbClr val="06B6D4"/>
+              </a:solidFill>
+              <a:latin typeface="Consolas" panose="020B0609020204030204"/>
+            </a:endParaRPr>
           </a:p>
         </p:txBody>
       </p:sp>
@@ -3601,8 +3566,8 @@
         </p:nvSpPr>
         <p:spPr>
           <a:xfrm>
-            <a:off x="4599432" y="5257800"/>
-            <a:ext cx="1737360" cy="457200"/>
+            <a:off x="2359152" y="5321808"/>
+            <a:ext cx="1463040" cy="274320"/>
           </a:xfrm>
           <a:prstGeom prst="rect">
             <a:avLst/>
@@ -3617,18 +3582,24 @@
           <a:p>
             <a:pPr algn="l">
               <a:lnSpc>
-                <a:spcPct val="135000"/>
+                <a:spcPct val="140000"/>
               </a:lnSpc>
             </a:pPr>
             <a:r>
-              <a:rPr sz="3000" b="1">
-                <a:solidFill>
-                  <a:srgbClr val="06B6D4"/>
-                </a:solidFill>
-                <a:latin typeface="Consolas"/>
+              <a:rPr sz="1100" b="0">
+                <a:solidFill>
+                  <a:srgbClr val="64748B"/>
+                </a:solidFill>
+                <a:latin typeface="微软雅黑" panose="020B0503020204020204" charset="-122"/>
               </a:rPr>
-              <a:t>0</a:t>
-            </a:r>
+              <a:t>知识点</a:t>
+            </a:r>
+            <a:endParaRPr sz="1100" b="0">
+              <a:solidFill>
+                <a:srgbClr val="64748B"/>
+              </a:solidFill>
+              <a:latin typeface="微软雅黑" panose="020B0503020204020204" charset="-122"/>
+            </a:endParaRPr>
           </a:p>
         </p:txBody>
       </p:sp>
@@ -3640,8 +3611,8 @@
         </p:nvSpPr>
         <p:spPr>
           <a:xfrm>
-            <a:off x="4599432" y="5742432"/>
-            <a:ext cx="1737360" cy="320040"/>
+            <a:off x="3959352" y="4846320"/>
+            <a:ext cx="1463040" cy="457200"/>
           </a:xfrm>
           <a:prstGeom prst="rect">
             <a:avLst/>
@@ -3656,18 +3627,24 @@
           <a:p>
             <a:pPr algn="l">
               <a:lnSpc>
-                <a:spcPct val="135000"/>
+                <a:spcPct val="140000"/>
               </a:lnSpc>
             </a:pPr>
             <a:r>
-              <a:rPr sz="1300" b="0">
-                <a:solidFill>
-                  <a:srgbClr val="64748B"/>
-                </a:solidFill>
-                <a:latin typeface="微软雅黑"/>
+              <a:rPr sz="2700" b="1">
+                <a:solidFill>
+                  <a:srgbClr val="06B6D4"/>
+                </a:solidFill>
+                <a:latin typeface="Consolas" panose="020B0609020204030204"/>
               </a:rPr>
-              <a:t>依赖图环数</a:t>
-            </a:r>
+              <a:t>229</a:t>
+            </a:r>
+            <a:endParaRPr sz="2700" b="1">
+              <a:solidFill>
+                <a:srgbClr val="06B6D4"/>
+              </a:solidFill>
+              <a:latin typeface="Consolas" panose="020B0609020204030204"/>
+            </a:endParaRPr>
           </a:p>
         </p:txBody>
       </p:sp>
@@ -3679,8 +3656,8 @@
         </p:nvSpPr>
         <p:spPr>
           <a:xfrm>
-            <a:off x="8259775" y="5943600"/>
-            <a:ext cx="3200400" cy="365760"/>
+            <a:off x="3959352" y="5321808"/>
+            <a:ext cx="1463040" cy="274320"/>
           </a:xfrm>
           <a:prstGeom prst="rect">
             <a:avLst/>
@@ -3693,20 +3670,201 @@
           </a:bodyPr>
           <a:lstStyle/>
           <a:p>
-            <a:pPr algn="r">
+            <a:pPr algn="l">
               <a:lnSpc>
-                <a:spcPct val="135000"/>
+                <a:spcPct val="140000"/>
               </a:lnSpc>
             </a:pPr>
             <a:r>
+              <a:rPr sz="1100" b="0">
+                <a:solidFill>
+                  <a:srgbClr val="64748B"/>
+                </a:solidFill>
+                <a:latin typeface="微软雅黑" panose="020B0503020204020204" charset="-122"/>
+              </a:rPr>
+              <a:t>依赖边</a:t>
+            </a:r>
+            <a:endParaRPr sz="1100" b="0">
+              <a:solidFill>
+                <a:srgbClr val="64748B"/>
+              </a:solidFill>
+              <a:latin typeface="微软雅黑" panose="020B0503020204020204" charset="-122"/>
+            </a:endParaRPr>
+          </a:p>
+        </p:txBody>
+      </p:sp>
+      <p:sp>
+        <p:nvSpPr>
+          <p:cNvPr id="17" name="TextBox 16"/>
+          <p:cNvSpPr txBox="1"/>
+          <p:nvPr/>
+        </p:nvSpPr>
+        <p:spPr>
+          <a:xfrm>
+            <a:off x="5559552" y="4846320"/>
+            <a:ext cx="1463040" cy="457200"/>
+          </a:xfrm>
+          <a:prstGeom prst="rect">
+            <a:avLst/>
+          </a:prstGeom>
+          <a:noFill/>
+        </p:spPr>
+        <p:txBody>
+          <a:bodyPr wrap="square">
+            <a:spAutoFit/>
+          </a:bodyPr>
+          <a:lstStyle/>
+          <a:p>
+            <a:pPr algn="l">
+              <a:lnSpc>
+                <a:spcPct val="140000"/>
+              </a:lnSpc>
+            </a:pPr>
+            <a:r>
+              <a:rPr sz="2700" b="1">
+                <a:solidFill>
+                  <a:srgbClr val="06B6D4"/>
+                </a:solidFill>
+                <a:latin typeface="Consolas" panose="020B0609020204030204"/>
+              </a:rPr>
+              <a:t>0</a:t>
+            </a:r>
+            <a:endParaRPr sz="2700" b="1">
+              <a:solidFill>
+                <a:srgbClr val="06B6D4"/>
+              </a:solidFill>
+              <a:latin typeface="Consolas" panose="020B0609020204030204"/>
+            </a:endParaRPr>
+          </a:p>
+        </p:txBody>
+      </p:sp>
+      <p:sp>
+        <p:nvSpPr>
+          <p:cNvPr id="18" name="TextBox 17"/>
+          <p:cNvSpPr txBox="1"/>
+          <p:nvPr/>
+        </p:nvSpPr>
+        <p:spPr>
+          <a:xfrm>
+            <a:off x="5559552" y="5321808"/>
+            <a:ext cx="1463040" cy="274320"/>
+          </a:xfrm>
+          <a:prstGeom prst="rect">
+            <a:avLst/>
+          </a:prstGeom>
+          <a:noFill/>
+        </p:spPr>
+        <p:txBody>
+          <a:bodyPr wrap="square">
+            <a:spAutoFit/>
+          </a:bodyPr>
+          <a:lstStyle/>
+          <a:p>
+            <a:pPr algn="l">
+              <a:lnSpc>
+                <a:spcPct val="140000"/>
+              </a:lnSpc>
+            </a:pPr>
+            <a:r>
+              <a:rPr sz="1100" b="0">
+                <a:solidFill>
+                  <a:srgbClr val="64748B"/>
+                </a:solidFill>
+                <a:latin typeface="微软雅黑" panose="020B0503020204020204" charset="-122"/>
+              </a:rPr>
+              <a:t>依赖图环数</a:t>
+            </a:r>
+            <a:endParaRPr sz="1100" b="0">
+              <a:solidFill>
+                <a:srgbClr val="64748B"/>
+              </a:solidFill>
+              <a:latin typeface="微软雅黑" panose="020B0503020204020204" charset="-122"/>
+            </a:endParaRPr>
+          </a:p>
+        </p:txBody>
+      </p:sp>
+      <p:sp>
+        <p:nvSpPr>
+          <p:cNvPr id="19" name="TextBox 18"/>
+          <p:cNvSpPr txBox="1"/>
+          <p:nvPr/>
+        </p:nvSpPr>
+        <p:spPr>
+          <a:xfrm>
+            <a:off x="758952" y="5989320"/>
+            <a:ext cx="10698480" cy="349250"/>
+          </a:xfrm>
+          <a:prstGeom prst="rect">
+            <a:avLst/>
+          </a:prstGeom>
+          <a:noFill/>
+        </p:spPr>
+        <p:txBody>
+          <a:bodyPr wrap="square">
+            <a:spAutoFit/>
+          </a:bodyPr>
+          <a:lstStyle/>
+          <a:p>
+            <a:pPr algn="l">
+              <a:lnSpc>
+                <a:spcPct val="140000"/>
+              </a:lnSpc>
+            </a:pPr>
+            <a:r>
               <a:rPr sz="1200" b="0">
                 <a:solidFill>
                   <a:srgbClr val="64748B"/>
                 </a:solidFill>
-                <a:latin typeface="微软雅黑"/>
+                <a:latin typeface="微软雅黑" panose="020B0503020204020204" charset="-122"/>
               </a:rPr>
-              <a:t>豆包战队 · 深圳大学计算机与软件学院</a:t>
-            </a:r>
+              <a:t>深圳大学计算机与软件学院 · 人工智能专业</a:t>
+            </a:r>
+            <a:r>
+              <a:rPr lang="en-US" sz="1200" b="0">
+                <a:solidFill>
+                  <a:srgbClr val="64748B"/>
+                </a:solidFill>
+                <a:latin typeface="微软雅黑" panose="020B0503020204020204" charset="-122"/>
+              </a:rPr>
+              <a:t> </a:t>
+            </a:r>
+            <a:r>
+              <a:rPr sz="1200">
+                <a:solidFill>
+                  <a:srgbClr val="64748B"/>
+                </a:solidFill>
+                <a:latin typeface="微软雅黑" panose="020B0503020204020204" charset="-122"/>
+                <a:sym typeface="+mn-ea"/>
+              </a:rPr>
+              <a:t>·</a:t>
+            </a:r>
+            <a:r>
+              <a:rPr lang="en-US" sz="1200">
+                <a:solidFill>
+                  <a:srgbClr val="64748B"/>
+                </a:solidFill>
+                <a:latin typeface="微软雅黑" panose="020B0503020204020204" charset="-122"/>
+                <a:sym typeface="+mn-ea"/>
+              </a:rPr>
+              <a:t> </a:t>
+            </a:r>
+            <a:r>
+              <a:rPr lang="zh-CN" sz="1200">
+                <a:solidFill>
+                  <a:srgbClr val="64748B"/>
+                </a:solidFill>
+                <a:latin typeface="微软雅黑" panose="020B0503020204020204" charset="-122"/>
+                <a:sym typeface="+mn-ea"/>
+              </a:rPr>
+              <a:t>豆包战队</a:t>
+            </a:r>
+            <a:endParaRPr lang="zh-CN" sz="1200" b="0">
+              <a:solidFill>
+                <a:srgbClr val="64748B"/>
+              </a:solidFill>
+              <a:latin typeface="微软雅黑" panose="020B0503020204020204" charset="-122"/>
+              <a:sym typeface="+mn-ea"/>
+            </a:endParaRPr>
           </a:p>
         </p:txBody>
       </p:sp>
@@ -3719,7 +3877,7 @@
 </file>
 
 <file path=ppt/slides/slide2.xml><?xml version="1.0" encoding="utf-8"?>
-<p:sld xmlns:a="http://schemas.openxmlformats.org/drawingml/2006/main" xmlns:p="http://schemas.openxmlformats.org/presentationml/2006/main" xmlns:r="http://schemas.openxmlformats.org/officeDocument/2006/relationships">
+<p:sld xmlns:a="http://schemas.openxmlformats.org/drawingml/2006/main" xmlns:r="http://schemas.openxmlformats.org/officeDocument/2006/relationships" xmlns:p="http://schemas.openxmlformats.org/presentationml/2006/main">
   <p:cSld>
     <p:spTree>
       <p:nvGrpSpPr>
@@ -3736,8 +3894,8 @@
         </p:nvSpPr>
         <p:spPr>
           <a:xfrm>
-            <a:off x="758952" y="384048"/>
-            <a:ext cx="10058400" cy="274320"/>
+            <a:off x="758952" y="310896"/>
+            <a:ext cx="10058400" cy="256032"/>
           </a:xfrm>
           <a:prstGeom prst="rect">
             <a:avLst/>
@@ -3752,18 +3910,24 @@
           <a:p>
             <a:pPr algn="l">
               <a:lnSpc>
-                <a:spcPct val="135000"/>
+                <a:spcPct val="140000"/>
               </a:lnSpc>
             </a:pPr>
             <a:r>
-              <a:rPr sz="1100" b="1">
+              <a:rPr sz="1000" b="1">
                 <a:solidFill>
                   <a:srgbClr val="06B6D4"/>
                 </a:solidFill>
-                <a:latin typeface="微软雅黑"/>
+                <a:latin typeface="微软雅黑" panose="020B0503020204020204" charset="-122"/>
               </a:rPr>
-              <a:t>DESIGN · 四层架构</a:t>
-            </a:r>
+              <a:t>PROBLEM → PIPELINE</a:t>
+            </a:r>
+            <a:endParaRPr sz="1000" b="1">
+              <a:solidFill>
+                <a:srgbClr val="06B6D4"/>
+              </a:solidFill>
+              <a:latin typeface="微软雅黑" panose="020B0503020204020204" charset="-122"/>
+            </a:endParaRPr>
           </a:p>
         </p:txBody>
       </p:sp>
@@ -3775,8 +3939,8 @@
         </p:nvSpPr>
         <p:spPr>
           <a:xfrm>
-            <a:off x="758952" y="658368"/>
-            <a:ext cx="10698480" cy="685800"/>
+            <a:off x="758952" y="548640"/>
+            <a:ext cx="10698480" cy="530352"/>
           </a:xfrm>
           <a:prstGeom prst="rect">
             <a:avLst/>
@@ -3791,18 +3955,24 @@
           <a:p>
             <a:pPr algn="l">
               <a:lnSpc>
-                <a:spcPct val="135000"/>
+                <a:spcPct val="140000"/>
               </a:lnSpc>
             </a:pPr>
             <a:r>
-              <a:rPr sz="3000" b="1">
+              <a:rPr sz="2700" b="1">
                 <a:solidFill>
                   <a:srgbClr val="0F172A"/>
                 </a:solidFill>
-                <a:latin typeface="微软雅黑"/>
+                <a:latin typeface="微软雅黑" panose="020B0503020204020204" charset="-122"/>
               </a:rPr>
-              <a:t>设计思路：四层，逐层收敛不确定性</a:t>
-            </a:r>
+              <a:t>学生的三个断点，对应我们做三件事</a:t>
+            </a:r>
+            <a:endParaRPr sz="2700" b="1">
+              <a:solidFill>
+                <a:srgbClr val="0F172A"/>
+              </a:solidFill>
+              <a:latin typeface="微软雅黑" panose="020B0503020204020204" charset="-122"/>
+            </a:endParaRPr>
           </a:p>
         </p:txBody>
       </p:sp>
@@ -3815,7 +3985,7 @@
         <p:spPr>
           <a:xfrm>
             <a:off x="758952" y="1481328"/>
-            <a:ext cx="10698480" cy="658368"/>
+            <a:ext cx="3401568" cy="1298448"/>
           </a:xfrm>
           <a:prstGeom prst="rect">
             <a:avLst/>
@@ -3859,7 +4029,963 @@
         <p:spPr>
           <a:xfrm>
             <a:off x="758952" y="1481328"/>
-            <a:ext cx="45720" cy="658368"/>
+            <a:ext cx="3401568" cy="45720"/>
+          </a:xfrm>
+          <a:prstGeom prst="rect">
+            <a:avLst/>
+          </a:prstGeom>
+          <a:solidFill>
+            <a:srgbClr val="3B82F6"/>
+          </a:solidFill>
+          <a:ln>
+            <a:noFill/>
+          </a:ln>
+          <a:effectLst/>
+        </p:spPr>
+        <p:style>
+          <a:lnRef idx="1">
+            <a:schemeClr val="accent1"/>
+          </a:lnRef>
+          <a:fillRef idx="3">
+            <a:schemeClr val="accent1"/>
+          </a:fillRef>
+          <a:effectRef idx="2">
+            <a:schemeClr val="accent1"/>
+          </a:effectRef>
+          <a:fontRef idx="minor">
+            <a:schemeClr val="lt1"/>
+          </a:fontRef>
+        </p:style>
+        <p:txBody>
+          <a:bodyPr rtlCol="0" anchor="ctr"/>
+          <a:lstStyle/>
+          <a:p>
+            <a:pPr algn="ctr"/>
+          </a:p>
+        </p:txBody>
+      </p:sp>
+      <p:sp>
+        <p:nvSpPr>
+          <p:cNvPr id="6" name="TextBox 5"/>
+          <p:cNvSpPr txBox="1"/>
+          <p:nvPr/>
+        </p:nvSpPr>
+        <p:spPr>
+          <a:xfrm>
+            <a:off x="941832" y="1627632"/>
+            <a:ext cx="3017520" cy="365760"/>
+          </a:xfrm>
+          <a:prstGeom prst="rect">
+            <a:avLst/>
+          </a:prstGeom>
+          <a:noFill/>
+        </p:spPr>
+        <p:txBody>
+          <a:bodyPr wrap="square">
+            <a:spAutoFit/>
+          </a:bodyPr>
+          <a:lstStyle/>
+          <a:p>
+            <a:pPr algn="l">
+              <a:lnSpc>
+                <a:spcPct val="140000"/>
+              </a:lnSpc>
+            </a:pPr>
+            <a:r>
+              <a:rPr sz="1600" b="1">
+                <a:solidFill>
+                  <a:srgbClr val="0F172A"/>
+                </a:solidFill>
+                <a:latin typeface="微软雅黑" panose="020B0503020204020204" charset="-122"/>
+              </a:rPr>
+              <a:t>读不进去</a:t>
+            </a:r>
+            <a:endParaRPr sz="1600" b="1">
+              <a:solidFill>
+                <a:srgbClr val="0F172A"/>
+              </a:solidFill>
+              <a:latin typeface="微软雅黑" panose="020B0503020204020204" charset="-122"/>
+            </a:endParaRPr>
+          </a:p>
+        </p:txBody>
+      </p:sp>
+      <p:sp>
+        <p:nvSpPr>
+          <p:cNvPr id="7" name="TextBox 6"/>
+          <p:cNvSpPr txBox="1"/>
+          <p:nvPr/>
+        </p:nvSpPr>
+        <p:spPr>
+          <a:xfrm>
+            <a:off x="941832" y="2029968"/>
+            <a:ext cx="3017520" cy="685800"/>
+          </a:xfrm>
+          <a:prstGeom prst="rect">
+            <a:avLst/>
+          </a:prstGeom>
+          <a:noFill/>
+        </p:spPr>
+        <p:txBody>
+          <a:bodyPr wrap="square">
+            <a:spAutoFit/>
+          </a:bodyPr>
+          <a:lstStyle/>
+          <a:p>
+            <a:pPr algn="l">
+              <a:lnSpc>
+                <a:spcPct val="150000"/>
+              </a:lnSpc>
+            </a:pPr>
+            <a:r>
+              <a:rPr sz="1200" b="0">
+                <a:solidFill>
+                  <a:srgbClr val="64748B"/>
+                </a:solidFill>
+                <a:latin typeface="微软雅黑" panose="020B0503020204020204" charset="-122"/>
+              </a:rPr>
+              <a:t>PDF / 板书照片 / PPT 混着</a:t>
+            </a:r>
+            <a:endParaRPr sz="1200" b="0">
+              <a:solidFill>
+                <a:srgbClr val="64748B"/>
+              </a:solidFill>
+              <a:latin typeface="微软雅黑" panose="020B0503020204020204" charset="-122"/>
+            </a:endParaRPr>
+          </a:p>
+          <a:p>
+            <a:pPr algn="l">
+              <a:lnSpc>
+                <a:spcPct val="150000"/>
+              </a:lnSpc>
+            </a:pPr>
+            <a:r>
+              <a:rPr sz="1200" b="0">
+                <a:solidFill>
+                  <a:srgbClr val="64748B"/>
+                </a:solidFill>
+                <a:latin typeface="微软雅黑" panose="020B0503020204020204" charset="-122"/>
+              </a:rPr>
+              <a:t>格式不同，检索不到一起</a:t>
+            </a:r>
+            <a:endParaRPr sz="1200" b="0">
+              <a:solidFill>
+                <a:srgbClr val="64748B"/>
+              </a:solidFill>
+              <a:latin typeface="微软雅黑" panose="020B0503020204020204" charset="-122"/>
+            </a:endParaRPr>
+          </a:p>
+        </p:txBody>
+      </p:sp>
+      <p:sp>
+        <p:nvSpPr>
+          <p:cNvPr id="8" name="Rectangle 7"/>
+          <p:cNvSpPr/>
+          <p:nvPr/>
+        </p:nvSpPr>
+        <p:spPr>
+          <a:xfrm>
+            <a:off x="4343400" y="1481328"/>
+            <a:ext cx="3401568" cy="1298448"/>
+          </a:xfrm>
+          <a:prstGeom prst="rect">
+            <a:avLst/>
+          </a:prstGeom>
+          <a:solidFill>
+            <a:srgbClr val="F8FAFC"/>
+          </a:solidFill>
+          <a:ln>
+            <a:noFill/>
+          </a:ln>
+          <a:effectLst/>
+        </p:spPr>
+        <p:style>
+          <a:lnRef idx="1">
+            <a:schemeClr val="accent1"/>
+          </a:lnRef>
+          <a:fillRef idx="3">
+            <a:schemeClr val="accent1"/>
+          </a:fillRef>
+          <a:effectRef idx="2">
+            <a:schemeClr val="accent1"/>
+          </a:effectRef>
+          <a:fontRef idx="minor">
+            <a:schemeClr val="lt1"/>
+          </a:fontRef>
+        </p:style>
+        <p:txBody>
+          <a:bodyPr rtlCol="0" anchor="ctr"/>
+          <a:lstStyle/>
+          <a:p>
+            <a:pPr algn="ctr"/>
+          </a:p>
+        </p:txBody>
+      </p:sp>
+      <p:sp>
+        <p:nvSpPr>
+          <p:cNvPr id="9" name="Rectangle 8"/>
+          <p:cNvSpPr/>
+          <p:nvPr/>
+        </p:nvSpPr>
+        <p:spPr>
+          <a:xfrm>
+            <a:off x="4343400" y="1481328"/>
+            <a:ext cx="3401568" cy="45720"/>
+          </a:xfrm>
+          <a:prstGeom prst="rect">
+            <a:avLst/>
+          </a:prstGeom>
+          <a:solidFill>
+            <a:srgbClr val="3B82F6"/>
+          </a:solidFill>
+          <a:ln>
+            <a:noFill/>
+          </a:ln>
+          <a:effectLst/>
+        </p:spPr>
+        <p:style>
+          <a:lnRef idx="1">
+            <a:schemeClr val="accent1"/>
+          </a:lnRef>
+          <a:fillRef idx="3">
+            <a:schemeClr val="accent1"/>
+          </a:fillRef>
+          <a:effectRef idx="2">
+            <a:schemeClr val="accent1"/>
+          </a:effectRef>
+          <a:fontRef idx="minor">
+            <a:schemeClr val="lt1"/>
+          </a:fontRef>
+        </p:style>
+        <p:txBody>
+          <a:bodyPr rtlCol="0" anchor="ctr"/>
+          <a:lstStyle/>
+          <a:p>
+            <a:pPr algn="ctr"/>
+          </a:p>
+        </p:txBody>
+      </p:sp>
+      <p:sp>
+        <p:nvSpPr>
+          <p:cNvPr id="10" name="TextBox 9"/>
+          <p:cNvSpPr txBox="1"/>
+          <p:nvPr/>
+        </p:nvSpPr>
+        <p:spPr>
+          <a:xfrm>
+            <a:off x="4526280" y="1627632"/>
+            <a:ext cx="3017520" cy="365760"/>
+          </a:xfrm>
+          <a:prstGeom prst="rect">
+            <a:avLst/>
+          </a:prstGeom>
+          <a:noFill/>
+        </p:spPr>
+        <p:txBody>
+          <a:bodyPr wrap="square">
+            <a:spAutoFit/>
+          </a:bodyPr>
+          <a:lstStyle/>
+          <a:p>
+            <a:pPr algn="l">
+              <a:lnSpc>
+                <a:spcPct val="140000"/>
+              </a:lnSpc>
+            </a:pPr>
+            <a:r>
+              <a:rPr sz="1600" b="1">
+                <a:solidFill>
+                  <a:srgbClr val="0F172A"/>
+                </a:solidFill>
+                <a:latin typeface="微软雅黑" panose="020B0503020204020204" charset="-122"/>
+              </a:rPr>
+              <a:t>理不清</a:t>
+            </a:r>
+            <a:endParaRPr sz="1600" b="1">
+              <a:solidFill>
+                <a:srgbClr val="0F172A"/>
+              </a:solidFill>
+              <a:latin typeface="微软雅黑" panose="020B0503020204020204" charset="-122"/>
+            </a:endParaRPr>
+          </a:p>
+        </p:txBody>
+      </p:sp>
+      <p:sp>
+        <p:nvSpPr>
+          <p:cNvPr id="11" name="TextBox 10"/>
+          <p:cNvSpPr txBox="1"/>
+          <p:nvPr/>
+        </p:nvSpPr>
+        <p:spPr>
+          <a:xfrm>
+            <a:off x="4526280" y="2029968"/>
+            <a:ext cx="3017520" cy="685800"/>
+          </a:xfrm>
+          <a:prstGeom prst="rect">
+            <a:avLst/>
+          </a:prstGeom>
+          <a:noFill/>
+        </p:spPr>
+        <p:txBody>
+          <a:bodyPr wrap="square">
+            <a:spAutoFit/>
+          </a:bodyPr>
+          <a:lstStyle/>
+          <a:p>
+            <a:pPr algn="l">
+              <a:lnSpc>
+                <a:spcPct val="150000"/>
+              </a:lnSpc>
+            </a:pPr>
+            <a:r>
+              <a:rPr sz="1200" b="0">
+                <a:solidFill>
+                  <a:srgbClr val="64748B"/>
+                </a:solidFill>
+                <a:latin typeface="微软雅黑" panose="020B0503020204020204" charset="-122"/>
+              </a:rPr>
+              <a:t>材料是线性的，知识有依赖</a:t>
+            </a:r>
+            <a:endParaRPr sz="1200" b="0">
+              <a:solidFill>
+                <a:srgbClr val="64748B"/>
+              </a:solidFill>
+              <a:latin typeface="微软雅黑" panose="020B0503020204020204" charset="-122"/>
+            </a:endParaRPr>
+          </a:p>
+          <a:p>
+            <a:pPr algn="l">
+              <a:lnSpc>
+                <a:spcPct val="150000"/>
+              </a:lnSpc>
+            </a:pPr>
+            <a:r>
+              <a:rPr sz="1200" b="0">
+                <a:solidFill>
+                  <a:srgbClr val="64748B"/>
+                </a:solidFill>
+                <a:latin typeface="微软雅黑" panose="020B0503020204020204" charset="-122"/>
+              </a:rPr>
+              <a:t>学生不知道缺的是哪一环</a:t>
+            </a:r>
+            <a:endParaRPr sz="1200" b="0">
+              <a:solidFill>
+                <a:srgbClr val="64748B"/>
+              </a:solidFill>
+              <a:latin typeface="微软雅黑" panose="020B0503020204020204" charset="-122"/>
+            </a:endParaRPr>
+          </a:p>
+        </p:txBody>
+      </p:sp>
+      <p:sp>
+        <p:nvSpPr>
+          <p:cNvPr id="12" name="Rectangle 11"/>
+          <p:cNvSpPr/>
+          <p:nvPr/>
+        </p:nvSpPr>
+        <p:spPr>
+          <a:xfrm>
+            <a:off x="7927848" y="1481328"/>
+            <a:ext cx="3401568" cy="1298448"/>
+          </a:xfrm>
+          <a:prstGeom prst="rect">
+            <a:avLst/>
+          </a:prstGeom>
+          <a:solidFill>
+            <a:srgbClr val="F8FAFC"/>
+          </a:solidFill>
+          <a:ln>
+            <a:noFill/>
+          </a:ln>
+          <a:effectLst/>
+        </p:spPr>
+        <p:style>
+          <a:lnRef idx="1">
+            <a:schemeClr val="accent1"/>
+          </a:lnRef>
+          <a:fillRef idx="3">
+            <a:schemeClr val="accent1"/>
+          </a:fillRef>
+          <a:effectRef idx="2">
+            <a:schemeClr val="accent1"/>
+          </a:effectRef>
+          <a:fontRef idx="minor">
+            <a:schemeClr val="lt1"/>
+          </a:fontRef>
+        </p:style>
+        <p:txBody>
+          <a:bodyPr rtlCol="0" anchor="ctr"/>
+          <a:lstStyle/>
+          <a:p>
+            <a:pPr algn="ctr"/>
+          </a:p>
+        </p:txBody>
+      </p:sp>
+      <p:sp>
+        <p:nvSpPr>
+          <p:cNvPr id="13" name="Rectangle 12"/>
+          <p:cNvSpPr/>
+          <p:nvPr/>
+        </p:nvSpPr>
+        <p:spPr>
+          <a:xfrm>
+            <a:off x="7927848" y="1481328"/>
+            <a:ext cx="3401568" cy="45720"/>
+          </a:xfrm>
+          <a:prstGeom prst="rect">
+            <a:avLst/>
+          </a:prstGeom>
+          <a:solidFill>
+            <a:srgbClr val="3B82F6"/>
+          </a:solidFill>
+          <a:ln>
+            <a:noFill/>
+          </a:ln>
+          <a:effectLst/>
+        </p:spPr>
+        <p:style>
+          <a:lnRef idx="1">
+            <a:schemeClr val="accent1"/>
+          </a:lnRef>
+          <a:fillRef idx="3">
+            <a:schemeClr val="accent1"/>
+          </a:fillRef>
+          <a:effectRef idx="2">
+            <a:schemeClr val="accent1"/>
+          </a:effectRef>
+          <a:fontRef idx="minor">
+            <a:schemeClr val="lt1"/>
+          </a:fontRef>
+        </p:style>
+        <p:txBody>
+          <a:bodyPr rtlCol="0" anchor="ctr"/>
+          <a:lstStyle/>
+          <a:p>
+            <a:pPr algn="ctr"/>
+          </a:p>
+        </p:txBody>
+      </p:sp>
+      <p:sp>
+        <p:nvSpPr>
+          <p:cNvPr id="14" name="TextBox 13"/>
+          <p:cNvSpPr txBox="1"/>
+          <p:nvPr/>
+        </p:nvSpPr>
+        <p:spPr>
+          <a:xfrm>
+            <a:off x="8110728" y="1627632"/>
+            <a:ext cx="3017520" cy="365760"/>
+          </a:xfrm>
+          <a:prstGeom prst="rect">
+            <a:avLst/>
+          </a:prstGeom>
+          <a:noFill/>
+        </p:spPr>
+        <p:txBody>
+          <a:bodyPr wrap="square">
+            <a:spAutoFit/>
+          </a:bodyPr>
+          <a:lstStyle/>
+          <a:p>
+            <a:pPr algn="l">
+              <a:lnSpc>
+                <a:spcPct val="140000"/>
+              </a:lnSpc>
+            </a:pPr>
+            <a:r>
+              <a:rPr sz="1600" b="1">
+                <a:solidFill>
+                  <a:srgbClr val="0F172A"/>
+                </a:solidFill>
+                <a:latin typeface="微软雅黑" panose="020B0503020204020204" charset="-122"/>
+              </a:rPr>
+              <a:t>问不明白</a:t>
+            </a:r>
+            <a:endParaRPr sz="1600" b="1">
+              <a:solidFill>
+                <a:srgbClr val="0F172A"/>
+              </a:solidFill>
+              <a:latin typeface="微软雅黑" panose="020B0503020204020204" charset="-122"/>
+            </a:endParaRPr>
+          </a:p>
+        </p:txBody>
+      </p:sp>
+      <p:sp>
+        <p:nvSpPr>
+          <p:cNvPr id="15" name="TextBox 14"/>
+          <p:cNvSpPr txBox="1"/>
+          <p:nvPr/>
+        </p:nvSpPr>
+        <p:spPr>
+          <a:xfrm>
+            <a:off x="8110728" y="2029968"/>
+            <a:ext cx="3017520" cy="685800"/>
+          </a:xfrm>
+          <a:prstGeom prst="rect">
+            <a:avLst/>
+          </a:prstGeom>
+          <a:noFill/>
+        </p:spPr>
+        <p:txBody>
+          <a:bodyPr wrap="square">
+            <a:spAutoFit/>
+          </a:bodyPr>
+          <a:lstStyle/>
+          <a:p>
+            <a:pPr algn="l">
+              <a:lnSpc>
+                <a:spcPct val="150000"/>
+              </a:lnSpc>
+            </a:pPr>
+            <a:r>
+              <a:rPr sz="1200" b="0">
+                <a:solidFill>
+                  <a:srgbClr val="64748B"/>
+                </a:solidFill>
+                <a:latin typeface="微软雅黑" panose="020B0503020204020204" charset="-122"/>
+              </a:rPr>
+              <a:t>问答工具直接给答案</a:t>
+            </a:r>
+            <a:endParaRPr sz="1200" b="0">
+              <a:solidFill>
+                <a:srgbClr val="64748B"/>
+              </a:solidFill>
+              <a:latin typeface="微软雅黑" panose="020B0503020204020204" charset="-122"/>
+            </a:endParaRPr>
+          </a:p>
+          <a:p>
+            <a:pPr algn="l">
+              <a:lnSpc>
+                <a:spcPct val="150000"/>
+              </a:lnSpc>
+            </a:pPr>
+            <a:r>
+              <a:rPr sz="1200" b="0">
+                <a:solidFill>
+                  <a:srgbClr val="64748B"/>
+                </a:solidFill>
+                <a:latin typeface="微软雅黑" panose="020B0503020204020204" charset="-122"/>
+              </a:rPr>
+              <a:t>记住了这一步，还是不会下一步</a:t>
+            </a:r>
+            <a:endParaRPr sz="1200" b="0">
+              <a:solidFill>
+                <a:srgbClr val="64748B"/>
+              </a:solidFill>
+              <a:latin typeface="微软雅黑" panose="020B0503020204020204" charset="-122"/>
+            </a:endParaRPr>
+          </a:p>
+        </p:txBody>
+      </p:sp>
+      <p:sp>
+        <p:nvSpPr>
+          <p:cNvPr id="16" name="Rectangle 15"/>
+          <p:cNvSpPr/>
+          <p:nvPr/>
+        </p:nvSpPr>
+        <p:spPr>
+          <a:xfrm>
+            <a:off x="758952" y="3017520"/>
+            <a:ext cx="10698480" cy="621792"/>
+          </a:xfrm>
+          <a:prstGeom prst="rect">
+            <a:avLst/>
+          </a:prstGeom>
+          <a:solidFill>
+            <a:srgbClr val="F8FAFC"/>
+          </a:solidFill>
+          <a:ln>
+            <a:noFill/>
+          </a:ln>
+          <a:effectLst/>
+        </p:spPr>
+        <p:style>
+          <a:lnRef idx="1">
+            <a:schemeClr val="accent1"/>
+          </a:lnRef>
+          <a:fillRef idx="3">
+            <a:schemeClr val="accent1"/>
+          </a:fillRef>
+          <a:effectRef idx="2">
+            <a:schemeClr val="accent1"/>
+          </a:effectRef>
+          <a:fontRef idx="minor">
+            <a:schemeClr val="lt1"/>
+          </a:fontRef>
+        </p:style>
+        <p:txBody>
+          <a:bodyPr rtlCol="0" anchor="ctr"/>
+          <a:lstStyle/>
+          <a:p>
+            <a:pPr algn="ctr"/>
+          </a:p>
+        </p:txBody>
+      </p:sp>
+      <p:sp>
+        <p:nvSpPr>
+          <p:cNvPr id="17" name="Rectangle 16"/>
+          <p:cNvSpPr/>
+          <p:nvPr/>
+        </p:nvSpPr>
+        <p:spPr>
+          <a:xfrm>
+            <a:off x="758952" y="3017520"/>
+            <a:ext cx="45720" cy="621792"/>
+          </a:xfrm>
+          <a:prstGeom prst="rect">
+            <a:avLst/>
+          </a:prstGeom>
+          <a:solidFill>
+            <a:srgbClr val="3B82F6"/>
+          </a:solidFill>
+          <a:ln>
+            <a:noFill/>
+          </a:ln>
+          <a:effectLst/>
+        </p:spPr>
+        <p:style>
+          <a:lnRef idx="1">
+            <a:schemeClr val="accent1"/>
+          </a:lnRef>
+          <a:fillRef idx="3">
+            <a:schemeClr val="accent1"/>
+          </a:fillRef>
+          <a:effectRef idx="2">
+            <a:schemeClr val="accent1"/>
+          </a:effectRef>
+          <a:fontRef idx="minor">
+            <a:schemeClr val="lt1"/>
+          </a:fontRef>
+        </p:style>
+        <p:txBody>
+          <a:bodyPr rtlCol="0" anchor="ctr"/>
+          <a:lstStyle/>
+          <a:p>
+            <a:pPr algn="ctr"/>
+          </a:p>
+        </p:txBody>
+      </p:sp>
+      <p:sp>
+        <p:nvSpPr>
+          <p:cNvPr id="18" name="TextBox 17"/>
+          <p:cNvSpPr txBox="1"/>
+          <p:nvPr/>
+        </p:nvSpPr>
+        <p:spPr>
+          <a:xfrm>
+            <a:off x="987552" y="3118104"/>
+            <a:ext cx="1371600" cy="411480"/>
+          </a:xfrm>
+          <a:prstGeom prst="rect">
+            <a:avLst/>
+          </a:prstGeom>
+          <a:noFill/>
+        </p:spPr>
+        <p:txBody>
+          <a:bodyPr wrap="square">
+            <a:spAutoFit/>
+          </a:bodyPr>
+          <a:lstStyle/>
+          <a:p>
+            <a:pPr algn="l">
+              <a:lnSpc>
+                <a:spcPct val="140000"/>
+              </a:lnSpc>
+            </a:pPr>
+            <a:r>
+              <a:rPr sz="1500" b="1">
+                <a:solidFill>
+                  <a:srgbClr val="0F172A"/>
+                </a:solidFill>
+                <a:latin typeface="微软雅黑" panose="020B0503020204020204" charset="-122"/>
+              </a:rPr>
+              <a:t>① 解析</a:t>
+            </a:r>
+            <a:endParaRPr sz="1500" b="1">
+              <a:solidFill>
+                <a:srgbClr val="0F172A"/>
+              </a:solidFill>
+              <a:latin typeface="微软雅黑" panose="020B0503020204020204" charset="-122"/>
+            </a:endParaRPr>
+          </a:p>
+        </p:txBody>
+      </p:sp>
+      <p:sp>
+        <p:nvSpPr>
+          <p:cNvPr id="19" name="TextBox 18"/>
+          <p:cNvSpPr txBox="1"/>
+          <p:nvPr/>
+        </p:nvSpPr>
+        <p:spPr>
+          <a:xfrm>
+            <a:off x="2679192" y="3154680"/>
+            <a:ext cx="8503920" cy="411480"/>
+          </a:xfrm>
+          <a:prstGeom prst="rect">
+            <a:avLst/>
+          </a:prstGeom>
+          <a:noFill/>
+        </p:spPr>
+        <p:txBody>
+          <a:bodyPr wrap="square">
+            <a:spAutoFit/>
+          </a:bodyPr>
+          <a:lstStyle/>
+          <a:p>
+            <a:pPr algn="l">
+              <a:lnSpc>
+                <a:spcPct val="140000"/>
+              </a:lnSpc>
+            </a:pPr>
+            <a:r>
+              <a:rPr sz="1300" b="0">
+                <a:solidFill>
+                  <a:srgbClr val="334155"/>
+                </a:solidFill>
+                <a:latin typeface="微软雅黑" panose="020B0503020204020204" charset="-122"/>
+              </a:rPr>
+              <a:t>PaddleOCR（本地）→ 统一转 Markdown（带页码锚点）</a:t>
+            </a:r>
+            <a:endParaRPr sz="1300" b="0">
+              <a:solidFill>
+                <a:srgbClr val="334155"/>
+              </a:solidFill>
+              <a:latin typeface="微软雅黑" panose="020B0503020204020204" charset="-122"/>
+            </a:endParaRPr>
+          </a:p>
+        </p:txBody>
+      </p:sp>
+      <p:sp>
+        <p:nvSpPr>
+          <p:cNvPr id="20" name="Rectangle 19"/>
+          <p:cNvSpPr/>
+          <p:nvPr/>
+        </p:nvSpPr>
+        <p:spPr>
+          <a:xfrm>
+            <a:off x="758952" y="3730752"/>
+            <a:ext cx="10698480" cy="621792"/>
+          </a:xfrm>
+          <a:prstGeom prst="rect">
+            <a:avLst/>
+          </a:prstGeom>
+          <a:solidFill>
+            <a:srgbClr val="F8FAFC"/>
+          </a:solidFill>
+          <a:ln>
+            <a:noFill/>
+          </a:ln>
+          <a:effectLst/>
+        </p:spPr>
+        <p:style>
+          <a:lnRef idx="1">
+            <a:schemeClr val="accent1"/>
+          </a:lnRef>
+          <a:fillRef idx="3">
+            <a:schemeClr val="accent1"/>
+          </a:fillRef>
+          <a:effectRef idx="2">
+            <a:schemeClr val="accent1"/>
+          </a:effectRef>
+          <a:fontRef idx="minor">
+            <a:schemeClr val="lt1"/>
+          </a:fontRef>
+        </p:style>
+        <p:txBody>
+          <a:bodyPr rtlCol="0" anchor="ctr"/>
+          <a:lstStyle/>
+          <a:p>
+            <a:pPr algn="ctr"/>
+          </a:p>
+        </p:txBody>
+      </p:sp>
+      <p:sp>
+        <p:nvSpPr>
+          <p:cNvPr id="21" name="Rectangle 20"/>
+          <p:cNvSpPr/>
+          <p:nvPr/>
+        </p:nvSpPr>
+        <p:spPr>
+          <a:xfrm>
+            <a:off x="758952" y="3730752"/>
+            <a:ext cx="45720" cy="621792"/>
+          </a:xfrm>
+          <a:prstGeom prst="rect">
+            <a:avLst/>
+          </a:prstGeom>
+          <a:solidFill>
+            <a:srgbClr val="3B82F6"/>
+          </a:solidFill>
+          <a:ln>
+            <a:noFill/>
+          </a:ln>
+          <a:effectLst/>
+        </p:spPr>
+        <p:style>
+          <a:lnRef idx="1">
+            <a:schemeClr val="accent1"/>
+          </a:lnRef>
+          <a:fillRef idx="3">
+            <a:schemeClr val="accent1"/>
+          </a:fillRef>
+          <a:effectRef idx="2">
+            <a:schemeClr val="accent1"/>
+          </a:effectRef>
+          <a:fontRef idx="minor">
+            <a:schemeClr val="lt1"/>
+          </a:fontRef>
+        </p:style>
+        <p:txBody>
+          <a:bodyPr rtlCol="0" anchor="ctr"/>
+          <a:lstStyle/>
+          <a:p>
+            <a:pPr algn="ctr"/>
+          </a:p>
+        </p:txBody>
+      </p:sp>
+      <p:sp>
+        <p:nvSpPr>
+          <p:cNvPr id="22" name="TextBox 21"/>
+          <p:cNvSpPr txBox="1"/>
+          <p:nvPr/>
+        </p:nvSpPr>
+        <p:spPr>
+          <a:xfrm>
+            <a:off x="987552" y="3831336"/>
+            <a:ext cx="1371600" cy="411480"/>
+          </a:xfrm>
+          <a:prstGeom prst="rect">
+            <a:avLst/>
+          </a:prstGeom>
+          <a:noFill/>
+        </p:spPr>
+        <p:txBody>
+          <a:bodyPr wrap="square">
+            <a:spAutoFit/>
+          </a:bodyPr>
+          <a:lstStyle/>
+          <a:p>
+            <a:pPr algn="l">
+              <a:lnSpc>
+                <a:spcPct val="140000"/>
+              </a:lnSpc>
+            </a:pPr>
+            <a:r>
+              <a:rPr sz="1500" b="1">
+                <a:solidFill>
+                  <a:srgbClr val="0F172A"/>
+                </a:solidFill>
+                <a:latin typeface="微软雅黑" panose="020B0503020204020204" charset="-122"/>
+              </a:rPr>
+              <a:t>② 结构化</a:t>
+            </a:r>
+            <a:endParaRPr sz="1500" b="1">
+              <a:solidFill>
+                <a:srgbClr val="0F172A"/>
+              </a:solidFill>
+              <a:latin typeface="微软雅黑" panose="020B0503020204020204" charset="-122"/>
+            </a:endParaRPr>
+          </a:p>
+        </p:txBody>
+      </p:sp>
+      <p:sp>
+        <p:nvSpPr>
+          <p:cNvPr id="23" name="TextBox 22"/>
+          <p:cNvSpPr txBox="1"/>
+          <p:nvPr/>
+        </p:nvSpPr>
+        <p:spPr>
+          <a:xfrm>
+            <a:off x="2679192" y="3867912"/>
+            <a:ext cx="8503920" cy="411480"/>
+          </a:xfrm>
+          <a:prstGeom prst="rect">
+            <a:avLst/>
+          </a:prstGeom>
+          <a:noFill/>
+        </p:spPr>
+        <p:txBody>
+          <a:bodyPr wrap="square">
+            <a:spAutoFit/>
+          </a:bodyPr>
+          <a:lstStyle/>
+          <a:p>
+            <a:pPr algn="l">
+              <a:lnSpc>
+                <a:spcPct val="140000"/>
+              </a:lnSpc>
+            </a:pPr>
+            <a:r>
+              <a:rPr sz="1300" b="0">
+                <a:solidFill>
+                  <a:srgbClr val="334155"/>
+                </a:solidFill>
+                <a:latin typeface="微软雅黑" panose="020B0503020204020204" charset="-122"/>
+              </a:rPr>
+              <a:t>「章—节—知识点」三级骨架（完整率与溯源覆盖率 100%）</a:t>
+            </a:r>
+            <a:endParaRPr sz="1300" b="0">
+              <a:solidFill>
+                <a:srgbClr val="334155"/>
+              </a:solidFill>
+              <a:latin typeface="微软雅黑" panose="020B0503020204020204" charset="-122"/>
+            </a:endParaRPr>
+          </a:p>
+        </p:txBody>
+      </p:sp>
+      <p:sp>
+        <p:nvSpPr>
+          <p:cNvPr id="24" name="Rectangle 23"/>
+          <p:cNvSpPr/>
+          <p:nvPr/>
+        </p:nvSpPr>
+        <p:spPr>
+          <a:xfrm>
+            <a:off x="758952" y="4443984"/>
+            <a:ext cx="10698480" cy="621792"/>
+          </a:xfrm>
+          <a:prstGeom prst="rect">
+            <a:avLst/>
+          </a:prstGeom>
+          <a:solidFill>
+            <a:srgbClr val="ECFDF5"/>
+          </a:solidFill>
+          <a:ln>
+            <a:noFill/>
+          </a:ln>
+          <a:effectLst/>
+        </p:spPr>
+        <p:style>
+          <a:lnRef idx="1">
+            <a:schemeClr val="accent1"/>
+          </a:lnRef>
+          <a:fillRef idx="3">
+            <a:schemeClr val="accent1"/>
+          </a:fillRef>
+          <a:effectRef idx="2">
+            <a:schemeClr val="accent1"/>
+          </a:effectRef>
+          <a:fontRef idx="minor">
+            <a:schemeClr val="lt1"/>
+          </a:fontRef>
+        </p:style>
+        <p:txBody>
+          <a:bodyPr rtlCol="0" anchor="ctr"/>
+          <a:lstStyle/>
+          <a:p>
+            <a:pPr algn="ctr"/>
+          </a:p>
+        </p:txBody>
+      </p:sp>
+      <p:sp>
+        <p:nvSpPr>
+          <p:cNvPr id="25" name="Rectangle 24"/>
+          <p:cNvSpPr/>
+          <p:nvPr/>
+        </p:nvSpPr>
+        <p:spPr>
+          <a:xfrm>
+            <a:off x="758952" y="4443984"/>
+            <a:ext cx="45720" cy="621792"/>
           </a:xfrm>
           <a:prstGeom prst="rect">
             <a:avLst/>
@@ -3896,14 +5022,14 @@
       </p:sp>
       <p:sp>
         <p:nvSpPr>
-          <p:cNvPr id="6" name="TextBox 5"/>
+          <p:cNvPr id="26" name="TextBox 25"/>
           <p:cNvSpPr txBox="1"/>
           <p:nvPr/>
         </p:nvSpPr>
         <p:spPr>
           <a:xfrm>
-            <a:off x="960120" y="1563624"/>
-            <a:ext cx="1371600" cy="457200"/>
+            <a:off x="987552" y="4544568"/>
+            <a:ext cx="1371600" cy="411480"/>
           </a:xfrm>
           <a:prstGeom prst="rect">
             <a:avLst/>
@@ -3918,31 +5044,37 @@
           <a:p>
             <a:pPr algn="l">
               <a:lnSpc>
-                <a:spcPct val="135000"/>
+                <a:spcPct val="140000"/>
               </a:lnSpc>
             </a:pPr>
             <a:r>
-              <a:rPr sz="1600" b="1">
+              <a:rPr sz="1500" b="1">
                 <a:solidFill>
                   <a:srgbClr val="0F172A"/>
                 </a:solidFill>
-                <a:latin typeface="微软雅黑"/>
+                <a:latin typeface="微软雅黑" panose="020B0503020204020204" charset="-122"/>
               </a:rPr>
-              <a:t>① 解析</a:t>
-            </a:r>
-          </a:p>
-        </p:txBody>
-      </p:sp>
-      <p:sp>
-        <p:nvSpPr>
-          <p:cNvPr id="7" name="TextBox 6"/>
+              <a:t>③ 图推理 ⭐</a:t>
+            </a:r>
+            <a:endParaRPr sz="1500" b="1">
+              <a:solidFill>
+                <a:srgbClr val="0F172A"/>
+              </a:solidFill>
+              <a:latin typeface="微软雅黑" panose="020B0503020204020204" charset="-122"/>
+            </a:endParaRPr>
+          </a:p>
+        </p:txBody>
+      </p:sp>
+      <p:sp>
+        <p:nvSpPr>
+          <p:cNvPr id="27" name="TextBox 26"/>
           <p:cNvSpPr txBox="1"/>
           <p:nvPr/>
         </p:nvSpPr>
         <p:spPr>
           <a:xfrm>
-            <a:off x="2377440" y="1600200"/>
-            <a:ext cx="8869680" cy="457200"/>
+            <a:off x="2679192" y="4581144"/>
+            <a:ext cx="8503920" cy="411480"/>
           </a:xfrm>
           <a:prstGeom prst="rect">
             <a:avLst/>
@@ -3957,31 +5089,37 @@
           <a:p>
             <a:pPr algn="l">
               <a:lnSpc>
-                <a:spcPct val="135000"/>
+                <a:spcPct val="140000"/>
               </a:lnSpc>
             </a:pPr>
             <a:r>
-              <a:rPr sz="1400" b="0">
+              <a:rPr sz="1300" b="0">
                 <a:solidFill>
                   <a:srgbClr val="334155"/>
                 </a:solidFill>
-                <a:latin typeface="微软雅黑"/>
+                <a:latin typeface="微软雅黑" panose="020B0503020204020204" charset="-122"/>
               </a:rPr>
-              <a:t>PaddleOCR（本地）→ 统一转 Markdown（带页码锚点，保证可溯源）</a:t>
-            </a:r>
-          </a:p>
-        </p:txBody>
-      </p:sp>
-      <p:sp>
-        <p:nvSpPr>
-          <p:cNvPr id="8" name="Rectangle 7"/>
+              <a:t>依赖图校验 / 环路剪枝 / 学习路径 / 卡点回溯 —— 纯标准库</a:t>
+            </a:r>
+            <a:endParaRPr sz="1300" b="0">
+              <a:solidFill>
+                <a:srgbClr val="334155"/>
+              </a:solidFill>
+              <a:latin typeface="微软雅黑" panose="020B0503020204020204" charset="-122"/>
+            </a:endParaRPr>
+          </a:p>
+        </p:txBody>
+      </p:sp>
+      <p:sp>
+        <p:nvSpPr>
+          <p:cNvPr id="28" name="Rectangle 27"/>
           <p:cNvSpPr/>
           <p:nvPr/>
         </p:nvSpPr>
         <p:spPr>
           <a:xfrm>
-            <a:off x="758952" y="2267712"/>
-            <a:ext cx="10698480" cy="658368"/>
+            <a:off x="758952" y="5157216"/>
+            <a:ext cx="10698480" cy="621792"/>
           </a:xfrm>
           <a:prstGeom prst="rect">
             <a:avLst/>
@@ -4018,20 +5156,20 @@
       </p:sp>
       <p:sp>
         <p:nvSpPr>
-          <p:cNvPr id="9" name="Rectangle 8"/>
+          <p:cNvPr id="29" name="Rectangle 28"/>
           <p:cNvSpPr/>
           <p:nvPr/>
         </p:nvSpPr>
         <p:spPr>
           <a:xfrm>
-            <a:off x="758952" y="2267712"/>
-            <a:ext cx="45720" cy="658368"/>
+            <a:off x="758952" y="5157216"/>
+            <a:ext cx="45720" cy="621792"/>
           </a:xfrm>
           <a:prstGeom prst="rect">
             <a:avLst/>
           </a:prstGeom>
           <a:solidFill>
-            <a:srgbClr val="06B6D4"/>
+            <a:srgbClr val="3B82F6"/>
           </a:solidFill>
           <a:ln>
             <a:noFill/>
@@ -4062,14 +5200,14 @@
       </p:sp>
       <p:sp>
         <p:nvSpPr>
-          <p:cNvPr id="10" name="TextBox 9"/>
+          <p:cNvPr id="30" name="TextBox 29"/>
           <p:cNvSpPr txBox="1"/>
           <p:nvPr/>
         </p:nvSpPr>
         <p:spPr>
           <a:xfrm>
-            <a:off x="960120" y="2350008"/>
-            <a:ext cx="1371600" cy="457200"/>
+            <a:off x="987552" y="5257800"/>
+            <a:ext cx="1371600" cy="411480"/>
           </a:xfrm>
           <a:prstGeom prst="rect">
             <a:avLst/>
@@ -4084,31 +5222,37 @@
           <a:p>
             <a:pPr algn="l">
               <a:lnSpc>
-                <a:spcPct val="135000"/>
+                <a:spcPct val="140000"/>
               </a:lnSpc>
             </a:pPr>
             <a:r>
-              <a:rPr sz="1600" b="1">
+              <a:rPr sz="1500" b="1">
                 <a:solidFill>
                   <a:srgbClr val="0F172A"/>
                 </a:solidFill>
-                <a:latin typeface="微软雅黑"/>
+                <a:latin typeface="微软雅黑" panose="020B0503020204020204" charset="-122"/>
               </a:rPr>
-              <a:t>② 结构化</a:t>
-            </a:r>
-          </a:p>
-        </p:txBody>
-      </p:sp>
-      <p:sp>
-        <p:nvSpPr>
-          <p:cNvPr id="11" name="TextBox 10"/>
+              <a:t>④ 答疑</a:t>
+            </a:r>
+            <a:endParaRPr sz="1500" b="1">
+              <a:solidFill>
+                <a:srgbClr val="0F172A"/>
+              </a:solidFill>
+              <a:latin typeface="微软雅黑" panose="020B0503020204020204" charset="-122"/>
+            </a:endParaRPr>
+          </a:p>
+        </p:txBody>
+      </p:sp>
+      <p:sp>
+        <p:nvSpPr>
+          <p:cNvPr id="31" name="TextBox 30"/>
           <p:cNvSpPr txBox="1"/>
           <p:nvPr/>
         </p:nvSpPr>
         <p:spPr>
           <a:xfrm>
-            <a:off x="2377440" y="2386584"/>
-            <a:ext cx="8869680" cy="457200"/>
+            <a:off x="2679192" y="5294376"/>
+            <a:ext cx="8503920" cy="411480"/>
           </a:xfrm>
           <a:prstGeom prst="rect">
             <a:avLst/>
@@ -4123,31 +5267,82 @@
           <a:p>
             <a:pPr algn="l">
               <a:lnSpc>
-                <a:spcPct val="135000"/>
+                <a:spcPct val="140000"/>
               </a:lnSpc>
             </a:pPr>
             <a:r>
-              <a:rPr sz="1400" b="0">
+              <a:rPr sz="1300" b="0">
                 <a:solidFill>
                   <a:srgbClr val="334155"/>
                 </a:solidFill>
-                <a:latin typeface="微软雅黑"/>
+                <a:latin typeface="微软雅黑" panose="020B0503020204020204" charset="-122"/>
               </a:rPr>
-              <a:t>抽「章—节—知识点」三级骨架（完整率与溯源覆盖率 100%）</a:t>
-            </a:r>
-          </a:p>
-        </p:txBody>
-      </p:sp>
-      <p:sp>
-        <p:nvSpPr>
-          <p:cNvPr id="12" name="Rectangle 11"/>
+              <a:t>状态机驱动的苏格拉底式引导（提问 → 提示 → 讲解）</a:t>
+            </a:r>
+            <a:endParaRPr sz="1300" b="0">
+              <a:solidFill>
+                <a:srgbClr val="334155"/>
+              </a:solidFill>
+              <a:latin typeface="微软雅黑" panose="020B0503020204020204" charset="-122"/>
+            </a:endParaRPr>
+          </a:p>
+        </p:txBody>
+      </p:sp>
+      <p:sp>
+        <p:nvSpPr>
+          <p:cNvPr id="32" name="TextBox 31"/>
+          <p:cNvSpPr txBox="1"/>
+          <p:nvPr/>
+        </p:nvSpPr>
+        <p:spPr>
+          <a:xfrm>
+            <a:off x="758952" y="5943600"/>
+            <a:ext cx="10698480" cy="320040"/>
+          </a:xfrm>
+          <a:prstGeom prst="rect">
+            <a:avLst/>
+          </a:prstGeom>
+          <a:noFill/>
+        </p:spPr>
+        <p:txBody>
+          <a:bodyPr wrap="square">
+            <a:spAutoFit/>
+          </a:bodyPr>
+          <a:lstStyle/>
+          <a:p>
+            <a:pPr algn="l">
+              <a:lnSpc>
+                <a:spcPct val="140000"/>
+              </a:lnSpc>
+            </a:pPr>
+            <a:r>
+              <a:rPr sz="1300" b="1">
+                <a:solidFill>
+                  <a:srgbClr val="3B82F6"/>
+                </a:solidFill>
+                <a:latin typeface="微软雅黑" panose="020B0503020204020204" charset="-122"/>
+              </a:rPr>
+              <a:t>⭐ 一条原则贯穿：AI 干粗活 + 人做裁决 —— 关键路径放在确定性算法上</a:t>
+            </a:r>
+            <a:endParaRPr sz="1300" b="1">
+              <a:solidFill>
+                <a:srgbClr val="3B82F6"/>
+              </a:solidFill>
+              <a:latin typeface="微软雅黑" panose="020B0503020204020204" charset="-122"/>
+            </a:endParaRPr>
+          </a:p>
+        </p:txBody>
+      </p:sp>
+      <p:sp>
+        <p:nvSpPr>
+          <p:cNvPr id="33" name="Rectangle 32"/>
           <p:cNvSpPr/>
           <p:nvPr/>
         </p:nvSpPr>
         <p:spPr>
           <a:xfrm>
-            <a:off x="758952" y="3054096"/>
-            <a:ext cx="10698480" cy="658368"/>
+            <a:off x="0" y="6355080"/>
+            <a:ext cx="12191695" cy="502920"/>
           </a:xfrm>
           <a:prstGeom prst="rect">
             <a:avLst/>
@@ -4184,58 +5379,14 @@
       </p:sp>
       <p:sp>
         <p:nvSpPr>
-          <p:cNvPr id="13" name="Rectangle 12"/>
-          <p:cNvSpPr/>
-          <p:nvPr/>
-        </p:nvSpPr>
-        <p:spPr>
-          <a:xfrm>
-            <a:off x="758952" y="3054096"/>
-            <a:ext cx="45720" cy="658368"/>
-          </a:xfrm>
-          <a:prstGeom prst="rect">
-            <a:avLst/>
-          </a:prstGeom>
-          <a:solidFill>
-            <a:srgbClr val="06B6D4"/>
-          </a:solidFill>
-          <a:ln>
-            <a:noFill/>
-          </a:ln>
-          <a:effectLst/>
-        </p:spPr>
-        <p:style>
-          <a:lnRef idx="1">
-            <a:schemeClr val="accent1"/>
-          </a:lnRef>
-          <a:fillRef idx="3">
-            <a:schemeClr val="accent1"/>
-          </a:fillRef>
-          <a:effectRef idx="2">
-            <a:schemeClr val="accent1"/>
-          </a:effectRef>
-          <a:fontRef idx="minor">
-            <a:schemeClr val="lt1"/>
-          </a:fontRef>
-        </p:style>
-        <p:txBody>
-          <a:bodyPr rtlCol="0" anchor="ctr"/>
-          <a:lstStyle/>
-          <a:p>
-            <a:pPr algn="ctr"/>
-          </a:p>
-        </p:txBody>
-      </p:sp>
-      <p:sp>
-        <p:nvSpPr>
-          <p:cNvPr id="14" name="TextBox 13"/>
+          <p:cNvPr id="34" name="TextBox 33"/>
           <p:cNvSpPr txBox="1"/>
           <p:nvPr/>
         </p:nvSpPr>
         <p:spPr>
           <a:xfrm>
-            <a:off x="960120" y="3136392"/>
-            <a:ext cx="1371600" cy="457200"/>
+            <a:off x="758952" y="6437376"/>
+            <a:ext cx="7315200" cy="329184"/>
           </a:xfrm>
           <a:prstGeom prst="rect">
             <a:avLst/>
@@ -4250,31 +5401,37 @@
           <a:p>
             <a:pPr algn="l">
               <a:lnSpc>
-                <a:spcPct val="135000"/>
+                <a:spcPct val="140000"/>
               </a:lnSpc>
             </a:pPr>
             <a:r>
-              <a:rPr sz="1600" b="1">
-                <a:solidFill>
-                  <a:srgbClr val="0F172A"/>
-                </a:solidFill>
-                <a:latin typeface="微软雅黑"/>
+              <a:rPr sz="1100" b="0">
+                <a:solidFill>
+                  <a:srgbClr val="64748B"/>
+                </a:solidFill>
+                <a:latin typeface="微软雅黑" panose="020B0503020204020204" charset="-122"/>
               </a:rPr>
-              <a:t>③ 图推理 ⭐</a:t>
-            </a:r>
-          </a:p>
-        </p:txBody>
-      </p:sp>
-      <p:sp>
-        <p:nvSpPr>
-          <p:cNvPr id="15" name="TextBox 14"/>
+              <a:t>析知 XiZhi · 多模态教学智能体 · 豆包战队</a:t>
+            </a:r>
+            <a:endParaRPr sz="1100" b="0">
+              <a:solidFill>
+                <a:srgbClr val="64748B"/>
+              </a:solidFill>
+              <a:latin typeface="微软雅黑" panose="020B0503020204020204" charset="-122"/>
+            </a:endParaRPr>
+          </a:p>
+        </p:txBody>
+      </p:sp>
+      <p:sp>
+        <p:nvSpPr>
+          <p:cNvPr id="35" name="TextBox 34"/>
           <p:cNvSpPr txBox="1"/>
           <p:nvPr/>
         </p:nvSpPr>
         <p:spPr>
           <a:xfrm>
-            <a:off x="2377440" y="3172968"/>
-            <a:ext cx="8869680" cy="457200"/>
+            <a:off x="10362895" y="6437376"/>
+            <a:ext cx="1097280" cy="329184"/>
           </a:xfrm>
           <a:prstGeom prst="rect">
             <a:avLst/>
@@ -4287,446 +5444,26 @@
           </a:bodyPr>
           <a:lstStyle/>
           <a:p>
-            <a:pPr algn="l">
+            <a:pPr algn="r">
               <a:lnSpc>
-                <a:spcPct val="135000"/>
+                <a:spcPct val="140000"/>
               </a:lnSpc>
             </a:pPr>
             <a:r>
-              <a:rPr sz="1400" b="0">
-                <a:solidFill>
-                  <a:srgbClr val="334155"/>
-                </a:solidFill>
-                <a:latin typeface="微软雅黑"/>
+              <a:rPr sz="1100" b="0">
+                <a:solidFill>
+                  <a:srgbClr val="64748B"/>
+                </a:solidFill>
+                <a:latin typeface="微软雅黑" panose="020B0503020204020204" charset="-122"/>
               </a:rPr>
-              <a:t>依赖图校验 / 环路剪枝 / 学习路径 / 卡点回溯 —— 纯标准库</a:t>
-            </a:r>
-          </a:p>
-        </p:txBody>
-      </p:sp>
-      <p:sp>
-        <p:nvSpPr>
-          <p:cNvPr id="16" name="Rectangle 15"/>
-          <p:cNvSpPr/>
-          <p:nvPr/>
-        </p:nvSpPr>
-        <p:spPr>
-          <a:xfrm>
-            <a:off x="758952" y="3840480"/>
-            <a:ext cx="10698480" cy="658368"/>
-          </a:xfrm>
-          <a:prstGeom prst="rect">
-            <a:avLst/>
-          </a:prstGeom>
-          <a:solidFill>
-            <a:srgbClr val="F8FAFC"/>
-          </a:solidFill>
-          <a:ln>
-            <a:noFill/>
-          </a:ln>
-          <a:effectLst/>
-        </p:spPr>
-        <p:style>
-          <a:lnRef idx="1">
-            <a:schemeClr val="accent1"/>
-          </a:lnRef>
-          <a:fillRef idx="3">
-            <a:schemeClr val="accent1"/>
-          </a:fillRef>
-          <a:effectRef idx="2">
-            <a:schemeClr val="accent1"/>
-          </a:effectRef>
-          <a:fontRef idx="minor">
-            <a:schemeClr val="lt1"/>
-          </a:fontRef>
-        </p:style>
-        <p:txBody>
-          <a:bodyPr rtlCol="0" anchor="ctr"/>
-          <a:lstStyle/>
-          <a:p>
-            <a:pPr algn="ctr"/>
-          </a:p>
-        </p:txBody>
-      </p:sp>
-      <p:sp>
-        <p:nvSpPr>
-          <p:cNvPr id="17" name="Rectangle 16"/>
-          <p:cNvSpPr/>
-          <p:nvPr/>
-        </p:nvSpPr>
-        <p:spPr>
-          <a:xfrm>
-            <a:off x="758952" y="3840480"/>
-            <a:ext cx="45720" cy="658368"/>
-          </a:xfrm>
-          <a:prstGeom prst="rect">
-            <a:avLst/>
-          </a:prstGeom>
-          <a:solidFill>
-            <a:srgbClr val="06B6D4"/>
-          </a:solidFill>
-          <a:ln>
-            <a:noFill/>
-          </a:ln>
-          <a:effectLst/>
-        </p:spPr>
-        <p:style>
-          <a:lnRef idx="1">
-            <a:schemeClr val="accent1"/>
-          </a:lnRef>
-          <a:fillRef idx="3">
-            <a:schemeClr val="accent1"/>
-          </a:fillRef>
-          <a:effectRef idx="2">
-            <a:schemeClr val="accent1"/>
-          </a:effectRef>
-          <a:fontRef idx="minor">
-            <a:schemeClr val="lt1"/>
-          </a:fontRef>
-        </p:style>
-        <p:txBody>
-          <a:bodyPr rtlCol="0" anchor="ctr"/>
-          <a:lstStyle/>
-          <a:p>
-            <a:pPr algn="ctr"/>
-          </a:p>
-        </p:txBody>
-      </p:sp>
-      <p:sp>
-        <p:nvSpPr>
-          <p:cNvPr id="18" name="TextBox 17"/>
-          <p:cNvSpPr txBox="1"/>
-          <p:nvPr/>
-        </p:nvSpPr>
-        <p:spPr>
-          <a:xfrm>
-            <a:off x="960120" y="3922776"/>
-            <a:ext cx="1371600" cy="457200"/>
-          </a:xfrm>
-          <a:prstGeom prst="rect">
-            <a:avLst/>
-          </a:prstGeom>
-          <a:noFill/>
-        </p:spPr>
-        <p:txBody>
-          <a:bodyPr wrap="square">
-            <a:spAutoFit/>
-          </a:bodyPr>
-          <a:lstStyle/>
-          <a:p>
-            <a:pPr algn="l">
-              <a:lnSpc>
-                <a:spcPct val="135000"/>
-              </a:lnSpc>
-            </a:pPr>
-            <a:r>
-              <a:rPr sz="1600" b="1">
-                <a:solidFill>
-                  <a:srgbClr val="0F172A"/>
-                </a:solidFill>
-                <a:latin typeface="微软雅黑"/>
-              </a:rPr>
-              <a:t>④ 答疑</a:t>
-            </a:r>
-          </a:p>
-        </p:txBody>
-      </p:sp>
-      <p:sp>
-        <p:nvSpPr>
-          <p:cNvPr id="19" name="TextBox 18"/>
-          <p:cNvSpPr txBox="1"/>
-          <p:nvPr/>
-        </p:nvSpPr>
-        <p:spPr>
-          <a:xfrm>
-            <a:off x="2377440" y="3959352"/>
-            <a:ext cx="8869680" cy="457200"/>
-          </a:xfrm>
-          <a:prstGeom prst="rect">
-            <a:avLst/>
-          </a:prstGeom>
-          <a:noFill/>
-        </p:spPr>
-        <p:txBody>
-          <a:bodyPr wrap="square">
-            <a:spAutoFit/>
-          </a:bodyPr>
-          <a:lstStyle/>
-          <a:p>
-            <a:pPr algn="l">
-              <a:lnSpc>
-                <a:spcPct val="135000"/>
-              </a:lnSpc>
-            </a:pPr>
-            <a:r>
-              <a:rPr sz="1400" b="0">
-                <a:solidFill>
-                  <a:srgbClr val="334155"/>
-                </a:solidFill>
-                <a:latin typeface="微软雅黑"/>
-              </a:rPr>
-              <a:t>状态机驱动的苏格拉底式引导（提问 → 提示 → 讲解）</a:t>
-            </a:r>
-          </a:p>
-        </p:txBody>
-      </p:sp>
-      <p:sp>
-        <p:nvSpPr>
-          <p:cNvPr id="20" name="Rectangle 19"/>
-          <p:cNvSpPr/>
-          <p:nvPr/>
-        </p:nvSpPr>
-        <p:spPr>
-          <a:xfrm>
-            <a:off x="758952" y="4736592"/>
-            <a:ext cx="10698480" cy="548640"/>
-          </a:xfrm>
-          <a:prstGeom prst="rect">
-            <a:avLst/>
-          </a:prstGeom>
-          <a:solidFill>
-            <a:srgbClr val="EFF4FE"/>
-          </a:solidFill>
-          <a:ln>
-            <a:noFill/>
-          </a:ln>
-          <a:effectLst/>
-        </p:spPr>
-        <p:style>
-          <a:lnRef idx="1">
-            <a:schemeClr val="accent1"/>
-          </a:lnRef>
-          <a:fillRef idx="3">
-            <a:schemeClr val="accent1"/>
-          </a:fillRef>
-          <a:effectRef idx="2">
-            <a:schemeClr val="accent1"/>
-          </a:effectRef>
-          <a:fontRef idx="minor">
-            <a:schemeClr val="lt1"/>
-          </a:fontRef>
-        </p:style>
-        <p:txBody>
-          <a:bodyPr rtlCol="0" anchor="ctr"/>
-          <a:lstStyle/>
-          <a:p>
-            <a:pPr algn="ctr"/>
-          </a:p>
-        </p:txBody>
-      </p:sp>
-      <p:sp>
-        <p:nvSpPr>
-          <p:cNvPr id="21" name="TextBox 20"/>
-          <p:cNvSpPr txBox="1"/>
-          <p:nvPr/>
-        </p:nvSpPr>
-        <p:spPr>
-          <a:xfrm>
-            <a:off x="960120" y="4828032"/>
-            <a:ext cx="10332720" cy="384048"/>
-          </a:xfrm>
-          <a:prstGeom prst="rect">
-            <a:avLst/>
-          </a:prstGeom>
-          <a:noFill/>
-        </p:spPr>
-        <p:txBody>
-          <a:bodyPr wrap="square">
-            <a:spAutoFit/>
-          </a:bodyPr>
-          <a:lstStyle/>
-          <a:p>
-            <a:pPr algn="l">
-              <a:lnSpc>
-                <a:spcPct val="135000"/>
-              </a:lnSpc>
-            </a:pPr>
-            <a:r>
-              <a:rPr sz="1400" b="1">
-                <a:solidFill>
-                  <a:srgbClr val="3B82F6"/>
-                </a:solidFill>
-                <a:latin typeface="微软雅黑"/>
-              </a:rPr>
-              <a:t>⭐ 一条贯穿始终的原则：AI 干粗活 + 人做裁决 —— 依赖图与学习路径是纯算法（关键路径）</a:t>
-            </a:r>
-          </a:p>
-        </p:txBody>
-      </p:sp>
-      <p:sp>
-        <p:nvSpPr>
-          <p:cNvPr id="22" name="TextBox 21"/>
-          <p:cNvSpPr txBox="1"/>
-          <p:nvPr/>
-        </p:nvSpPr>
-        <p:spPr>
-          <a:xfrm>
-            <a:off x="758952" y="5440680"/>
-            <a:ext cx="10698480" cy="822960"/>
-          </a:xfrm>
-          <a:prstGeom prst="rect">
-            <a:avLst/>
-          </a:prstGeom>
-          <a:noFill/>
-        </p:spPr>
-        <p:txBody>
-          <a:bodyPr wrap="square">
-            <a:spAutoFit/>
-          </a:bodyPr>
-          <a:lstStyle/>
-          <a:p>
-            <a:pPr algn="l">
-              <a:lnSpc>
-                <a:spcPct val="160000"/>
-              </a:lnSpc>
-            </a:pPr>
-            <a:r>
-              <a:rPr sz="1300" b="0">
-                <a:solidFill>
-                  <a:srgbClr val="64748B"/>
-                </a:solidFill>
-                <a:latin typeface="微软雅黑"/>
-              </a:rPr>
-              <a:t>分工（三人，同属计算机与软件学院 · 人工智能专业）</a:t>
-            </a:r>
-          </a:p>
-          <a:p>
-            <a:pPr algn="l">
-              <a:lnSpc>
-                <a:spcPct val="160000"/>
-              </a:lnSpc>
-            </a:pPr>
-            <a:r>
-              <a:rPr sz="1300" b="0">
-                <a:solidFill>
-                  <a:srgbClr val="64748B"/>
-                </a:solidFill>
-                <a:latin typeface="微软雅黑"/>
-              </a:rPr>
-              <a:t>P1 材料解析 / 知识点抽取 / 海报　·　P2 知识图谱 / 检索 / 校验体系 / 本 PPT　·　P3 界面 / 图谱可视化 / 演示</a:t>
-            </a:r>
-          </a:p>
-        </p:txBody>
-      </p:sp>
-      <p:sp>
-        <p:nvSpPr>
-          <p:cNvPr id="23" name="Rectangle 22"/>
-          <p:cNvSpPr/>
-          <p:nvPr/>
-        </p:nvSpPr>
-        <p:spPr>
-          <a:xfrm>
-            <a:off x="0" y="6291072"/>
-            <a:ext cx="12191695" cy="566928"/>
-          </a:xfrm>
-          <a:prstGeom prst="rect">
-            <a:avLst/>
-          </a:prstGeom>
-          <a:solidFill>
-            <a:srgbClr val="F8FAFC"/>
-          </a:solidFill>
-          <a:ln>
-            <a:noFill/>
-          </a:ln>
-          <a:effectLst/>
-        </p:spPr>
-        <p:style>
-          <a:lnRef idx="1">
-            <a:schemeClr val="accent1"/>
-          </a:lnRef>
-          <a:fillRef idx="3">
-            <a:schemeClr val="accent1"/>
-          </a:fillRef>
-          <a:effectRef idx="2">
-            <a:schemeClr val="accent1"/>
-          </a:effectRef>
-          <a:fontRef idx="minor">
-            <a:schemeClr val="lt1"/>
-          </a:fontRef>
-        </p:style>
-        <p:txBody>
-          <a:bodyPr rtlCol="0" anchor="ctr"/>
-          <a:lstStyle/>
-          <a:p>
-            <a:pPr algn="ctr"/>
-          </a:p>
-        </p:txBody>
-      </p:sp>
-      <p:sp>
-        <p:nvSpPr>
-          <p:cNvPr id="24" name="TextBox 23"/>
-          <p:cNvSpPr txBox="1"/>
-          <p:nvPr/>
-        </p:nvSpPr>
-        <p:spPr>
-          <a:xfrm>
-            <a:off x="758952" y="6382512"/>
-            <a:ext cx="7315200" cy="365760"/>
-          </a:xfrm>
-          <a:prstGeom prst="rect">
-            <a:avLst/>
-          </a:prstGeom>
-          <a:noFill/>
-        </p:spPr>
-        <p:txBody>
-          <a:bodyPr wrap="square">
-            <a:spAutoFit/>
-          </a:bodyPr>
-          <a:lstStyle/>
-          <a:p>
-            <a:pPr algn="l">
-              <a:lnSpc>
-                <a:spcPct val="135000"/>
-              </a:lnSpc>
-            </a:pPr>
-            <a:r>
-              <a:rPr sz="1200" b="0">
-                <a:solidFill>
-                  <a:srgbClr val="64748B"/>
-                </a:solidFill>
-                <a:latin typeface="微软雅黑"/>
-              </a:rPr>
-              <a:t>析知 XiZhi · 多模态教学智能体</a:t>
-            </a:r>
-          </a:p>
-        </p:txBody>
-      </p:sp>
-      <p:sp>
-        <p:nvSpPr>
-          <p:cNvPr id="25" name="TextBox 24"/>
-          <p:cNvSpPr txBox="1"/>
-          <p:nvPr/>
-        </p:nvSpPr>
-        <p:spPr>
-          <a:xfrm>
-            <a:off x="9997135" y="6382512"/>
-            <a:ext cx="1463040" cy="365760"/>
-          </a:xfrm>
-          <a:prstGeom prst="rect">
-            <a:avLst/>
-          </a:prstGeom>
-          <a:noFill/>
-        </p:spPr>
-        <p:txBody>
-          <a:bodyPr wrap="square">
-            <a:spAutoFit/>
-          </a:bodyPr>
-          <a:lstStyle/>
-          <a:p>
-            <a:pPr algn="r">
-              <a:lnSpc>
-                <a:spcPct val="135000"/>
-              </a:lnSpc>
-            </a:pPr>
-            <a:r>
-              <a:rPr sz="1200" b="0">
-                <a:solidFill>
-                  <a:srgbClr val="64748B"/>
-                </a:solidFill>
-                <a:latin typeface="微软雅黑"/>
-              </a:rPr>
-              <a:t>02 / 7</a:t>
-            </a:r>
+              <a:t>2 / 5</a:t>
+            </a:r>
+            <a:endParaRPr sz="1100" b="0">
+              <a:solidFill>
+                <a:srgbClr val="64748B"/>
+              </a:solidFill>
+              <a:latin typeface="微软雅黑" panose="020B0503020204020204" charset="-122"/>
+            </a:endParaRPr>
           </a:p>
         </p:txBody>
       </p:sp>
@@ -4739,7 +5476,7 @@
 </file>
 
 <file path=ppt/slides/slide3.xml><?xml version="1.0" encoding="utf-8"?>
-<p:sld xmlns:a="http://schemas.openxmlformats.org/drawingml/2006/main" xmlns:p="http://schemas.openxmlformats.org/presentationml/2006/main" xmlns:r="http://schemas.openxmlformats.org/officeDocument/2006/relationships">
+<p:sld xmlns:a="http://schemas.openxmlformats.org/drawingml/2006/main" xmlns:r="http://schemas.openxmlformats.org/officeDocument/2006/relationships" xmlns:p="http://schemas.openxmlformats.org/presentationml/2006/main">
   <p:cSld>
     <p:spTree>
       <p:nvGrpSpPr>
@@ -4756,8 +5493,211 @@
         </p:nvSpPr>
         <p:spPr>
           <a:xfrm>
-            <a:off x="758952" y="384048"/>
-            <a:ext cx="10058400" cy="274320"/>
+            <a:off x="758952" y="310896"/>
+            <a:ext cx="10058400" cy="256032"/>
+          </a:xfrm>
+          <a:prstGeom prst="rect">
+            <a:avLst/>
+          </a:prstGeom>
+          <a:noFill/>
+        </p:spPr>
+        <p:txBody>
+          <a:bodyPr wrap="square">
+            <a:spAutoFit/>
+          </a:bodyPr>
+          <a:lstStyle/>
+          <a:p>
+            <a:pPr algn="l">
+              <a:lnSpc>
+                <a:spcPct val="140000"/>
+              </a:lnSpc>
+            </a:pPr>
+            <a:r>
+              <a:rPr sz="1000" b="1">
+                <a:solidFill>
+                  <a:srgbClr val="06B6D4"/>
+                </a:solidFill>
+                <a:latin typeface="微软雅黑" panose="020B0503020204020204" charset="-122"/>
+              </a:rPr>
+              <a:t>DEMO · 三个核心能力</a:t>
+            </a:r>
+            <a:endParaRPr sz="1000" b="1">
+              <a:solidFill>
+                <a:srgbClr val="06B6D4"/>
+              </a:solidFill>
+              <a:latin typeface="微软雅黑" panose="020B0503020204020204" charset="-122"/>
+            </a:endParaRPr>
+          </a:p>
+        </p:txBody>
+      </p:sp>
+      <p:sp>
+        <p:nvSpPr>
+          <p:cNvPr id="3" name="TextBox 2"/>
+          <p:cNvSpPr txBox="1"/>
+          <p:nvPr/>
+        </p:nvSpPr>
+        <p:spPr>
+          <a:xfrm>
+            <a:off x="758952" y="548640"/>
+            <a:ext cx="10698480" cy="530352"/>
+          </a:xfrm>
+          <a:prstGeom prst="rect">
+            <a:avLst/>
+          </a:prstGeom>
+          <a:noFill/>
+        </p:spPr>
+        <p:txBody>
+          <a:bodyPr wrap="square">
+            <a:spAutoFit/>
+          </a:bodyPr>
+          <a:lstStyle/>
+          <a:p>
+            <a:pPr algn="l">
+              <a:lnSpc>
+                <a:spcPct val="140000"/>
+              </a:lnSpc>
+            </a:pPr>
+            <a:r>
+              <a:rPr sz="2700" b="1">
+                <a:solidFill>
+                  <a:srgbClr val="0F172A"/>
+                </a:solidFill>
+                <a:latin typeface="微软雅黑" panose="020B0503020204020204" charset="-122"/>
+              </a:rPr>
+              <a:t>依赖图 · 学习路径 · 苏格拉底答疑</a:t>
+            </a:r>
+            <a:endParaRPr sz="2700" b="1">
+              <a:solidFill>
+                <a:srgbClr val="0F172A"/>
+              </a:solidFill>
+              <a:latin typeface="微软雅黑" panose="020B0503020204020204" charset="-122"/>
+            </a:endParaRPr>
+          </a:p>
+        </p:txBody>
+      </p:sp>
+      <p:sp>
+        <p:nvSpPr>
+          <p:cNvPr id="4" name="Rectangle 3"/>
+          <p:cNvSpPr/>
+          <p:nvPr/>
+        </p:nvSpPr>
+        <p:spPr>
+          <a:xfrm>
+            <a:off x="758952" y="1389888"/>
+            <a:ext cx="3395471" cy="420624"/>
+          </a:xfrm>
+          <a:prstGeom prst="rect">
+            <a:avLst/>
+          </a:prstGeom>
+          <a:solidFill>
+            <a:srgbClr val="0F172A"/>
+          </a:solidFill>
+          <a:ln>
+            <a:noFill/>
+          </a:ln>
+          <a:effectLst/>
+        </p:spPr>
+        <p:style>
+          <a:lnRef idx="1">
+            <a:schemeClr val="accent1"/>
+          </a:lnRef>
+          <a:fillRef idx="3">
+            <a:schemeClr val="accent1"/>
+          </a:fillRef>
+          <a:effectRef idx="2">
+            <a:schemeClr val="accent1"/>
+          </a:effectRef>
+          <a:fontRef idx="minor">
+            <a:schemeClr val="lt1"/>
+          </a:fontRef>
+        </p:style>
+        <p:txBody>
+          <a:bodyPr rtlCol="0" anchor="ctr"/>
+          <a:lstStyle/>
+          <a:p>
+            <a:pPr algn="ctr"/>
+          </a:p>
+        </p:txBody>
+      </p:sp>
+      <p:sp>
+        <p:nvSpPr>
+          <p:cNvPr id="5" name="TextBox 4"/>
+          <p:cNvSpPr txBox="1"/>
+          <p:nvPr/>
+        </p:nvSpPr>
+        <p:spPr>
+          <a:xfrm>
+            <a:off x="905256" y="1472184"/>
+            <a:ext cx="3121152" cy="292608"/>
+          </a:xfrm>
+          <a:prstGeom prst="rect">
+            <a:avLst/>
+          </a:prstGeom>
+          <a:noFill/>
+        </p:spPr>
+        <p:txBody>
+          <a:bodyPr wrap="square">
+            <a:spAutoFit/>
+          </a:bodyPr>
+          <a:lstStyle/>
+          <a:p>
+            <a:pPr algn="l">
+              <a:lnSpc>
+                <a:spcPct val="140000"/>
+              </a:lnSpc>
+            </a:pPr>
+            <a:r>
+              <a:rPr sz="1400" b="1">
+                <a:solidFill>
+                  <a:srgbClr val="FFFFFF"/>
+                </a:solidFill>
+                <a:latin typeface="微软雅黑" panose="020B0503020204020204" charset="-122"/>
+              </a:rPr>
+              <a:t>① 依赖图</a:t>
+            </a:r>
+            <a:endParaRPr sz="1400" b="1">
+              <a:solidFill>
+                <a:srgbClr val="FFFFFF"/>
+              </a:solidFill>
+              <a:latin typeface="微软雅黑" panose="020B0503020204020204" charset="-122"/>
+            </a:endParaRPr>
+          </a:p>
+        </p:txBody>
+      </p:sp>
+      <p:pic>
+        <p:nvPicPr>
+          <p:cNvPr id="6" name="Picture 5" descr="屏幕截图 2026-10-11 183541.png"/>
+          <p:cNvPicPr>
+            <a:picLocks noChangeAspect="1"/>
+          </p:cNvPicPr>
+          <p:nvPr/>
+        </p:nvPicPr>
+        <p:blipFill>
+          <a:blip r:embed="rId1"/>
+          <a:stretch>
+            <a:fillRect/>
+          </a:stretch>
+        </p:blipFill>
+        <p:spPr>
+          <a:xfrm>
+            <a:off x="758952" y="2346405"/>
+            <a:ext cx="3395471" cy="2137757"/>
+          </a:xfrm>
+          <a:prstGeom prst="rect">
+            <a:avLst/>
+          </a:prstGeom>
+        </p:spPr>
+      </p:pic>
+      <p:sp>
+        <p:nvSpPr>
+          <p:cNvPr id="7" name="TextBox 6"/>
+          <p:cNvSpPr txBox="1"/>
+          <p:nvPr/>
+        </p:nvSpPr>
+        <p:spPr>
+          <a:xfrm>
+            <a:off x="777240" y="5056632"/>
+            <a:ext cx="3395471" cy="365760"/>
           </a:xfrm>
           <a:prstGeom prst="rect">
             <a:avLst/>
@@ -4776,27 +5716,191 @@
               </a:lnSpc>
             </a:pPr>
             <a:r>
-              <a:rPr sz="1100" b="1">
-                <a:solidFill>
-                  <a:srgbClr val="06B6D4"/>
-                </a:solidFill>
-                <a:latin typeface="微软雅黑"/>
+              <a:rPr sz="1300" b="1">
+                <a:solidFill>
+                  <a:srgbClr val="0F172A"/>
+                </a:solidFill>
+                <a:latin typeface="微软雅黑" panose="020B0503020204020204" charset="-122"/>
               </a:rPr>
-              <a:t>PROBLEMS · 每一个都带「我们怎么发现的」</a:t>
-            </a:r>
-          </a:p>
-        </p:txBody>
-      </p:sp>
-      <p:sp>
-        <p:nvSpPr>
-          <p:cNvPr id="3" name="TextBox 2"/>
+              <a:t>213 节点 · 229 边 · 环数 = 0</a:t>
+            </a:r>
+            <a:endParaRPr sz="1300" b="1">
+              <a:solidFill>
+                <a:srgbClr val="0F172A"/>
+              </a:solidFill>
+              <a:latin typeface="微软雅黑" panose="020B0503020204020204" charset="-122"/>
+            </a:endParaRPr>
+          </a:p>
+        </p:txBody>
+      </p:sp>
+      <p:sp>
+        <p:nvSpPr>
+          <p:cNvPr id="8" name="TextBox 7"/>
           <p:cNvSpPr txBox="1"/>
           <p:nvPr/>
         </p:nvSpPr>
         <p:spPr>
           <a:xfrm>
-            <a:off x="758952" y="658368"/>
-            <a:ext cx="10698480" cy="685800"/>
+            <a:off x="777240" y="5422392"/>
+            <a:ext cx="3395471" cy="457200"/>
+          </a:xfrm>
+          <a:prstGeom prst="rect">
+            <a:avLst/>
+          </a:prstGeom>
+          <a:noFill/>
+        </p:spPr>
+        <p:txBody>
+          <a:bodyPr wrap="square">
+            <a:spAutoFit/>
+          </a:bodyPr>
+          <a:lstStyle/>
+          <a:p>
+            <a:pPr algn="l">
+              <a:lnSpc>
+                <a:spcPct val="136000"/>
+              </a:lnSpc>
+            </a:pPr>
+            <a:r>
+              <a:rPr sz="1100" b="0">
+                <a:solidFill>
+                  <a:srgbClr val="64748B"/>
+                </a:solidFill>
+                <a:latin typeface="微软雅黑" panose="020B0503020204020204" charset="-122"/>
+              </a:rPr>
+              <a:t>环数 0 是工程不变量，可当场复跑</a:t>
+            </a:r>
+            <a:endParaRPr sz="1100" b="0">
+              <a:solidFill>
+                <a:srgbClr val="64748B"/>
+              </a:solidFill>
+              <a:latin typeface="微软雅黑" panose="020B0503020204020204" charset="-122"/>
+            </a:endParaRPr>
+          </a:p>
+        </p:txBody>
+      </p:sp>
+      <p:sp>
+        <p:nvSpPr>
+          <p:cNvPr id="9" name="Rectangle 8"/>
+          <p:cNvSpPr/>
+          <p:nvPr/>
+        </p:nvSpPr>
+        <p:spPr>
+          <a:xfrm>
+            <a:off x="4410456" y="1389888"/>
+            <a:ext cx="3395471" cy="420624"/>
+          </a:xfrm>
+          <a:prstGeom prst="rect">
+            <a:avLst/>
+          </a:prstGeom>
+          <a:solidFill>
+            <a:srgbClr val="0F172A"/>
+          </a:solidFill>
+          <a:ln>
+            <a:noFill/>
+          </a:ln>
+          <a:effectLst/>
+        </p:spPr>
+        <p:style>
+          <a:lnRef idx="1">
+            <a:schemeClr val="accent1"/>
+          </a:lnRef>
+          <a:fillRef idx="3">
+            <a:schemeClr val="accent1"/>
+          </a:fillRef>
+          <a:effectRef idx="2">
+            <a:schemeClr val="accent1"/>
+          </a:effectRef>
+          <a:fontRef idx="minor">
+            <a:schemeClr val="lt1"/>
+          </a:fontRef>
+        </p:style>
+        <p:txBody>
+          <a:bodyPr rtlCol="0" anchor="ctr"/>
+          <a:lstStyle/>
+          <a:p>
+            <a:pPr algn="ctr"/>
+          </a:p>
+        </p:txBody>
+      </p:sp>
+      <p:sp>
+        <p:nvSpPr>
+          <p:cNvPr id="10" name="TextBox 9"/>
+          <p:cNvSpPr txBox="1"/>
+          <p:nvPr/>
+        </p:nvSpPr>
+        <p:spPr>
+          <a:xfrm>
+            <a:off x="4556760" y="1472184"/>
+            <a:ext cx="3121152" cy="292608"/>
+          </a:xfrm>
+          <a:prstGeom prst="rect">
+            <a:avLst/>
+          </a:prstGeom>
+          <a:noFill/>
+        </p:spPr>
+        <p:txBody>
+          <a:bodyPr wrap="square">
+            <a:spAutoFit/>
+          </a:bodyPr>
+          <a:lstStyle/>
+          <a:p>
+            <a:pPr algn="l">
+              <a:lnSpc>
+                <a:spcPct val="140000"/>
+              </a:lnSpc>
+            </a:pPr>
+            <a:r>
+              <a:rPr sz="1400" b="1">
+                <a:solidFill>
+                  <a:srgbClr val="FFFFFF"/>
+                </a:solidFill>
+                <a:latin typeface="微软雅黑" panose="020B0503020204020204" charset="-122"/>
+              </a:rPr>
+              <a:t>② 学习路径</a:t>
+            </a:r>
+            <a:endParaRPr sz="1400" b="1">
+              <a:solidFill>
+                <a:srgbClr val="FFFFFF"/>
+              </a:solidFill>
+              <a:latin typeface="微软雅黑" panose="020B0503020204020204" charset="-122"/>
+            </a:endParaRPr>
+          </a:p>
+        </p:txBody>
+      </p:sp>
+      <p:pic>
+        <p:nvPicPr>
+          <p:cNvPr id="11" name="Picture 10" descr="屏幕截图 2026-10-11 183448.png"/>
+          <p:cNvPicPr>
+            <a:picLocks noChangeAspect="1"/>
+          </p:cNvPicPr>
+          <p:nvPr/>
+        </p:nvPicPr>
+        <p:blipFill>
+          <a:blip r:embed="rId2"/>
+          <a:stretch>
+            <a:fillRect/>
+          </a:stretch>
+        </p:blipFill>
+        <p:spPr>
+          <a:xfrm>
+            <a:off x="4410456" y="2402505"/>
+            <a:ext cx="3395471" cy="2025556"/>
+          </a:xfrm>
+          <a:prstGeom prst="rect">
+            <a:avLst/>
+          </a:prstGeom>
+        </p:spPr>
+      </p:pic>
+      <p:sp>
+        <p:nvSpPr>
+          <p:cNvPr id="12" name="TextBox 11"/>
+          <p:cNvSpPr txBox="1"/>
+          <p:nvPr/>
+        </p:nvSpPr>
+        <p:spPr>
+          <a:xfrm>
+            <a:off x="4428744" y="5056632"/>
+            <a:ext cx="3395471" cy="365760"/>
           </a:xfrm>
           <a:prstGeom prst="rect">
             <a:avLst/>
@@ -4815,27 +5919,326 @@
               </a:lnSpc>
             </a:pPr>
             <a:r>
-              <a:rPr sz="3000" b="1">
+              <a:rPr sz="1300" b="1">
                 <a:solidFill>
                   <a:srgbClr val="0F172A"/>
                 </a:solidFill>
-                <a:latin typeface="微软雅黑"/>
+                <a:latin typeface="微软雅黑" panose="020B0503020204020204" charset="-122"/>
               </a:rPr>
-              <a:t>实现过程中遇到的四个问题</a:t>
-            </a:r>
-          </a:p>
-        </p:txBody>
-      </p:sp>
-      <p:sp>
-        <p:nvSpPr>
-          <p:cNvPr id="4" name="Rectangle 3"/>
+              <a:t>每一步都带理由 + 教材原文</a:t>
+            </a:r>
+            <a:endParaRPr sz="1300" b="1">
+              <a:solidFill>
+                <a:srgbClr val="0F172A"/>
+              </a:solidFill>
+              <a:latin typeface="微软雅黑" panose="020B0503020204020204" charset="-122"/>
+            </a:endParaRPr>
+          </a:p>
+        </p:txBody>
+      </p:sp>
+      <p:sp>
+        <p:nvSpPr>
+          <p:cNvPr id="13" name="TextBox 12"/>
+          <p:cNvSpPr txBox="1"/>
+          <p:nvPr/>
+        </p:nvSpPr>
+        <p:spPr>
+          <a:xfrm>
+            <a:off x="4428744" y="5422392"/>
+            <a:ext cx="3395471" cy="457200"/>
+          </a:xfrm>
+          <a:prstGeom prst="rect">
+            <a:avLst/>
+          </a:prstGeom>
+          <a:noFill/>
+        </p:spPr>
+        <p:txBody>
+          <a:bodyPr wrap="square">
+            <a:spAutoFit/>
+          </a:bodyPr>
+          <a:lstStyle/>
+          <a:p>
+            <a:pPr algn="l">
+              <a:lnSpc>
+                <a:spcPct val="136000"/>
+              </a:lnSpc>
+            </a:pPr>
+            <a:r>
+              <a:rPr sz="1100" b="0">
+                <a:solidFill>
+                  <a:srgbClr val="64748B"/>
+                </a:solidFill>
+                <a:latin typeface="微软雅黑" panose="020B0503020204020204" charset="-122"/>
+              </a:rPr>
+              <a:t>以「慢启动第二种场景」为目标的 3 步路径</a:t>
+            </a:r>
+            <a:endParaRPr sz="1100" b="0">
+              <a:solidFill>
+                <a:srgbClr val="64748B"/>
+              </a:solidFill>
+              <a:latin typeface="微软雅黑" panose="020B0503020204020204" charset="-122"/>
+            </a:endParaRPr>
+          </a:p>
+        </p:txBody>
+      </p:sp>
+      <p:sp>
+        <p:nvSpPr>
+          <p:cNvPr id="14" name="Rectangle 13"/>
           <p:cNvSpPr/>
           <p:nvPr/>
         </p:nvSpPr>
         <p:spPr>
           <a:xfrm>
-            <a:off x="758952" y="1481328"/>
-            <a:ext cx="10698480" cy="969264"/>
+            <a:off x="8061960" y="1389888"/>
+            <a:ext cx="3395471" cy="420624"/>
+          </a:xfrm>
+          <a:prstGeom prst="rect">
+            <a:avLst/>
+          </a:prstGeom>
+          <a:solidFill>
+            <a:srgbClr val="0F172A"/>
+          </a:solidFill>
+          <a:ln>
+            <a:noFill/>
+          </a:ln>
+          <a:effectLst/>
+        </p:spPr>
+        <p:style>
+          <a:lnRef idx="1">
+            <a:schemeClr val="accent1"/>
+          </a:lnRef>
+          <a:fillRef idx="3">
+            <a:schemeClr val="accent1"/>
+          </a:fillRef>
+          <a:effectRef idx="2">
+            <a:schemeClr val="accent1"/>
+          </a:effectRef>
+          <a:fontRef idx="minor">
+            <a:schemeClr val="lt1"/>
+          </a:fontRef>
+        </p:style>
+        <p:txBody>
+          <a:bodyPr rtlCol="0" anchor="ctr"/>
+          <a:lstStyle/>
+          <a:p>
+            <a:pPr algn="ctr"/>
+          </a:p>
+        </p:txBody>
+      </p:sp>
+      <p:sp>
+        <p:nvSpPr>
+          <p:cNvPr id="15" name="TextBox 14"/>
+          <p:cNvSpPr txBox="1"/>
+          <p:nvPr/>
+        </p:nvSpPr>
+        <p:spPr>
+          <a:xfrm>
+            <a:off x="8208264" y="1472184"/>
+            <a:ext cx="3121152" cy="292608"/>
+          </a:xfrm>
+          <a:prstGeom prst="rect">
+            <a:avLst/>
+          </a:prstGeom>
+          <a:noFill/>
+        </p:spPr>
+        <p:txBody>
+          <a:bodyPr wrap="square">
+            <a:spAutoFit/>
+          </a:bodyPr>
+          <a:lstStyle/>
+          <a:p>
+            <a:pPr algn="l">
+              <a:lnSpc>
+                <a:spcPct val="140000"/>
+              </a:lnSpc>
+            </a:pPr>
+            <a:r>
+              <a:rPr sz="1400" b="1">
+                <a:solidFill>
+                  <a:srgbClr val="FFFFFF"/>
+                </a:solidFill>
+                <a:latin typeface="微软雅黑" panose="020B0503020204020204" charset="-122"/>
+              </a:rPr>
+              <a:t>③ 苏格拉底答疑</a:t>
+            </a:r>
+            <a:endParaRPr sz="1400" b="1">
+              <a:solidFill>
+                <a:srgbClr val="FFFFFF"/>
+              </a:solidFill>
+              <a:latin typeface="微软雅黑" panose="020B0503020204020204" charset="-122"/>
+            </a:endParaRPr>
+          </a:p>
+        </p:txBody>
+      </p:sp>
+      <p:pic>
+        <p:nvPicPr>
+          <p:cNvPr id="16" name="Picture 15" descr="屏幕截图 2026-10-11 183515.png"/>
+          <p:cNvPicPr>
+            <a:picLocks noChangeAspect="1"/>
+          </p:cNvPicPr>
+          <p:nvPr/>
+        </p:nvPicPr>
+        <p:blipFill>
+          <a:blip r:embed="rId3"/>
+          <a:stretch>
+            <a:fillRect/>
+          </a:stretch>
+        </p:blipFill>
+        <p:spPr>
+          <a:xfrm>
+            <a:off x="8061960" y="2402205"/>
+            <a:ext cx="3395345" cy="2027555"/>
+          </a:xfrm>
+          <a:prstGeom prst="rect">
+            <a:avLst/>
+          </a:prstGeom>
+        </p:spPr>
+      </p:pic>
+      <p:sp>
+        <p:nvSpPr>
+          <p:cNvPr id="17" name="TextBox 16"/>
+          <p:cNvSpPr txBox="1"/>
+          <p:nvPr/>
+        </p:nvSpPr>
+        <p:spPr>
+          <a:xfrm>
+            <a:off x="8080247" y="5056632"/>
+            <a:ext cx="3395471" cy="365760"/>
+          </a:xfrm>
+          <a:prstGeom prst="rect">
+            <a:avLst/>
+          </a:prstGeom>
+          <a:noFill/>
+        </p:spPr>
+        <p:txBody>
+          <a:bodyPr wrap="square">
+            <a:spAutoFit/>
+          </a:bodyPr>
+          <a:lstStyle/>
+          <a:p>
+            <a:pPr algn="l">
+              <a:lnSpc>
+                <a:spcPct val="135000"/>
+              </a:lnSpc>
+            </a:pPr>
+            <a:r>
+              <a:rPr sz="1300" b="1">
+                <a:solidFill>
+                  <a:srgbClr val="0F172A"/>
+                </a:solidFill>
+                <a:latin typeface="微软雅黑" panose="020B0503020204020204" charset="-122"/>
+              </a:rPr>
+              <a:t>首轮只反问，连错 2 次才直讲</a:t>
+            </a:r>
+            <a:endParaRPr sz="1300" b="1">
+              <a:solidFill>
+                <a:srgbClr val="0F172A"/>
+              </a:solidFill>
+              <a:latin typeface="微软雅黑" panose="020B0503020204020204" charset="-122"/>
+            </a:endParaRPr>
+          </a:p>
+        </p:txBody>
+      </p:sp>
+      <p:sp>
+        <p:nvSpPr>
+          <p:cNvPr id="18" name="TextBox 17"/>
+          <p:cNvSpPr txBox="1"/>
+          <p:nvPr/>
+        </p:nvSpPr>
+        <p:spPr>
+          <a:xfrm>
+            <a:off x="8080247" y="5422392"/>
+            <a:ext cx="3395471" cy="457200"/>
+          </a:xfrm>
+          <a:prstGeom prst="rect">
+            <a:avLst/>
+          </a:prstGeom>
+          <a:noFill/>
+        </p:spPr>
+        <p:txBody>
+          <a:bodyPr wrap="square">
+            <a:spAutoFit/>
+          </a:bodyPr>
+          <a:lstStyle/>
+          <a:p>
+            <a:pPr algn="l">
+              <a:lnSpc>
+                <a:spcPct val="136000"/>
+              </a:lnSpc>
+            </a:pPr>
+            <a:r>
+              <a:rPr sz="1100" b="0">
+                <a:solidFill>
+                  <a:srgbClr val="64748B"/>
+                </a:solidFill>
+                <a:latin typeface="微软雅黑" panose="020B0503020204020204" charset="-122"/>
+              </a:rPr>
+              <a:t>降级由代码层强制；材料里没有就拒答</a:t>
+            </a:r>
+            <a:endParaRPr sz="1100" b="0">
+              <a:solidFill>
+                <a:srgbClr val="64748B"/>
+              </a:solidFill>
+              <a:latin typeface="微软雅黑" panose="020B0503020204020204" charset="-122"/>
+            </a:endParaRPr>
+          </a:p>
+        </p:txBody>
+      </p:sp>
+      <p:sp>
+        <p:nvSpPr>
+          <p:cNvPr id="19" name="TextBox 18"/>
+          <p:cNvSpPr txBox="1"/>
+          <p:nvPr/>
+        </p:nvSpPr>
+        <p:spPr>
+          <a:xfrm>
+            <a:off x="758952" y="5943600"/>
+            <a:ext cx="10698480" cy="320040"/>
+          </a:xfrm>
+          <a:prstGeom prst="rect">
+            <a:avLst/>
+          </a:prstGeom>
+          <a:noFill/>
+        </p:spPr>
+        <p:txBody>
+          <a:bodyPr wrap="square">
+            <a:spAutoFit/>
+          </a:bodyPr>
+          <a:lstStyle/>
+          <a:p>
+            <a:pPr algn="l">
+              <a:lnSpc>
+                <a:spcPct val="140000"/>
+              </a:lnSpc>
+            </a:pPr>
+            <a:r>
+              <a:rPr sz="1200" b="1">
+                <a:solidFill>
+                  <a:srgbClr val="3B82F6"/>
+                </a:solidFill>
+                <a:latin typeface="微软雅黑" panose="020B0503020204020204" charset="-122"/>
+              </a:rPr>
+              <a:t>⭐ 校验不是「我们说测过了」—— 全链路复验 40 项 / 部署自检 6 项，你也能跑一遍</a:t>
+            </a:r>
+            <a:endParaRPr sz="1200" b="1">
+              <a:solidFill>
+                <a:srgbClr val="3B82F6"/>
+              </a:solidFill>
+              <a:latin typeface="微软雅黑" panose="020B0503020204020204" charset="-122"/>
+            </a:endParaRPr>
+          </a:p>
+        </p:txBody>
+      </p:sp>
+      <p:sp>
+        <p:nvSpPr>
+          <p:cNvPr id="20" name="Rectangle 19"/>
+          <p:cNvSpPr/>
+          <p:nvPr/>
+        </p:nvSpPr>
+        <p:spPr>
+          <a:xfrm>
+            <a:off x="0" y="6355080"/>
+            <a:ext cx="12191695" cy="502920"/>
           </a:xfrm>
           <a:prstGeom prst="rect">
             <a:avLst/>
@@ -4872,92 +6275,14 @@
       </p:sp>
       <p:sp>
         <p:nvSpPr>
-          <p:cNvPr id="5" name="TextBox 4"/>
+          <p:cNvPr id="21" name="TextBox 20"/>
           <p:cNvSpPr txBox="1"/>
           <p:nvPr/>
         </p:nvSpPr>
         <p:spPr>
           <a:xfrm>
-            <a:off x="914400" y="1572768"/>
-            <a:ext cx="457200" cy="365760"/>
-          </a:xfrm>
-          <a:prstGeom prst="rect">
-            <a:avLst/>
-          </a:prstGeom>
-          <a:noFill/>
-        </p:spPr>
-        <p:txBody>
-          <a:bodyPr wrap="square">
-            <a:spAutoFit/>
-          </a:bodyPr>
-          <a:lstStyle/>
-          <a:p>
-            <a:pPr algn="l">
-              <a:lnSpc>
-                <a:spcPct val="135000"/>
-              </a:lnSpc>
-            </a:pPr>
-            <a:r>
-              <a:rPr sz="2000" b="1">
-                <a:solidFill>
-                  <a:srgbClr val="EA580C"/>
-                </a:solidFill>
-                <a:latin typeface="Consolas"/>
-              </a:rPr>
-              <a:t>①</a:t>
-            </a:r>
-          </a:p>
-        </p:txBody>
-      </p:sp>
-      <p:sp>
-        <p:nvSpPr>
-          <p:cNvPr id="6" name="TextBox 5"/>
-          <p:cNvSpPr txBox="1"/>
-          <p:nvPr/>
-        </p:nvSpPr>
-        <p:spPr>
-          <a:xfrm>
-            <a:off x="1463040" y="1536192"/>
-            <a:ext cx="9784080" cy="365760"/>
-          </a:xfrm>
-          <a:prstGeom prst="rect">
-            <a:avLst/>
-          </a:prstGeom>
-          <a:noFill/>
-        </p:spPr>
-        <p:txBody>
-          <a:bodyPr wrap="square">
-            <a:spAutoFit/>
-          </a:bodyPr>
-          <a:lstStyle/>
-          <a:p>
-            <a:pPr algn="l">
-              <a:lnSpc>
-                <a:spcPct val="135000"/>
-              </a:lnSpc>
-            </a:pPr>
-            <a:r>
-              <a:rPr sz="1600" b="1">
-                <a:solidFill>
-                  <a:srgbClr val="0F172A"/>
-                </a:solidFill>
-                <a:latin typeface="微软雅黑"/>
-              </a:rPr>
-              <a:t>中文提问查英文材料：0% 命中</a:t>
-            </a:r>
-          </a:p>
-        </p:txBody>
-      </p:sp>
-      <p:sp>
-        <p:nvSpPr>
-          <p:cNvPr id="7" name="TextBox 6"/>
-          <p:cNvSpPr txBox="1"/>
-          <p:nvPr/>
-        </p:nvSpPr>
-        <p:spPr>
-          <a:xfrm>
-            <a:off x="1463040" y="1920240"/>
-            <a:ext cx="9784080" cy="457200"/>
+            <a:off x="758952" y="6437376"/>
+            <a:ext cx="7315200" cy="329184"/>
           </a:xfrm>
           <a:prstGeom prst="rect">
             <a:avLst/>
@@ -4976,71 +6301,33 @@
               </a:lnSpc>
             </a:pPr>
             <a:r>
-              <a:rPr sz="1200" b="0">
+              <a:rPr sz="1100" b="0">
                 <a:solidFill>
                   <a:srgbClr val="64748B"/>
                 </a:solidFill>
-                <a:latin typeface="微软雅黑"/>
+                <a:latin typeface="微软雅黑" panose="020B0503020204020204" charset="-122"/>
               </a:rPr>
-              <a:t>做了三版对照实验才定位（纯中文 0/6 · 纯英文 6/6 · 中英混合 6/6）⇒ 根因是跨语言，不是检索器</a:t>
-            </a:r>
-          </a:p>
-        </p:txBody>
-      </p:sp>
-      <p:sp>
-        <p:nvSpPr>
-          <p:cNvPr id="8" name="Rectangle 7"/>
-          <p:cNvSpPr/>
-          <p:nvPr/>
-        </p:nvSpPr>
-        <p:spPr>
-          <a:xfrm>
-            <a:off x="758952" y="2578608"/>
-            <a:ext cx="10698480" cy="969264"/>
-          </a:xfrm>
-          <a:prstGeom prst="rect">
-            <a:avLst/>
-          </a:prstGeom>
-          <a:solidFill>
-            <a:srgbClr val="F8FAFC"/>
-          </a:solidFill>
-          <a:ln>
-            <a:noFill/>
-          </a:ln>
-          <a:effectLst/>
-        </p:spPr>
-        <p:style>
-          <a:lnRef idx="1">
-            <a:schemeClr val="accent1"/>
-          </a:lnRef>
-          <a:fillRef idx="3">
-            <a:schemeClr val="accent1"/>
-          </a:fillRef>
-          <a:effectRef idx="2">
-            <a:schemeClr val="accent1"/>
-          </a:effectRef>
-          <a:fontRef idx="minor">
-            <a:schemeClr val="lt1"/>
-          </a:fontRef>
-        </p:style>
-        <p:txBody>
-          <a:bodyPr rtlCol="0" anchor="ctr"/>
-          <a:lstStyle/>
-          <a:p>
-            <a:pPr algn="ctr"/>
-          </a:p>
-        </p:txBody>
-      </p:sp>
-      <p:sp>
-        <p:nvSpPr>
-          <p:cNvPr id="9" name="TextBox 8"/>
+              <a:t>析知 XiZhi · 多模态教学智能体 · 豆包战队</a:t>
+            </a:r>
+            <a:endParaRPr sz="1100" b="0">
+              <a:solidFill>
+                <a:srgbClr val="64748B"/>
+              </a:solidFill>
+              <a:latin typeface="微软雅黑" panose="020B0503020204020204" charset="-122"/>
+            </a:endParaRPr>
+          </a:p>
+        </p:txBody>
+      </p:sp>
+      <p:sp>
+        <p:nvSpPr>
+          <p:cNvPr id="22" name="TextBox 21"/>
           <p:cNvSpPr txBox="1"/>
           <p:nvPr/>
         </p:nvSpPr>
         <p:spPr>
           <a:xfrm>
-            <a:off x="914400" y="2670048"/>
-            <a:ext cx="457200" cy="365760"/>
+            <a:off x="10362895" y="6437376"/>
+            <a:ext cx="1097280" cy="329184"/>
           </a:xfrm>
           <a:prstGeom prst="rect">
             <a:avLst/>
@@ -5053,542 +6340,26 @@
           </a:bodyPr>
           <a:lstStyle/>
           <a:p>
-            <a:pPr algn="l">
-              <a:lnSpc>
-                <a:spcPct val="135000"/>
-              </a:lnSpc>
-            </a:pPr>
-            <a:r>
-              <a:rPr sz="2000" b="1">
-                <a:solidFill>
-                  <a:srgbClr val="EA580C"/>
-                </a:solidFill>
-                <a:latin typeface="Consolas"/>
-              </a:rPr>
-              <a:t>②</a:t>
-            </a:r>
-          </a:p>
-        </p:txBody>
-      </p:sp>
-      <p:sp>
-        <p:nvSpPr>
-          <p:cNvPr id="10" name="TextBox 9"/>
-          <p:cNvSpPr txBox="1"/>
-          <p:nvPr/>
-        </p:nvSpPr>
-        <p:spPr>
-          <a:xfrm>
-            <a:off x="1463040" y="2633472"/>
-            <a:ext cx="9784080" cy="365760"/>
-          </a:xfrm>
-          <a:prstGeom prst="rect">
-            <a:avLst/>
-          </a:prstGeom>
-          <a:noFill/>
-        </p:spPr>
-        <p:txBody>
-          <a:bodyPr wrap="square">
-            <a:spAutoFit/>
-          </a:bodyPr>
-          <a:lstStyle/>
-          <a:p>
-            <a:pPr algn="l">
-              <a:lnSpc>
-                <a:spcPct val="135000"/>
-              </a:lnSpc>
-            </a:pPr>
-            <a:r>
-              <a:rPr sz="1600" b="1">
-                <a:solidFill>
-                  <a:srgbClr val="0F172A"/>
-                </a:solidFill>
-                <a:latin typeface="微软雅黑"/>
-              </a:rPr>
-              <a:t>依赖图会成环</a:t>
-            </a:r>
-          </a:p>
-        </p:txBody>
-      </p:sp>
-      <p:sp>
-        <p:nvSpPr>
-          <p:cNvPr id="11" name="TextBox 10"/>
-          <p:cNvSpPr txBox="1"/>
-          <p:nvPr/>
-        </p:nvSpPr>
-        <p:spPr>
-          <a:xfrm>
-            <a:off x="1463040" y="3017520"/>
-            <a:ext cx="9784080" cy="457200"/>
-          </a:xfrm>
-          <a:prstGeom prst="rect">
-            <a:avLst/>
-          </a:prstGeom>
-          <a:noFill/>
-        </p:spPr>
-        <p:txBody>
-          <a:bodyPr wrap="square">
-            <a:spAutoFit/>
-          </a:bodyPr>
-          <a:lstStyle/>
-          <a:p>
-            <a:pPr algn="l">
+            <a:pPr algn="r">
               <a:lnSpc>
                 <a:spcPct val="140000"/>
               </a:lnSpc>
             </a:pPr>
             <a:r>
-              <a:rPr sz="1200" b="0">
+              <a:rPr sz="1100" b="0">
                 <a:solidFill>
                   <a:srgbClr val="64748B"/>
                 </a:solidFill>
-                <a:latin typeface="微软雅黑"/>
+                <a:latin typeface="微软雅黑" panose="020B0503020204020204" charset="-122"/>
               </a:rPr>
-              <a:t>我们把「教学依赖图必须无环」当工程不变量 ⇒ 做成零模型依赖的校验器（可离线可复现）</a:t>
-            </a:r>
-          </a:p>
-        </p:txBody>
-      </p:sp>
-      <p:sp>
-        <p:nvSpPr>
-          <p:cNvPr id="12" name="Rectangle 11"/>
-          <p:cNvSpPr/>
-          <p:nvPr/>
-        </p:nvSpPr>
-        <p:spPr>
-          <a:xfrm>
-            <a:off x="758952" y="3675888"/>
-            <a:ext cx="10698480" cy="969264"/>
-          </a:xfrm>
-          <a:prstGeom prst="rect">
-            <a:avLst/>
-          </a:prstGeom>
-          <a:solidFill>
-            <a:srgbClr val="F8FAFC"/>
-          </a:solidFill>
-          <a:ln>
-            <a:noFill/>
-          </a:ln>
-          <a:effectLst/>
-        </p:spPr>
-        <p:style>
-          <a:lnRef idx="1">
-            <a:schemeClr val="accent1"/>
-          </a:lnRef>
-          <a:fillRef idx="3">
-            <a:schemeClr val="accent1"/>
-          </a:fillRef>
-          <a:effectRef idx="2">
-            <a:schemeClr val="accent1"/>
-          </a:effectRef>
-          <a:fontRef idx="minor">
-            <a:schemeClr val="lt1"/>
-          </a:fontRef>
-        </p:style>
-        <p:txBody>
-          <a:bodyPr rtlCol="0" anchor="ctr"/>
-          <a:lstStyle/>
-          <a:p>
-            <a:pPr algn="ctr"/>
-          </a:p>
-        </p:txBody>
-      </p:sp>
-      <p:sp>
-        <p:nvSpPr>
-          <p:cNvPr id="13" name="TextBox 12"/>
-          <p:cNvSpPr txBox="1"/>
-          <p:nvPr/>
-        </p:nvSpPr>
-        <p:spPr>
-          <a:xfrm>
-            <a:off x="914400" y="3767328"/>
-            <a:ext cx="457200" cy="365760"/>
-          </a:xfrm>
-          <a:prstGeom prst="rect">
-            <a:avLst/>
-          </a:prstGeom>
-          <a:noFill/>
-        </p:spPr>
-        <p:txBody>
-          <a:bodyPr wrap="square">
-            <a:spAutoFit/>
-          </a:bodyPr>
-          <a:lstStyle/>
-          <a:p>
-            <a:pPr algn="l">
-              <a:lnSpc>
-                <a:spcPct val="135000"/>
-              </a:lnSpc>
-            </a:pPr>
-            <a:r>
-              <a:rPr sz="2000" b="1">
-                <a:solidFill>
-                  <a:srgbClr val="EA580C"/>
-                </a:solidFill>
-                <a:latin typeface="Consolas"/>
-              </a:rPr>
-              <a:t>③</a:t>
-            </a:r>
-          </a:p>
-        </p:txBody>
-      </p:sp>
-      <p:sp>
-        <p:nvSpPr>
-          <p:cNvPr id="14" name="TextBox 13"/>
-          <p:cNvSpPr txBox="1"/>
-          <p:nvPr/>
-        </p:nvSpPr>
-        <p:spPr>
-          <a:xfrm>
-            <a:off x="1463040" y="3730752"/>
-            <a:ext cx="9784080" cy="365760"/>
-          </a:xfrm>
-          <a:prstGeom prst="rect">
-            <a:avLst/>
-          </a:prstGeom>
-          <a:noFill/>
-        </p:spPr>
-        <p:txBody>
-          <a:bodyPr wrap="square">
-            <a:spAutoFit/>
-          </a:bodyPr>
-          <a:lstStyle/>
-          <a:p>
-            <a:pPr algn="l">
-              <a:lnSpc>
-                <a:spcPct val="135000"/>
-              </a:lnSpc>
-            </a:pPr>
-            <a:r>
-              <a:rPr sz="1600" b="1">
-                <a:solidFill>
-                  <a:srgbClr val="0F172A"/>
-                </a:solidFill>
-                <a:latin typeface="微软雅黑"/>
-              </a:rPr>
-              <a:t>同一份材料被抽了多遍，副本混进图里</a:t>
-            </a:r>
-          </a:p>
-        </p:txBody>
-      </p:sp>
-      <p:sp>
-        <p:nvSpPr>
-          <p:cNvPr id="15" name="TextBox 14"/>
-          <p:cNvSpPr txBox="1"/>
-          <p:nvPr/>
-        </p:nvSpPr>
-        <p:spPr>
-          <a:xfrm>
-            <a:off x="1463040" y="4114800"/>
-            <a:ext cx="9784080" cy="457200"/>
-          </a:xfrm>
-          <a:prstGeom prst="rect">
-            <a:avLst/>
-          </a:prstGeom>
-          <a:noFill/>
-        </p:spPr>
-        <p:txBody>
-          <a:bodyPr wrap="square">
-            <a:spAutoFit/>
-          </a:bodyPr>
-          <a:lstStyle/>
-          <a:p>
-            <a:pPr algn="l">
-              <a:lnSpc>
-                <a:spcPct val="140000"/>
-              </a:lnSpc>
-            </a:pPr>
-            <a:r>
-              <a:rPr sz="1200" b="0">
-                <a:solidFill>
-                  <a:srgbClr val="64748B"/>
-                </a:solidFill>
-                <a:latin typeface="微软雅黑"/>
-              </a:rPr>
-              <a:t>第一反应是删。但算了一下：625 条边里 506 条（81%）的端点在被删之列 ⇒ 删了等于整张图重抽</a:t>
-            </a:r>
-          </a:p>
-        </p:txBody>
-      </p:sp>
-      <p:sp>
-        <p:nvSpPr>
-          <p:cNvPr id="16" name="Rectangle 15"/>
-          <p:cNvSpPr/>
-          <p:nvPr/>
-        </p:nvSpPr>
-        <p:spPr>
-          <a:xfrm>
-            <a:off x="758952" y="4773168"/>
-            <a:ext cx="10698480" cy="969264"/>
-          </a:xfrm>
-          <a:prstGeom prst="rect">
-            <a:avLst/>
-          </a:prstGeom>
-          <a:solidFill>
-            <a:srgbClr val="F8FAFC"/>
-          </a:solidFill>
-          <a:ln>
-            <a:noFill/>
-          </a:ln>
-          <a:effectLst/>
-        </p:spPr>
-        <p:style>
-          <a:lnRef idx="1">
-            <a:schemeClr val="accent1"/>
-          </a:lnRef>
-          <a:fillRef idx="3">
-            <a:schemeClr val="accent1"/>
-          </a:fillRef>
-          <a:effectRef idx="2">
-            <a:schemeClr val="accent1"/>
-          </a:effectRef>
-          <a:fontRef idx="minor">
-            <a:schemeClr val="lt1"/>
-          </a:fontRef>
-        </p:style>
-        <p:txBody>
-          <a:bodyPr rtlCol="0" anchor="ctr"/>
-          <a:lstStyle/>
-          <a:p>
-            <a:pPr algn="ctr"/>
-          </a:p>
-        </p:txBody>
-      </p:sp>
-      <p:sp>
-        <p:nvSpPr>
-          <p:cNvPr id="17" name="TextBox 16"/>
-          <p:cNvSpPr txBox="1"/>
-          <p:nvPr/>
-        </p:nvSpPr>
-        <p:spPr>
-          <a:xfrm>
-            <a:off x="914400" y="4864608"/>
-            <a:ext cx="457200" cy="365760"/>
-          </a:xfrm>
-          <a:prstGeom prst="rect">
-            <a:avLst/>
-          </a:prstGeom>
-          <a:noFill/>
-        </p:spPr>
-        <p:txBody>
-          <a:bodyPr wrap="square">
-            <a:spAutoFit/>
-          </a:bodyPr>
-          <a:lstStyle/>
-          <a:p>
-            <a:pPr algn="l">
-              <a:lnSpc>
-                <a:spcPct val="135000"/>
-              </a:lnSpc>
-            </a:pPr>
-            <a:r>
-              <a:rPr sz="2000" b="1">
-                <a:solidFill>
-                  <a:srgbClr val="EA580C"/>
-                </a:solidFill>
-                <a:latin typeface="Consolas"/>
-              </a:rPr>
-              <a:t>④</a:t>
-            </a:r>
-          </a:p>
-        </p:txBody>
-      </p:sp>
-      <p:sp>
-        <p:nvSpPr>
-          <p:cNvPr id="18" name="TextBox 17"/>
-          <p:cNvSpPr txBox="1"/>
-          <p:nvPr/>
-        </p:nvSpPr>
-        <p:spPr>
-          <a:xfrm>
-            <a:off x="1463040" y="4828032"/>
-            <a:ext cx="9784080" cy="365760"/>
-          </a:xfrm>
-          <a:prstGeom prst="rect">
-            <a:avLst/>
-          </a:prstGeom>
-          <a:noFill/>
-        </p:spPr>
-        <p:txBody>
-          <a:bodyPr wrap="square">
-            <a:spAutoFit/>
-          </a:bodyPr>
-          <a:lstStyle/>
-          <a:p>
-            <a:pPr algn="l">
-              <a:lnSpc>
-                <a:spcPct val="135000"/>
-              </a:lnSpc>
-            </a:pPr>
-            <a:r>
-              <a:rPr sz="1600" b="1">
-                <a:solidFill>
-                  <a:srgbClr val="0F172A"/>
-                </a:solidFill>
-                <a:latin typeface="微软雅黑"/>
-              </a:rPr>
-              <a:t>答疑从第 2 轮起「静默失败」</a:t>
-            </a:r>
-          </a:p>
-        </p:txBody>
-      </p:sp>
-      <p:sp>
-        <p:nvSpPr>
-          <p:cNvPr id="19" name="TextBox 18"/>
-          <p:cNvSpPr txBox="1"/>
-          <p:nvPr/>
-        </p:nvSpPr>
-        <p:spPr>
-          <a:xfrm>
-            <a:off x="1463040" y="5212080"/>
-            <a:ext cx="9784080" cy="457200"/>
-          </a:xfrm>
-          <a:prstGeom prst="rect">
-            <a:avLst/>
-          </a:prstGeom>
-          <a:noFill/>
-        </p:spPr>
-        <p:txBody>
-          <a:bodyPr wrap="square">
-            <a:spAutoFit/>
-          </a:bodyPr>
-          <a:lstStyle/>
-          <a:p>
-            <a:pPr algn="l">
-              <a:lnSpc>
-                <a:spcPct val="140000"/>
-              </a:lnSpc>
-            </a:pPr>
-            <a:r>
-              <a:rPr sz="1200" b="0">
-                <a:solidFill>
-                  <a:srgbClr val="64748B"/>
-                </a:solidFill>
-                <a:latin typeface="微软雅黑"/>
-              </a:rPr>
-              <a:t>HTTP 200 但 SSE 零字节，看起来像「模型没产出」⇒ 真相藏在容器日志里</a:t>
-            </a:r>
-          </a:p>
-        </p:txBody>
-      </p:sp>
-      <p:sp>
-        <p:nvSpPr>
-          <p:cNvPr id="20" name="Rectangle 19"/>
-          <p:cNvSpPr/>
-          <p:nvPr/>
-        </p:nvSpPr>
-        <p:spPr>
-          <a:xfrm>
-            <a:off x="0" y="6291072"/>
-            <a:ext cx="12191695" cy="566928"/>
-          </a:xfrm>
-          <a:prstGeom prst="rect">
-            <a:avLst/>
-          </a:prstGeom>
-          <a:solidFill>
-            <a:srgbClr val="F8FAFC"/>
-          </a:solidFill>
-          <a:ln>
-            <a:noFill/>
-          </a:ln>
-          <a:effectLst/>
-        </p:spPr>
-        <p:style>
-          <a:lnRef idx="1">
-            <a:schemeClr val="accent1"/>
-          </a:lnRef>
-          <a:fillRef idx="3">
-            <a:schemeClr val="accent1"/>
-          </a:fillRef>
-          <a:effectRef idx="2">
-            <a:schemeClr val="accent1"/>
-          </a:effectRef>
-          <a:fontRef idx="minor">
-            <a:schemeClr val="lt1"/>
-          </a:fontRef>
-        </p:style>
-        <p:txBody>
-          <a:bodyPr rtlCol="0" anchor="ctr"/>
-          <a:lstStyle/>
-          <a:p>
-            <a:pPr algn="ctr"/>
-          </a:p>
-        </p:txBody>
-      </p:sp>
-      <p:sp>
-        <p:nvSpPr>
-          <p:cNvPr id="21" name="TextBox 20"/>
-          <p:cNvSpPr txBox="1"/>
-          <p:nvPr/>
-        </p:nvSpPr>
-        <p:spPr>
-          <a:xfrm>
-            <a:off x="758952" y="6382512"/>
-            <a:ext cx="7315200" cy="365760"/>
-          </a:xfrm>
-          <a:prstGeom prst="rect">
-            <a:avLst/>
-          </a:prstGeom>
-          <a:noFill/>
-        </p:spPr>
-        <p:txBody>
-          <a:bodyPr wrap="square">
-            <a:spAutoFit/>
-          </a:bodyPr>
-          <a:lstStyle/>
-          <a:p>
-            <a:pPr algn="l">
-              <a:lnSpc>
-                <a:spcPct val="135000"/>
-              </a:lnSpc>
-            </a:pPr>
-            <a:r>
-              <a:rPr sz="1200" b="0">
-                <a:solidFill>
-                  <a:srgbClr val="64748B"/>
-                </a:solidFill>
-                <a:latin typeface="微软雅黑"/>
-              </a:rPr>
-              <a:t>析知 XiZhi · 多模态教学智能体</a:t>
-            </a:r>
-          </a:p>
-        </p:txBody>
-      </p:sp>
-      <p:sp>
-        <p:nvSpPr>
-          <p:cNvPr id="22" name="TextBox 21"/>
-          <p:cNvSpPr txBox="1"/>
-          <p:nvPr/>
-        </p:nvSpPr>
-        <p:spPr>
-          <a:xfrm>
-            <a:off x="9997135" y="6382512"/>
-            <a:ext cx="1463040" cy="365760"/>
-          </a:xfrm>
-          <a:prstGeom prst="rect">
-            <a:avLst/>
-          </a:prstGeom>
-          <a:noFill/>
-        </p:spPr>
-        <p:txBody>
-          <a:bodyPr wrap="square">
-            <a:spAutoFit/>
-          </a:bodyPr>
-          <a:lstStyle/>
-          <a:p>
-            <a:pPr algn="r">
-              <a:lnSpc>
-                <a:spcPct val="135000"/>
-              </a:lnSpc>
-            </a:pPr>
-            <a:r>
-              <a:rPr sz="1200" b="0">
-                <a:solidFill>
-                  <a:srgbClr val="64748B"/>
-                </a:solidFill>
-                <a:latin typeface="微软雅黑"/>
-              </a:rPr>
-              <a:t>03 / 7</a:t>
-            </a:r>
+              <a:t>3 / 5</a:t>
+            </a:r>
+            <a:endParaRPr sz="1100" b="0">
+              <a:solidFill>
+                <a:srgbClr val="64748B"/>
+              </a:solidFill>
+              <a:latin typeface="微软雅黑" panose="020B0503020204020204" charset="-122"/>
+            </a:endParaRPr>
           </a:p>
         </p:txBody>
       </p:sp>
@@ -5601,7 +6372,7 @@
 </file>
 
 <file path=ppt/slides/slide4.xml><?xml version="1.0" encoding="utf-8"?>
-<p:sld xmlns:a="http://schemas.openxmlformats.org/drawingml/2006/main" xmlns:p="http://schemas.openxmlformats.org/presentationml/2006/main" xmlns:r="http://schemas.openxmlformats.org/officeDocument/2006/relationships">
+<p:sld xmlns:a="http://schemas.openxmlformats.org/drawingml/2006/main" xmlns:r="http://schemas.openxmlformats.org/officeDocument/2006/relationships" xmlns:p="http://schemas.openxmlformats.org/presentationml/2006/main">
   <p:cSld>
     <p:spTree>
       <p:nvGrpSpPr>
@@ -5618,8 +6389,8 @@
         </p:nvSpPr>
         <p:spPr>
           <a:xfrm>
-            <a:off x="758952" y="384048"/>
-            <a:ext cx="10058400" cy="274320"/>
+            <a:off x="758952" y="310896"/>
+            <a:ext cx="10058400" cy="256032"/>
           </a:xfrm>
           <a:prstGeom prst="rect">
             <a:avLst/>
@@ -5634,18 +6405,24 @@
           <a:p>
             <a:pPr algn="l">
               <a:lnSpc>
-                <a:spcPct val="135000"/>
+                <a:spcPct val="140000"/>
               </a:lnSpc>
             </a:pPr>
             <a:r>
-              <a:rPr sz="1100" b="1">
-                <a:solidFill>
-                  <a:srgbClr val="06B6D4"/>
-                </a:solidFill>
-                <a:latin typeface="微软雅黑"/>
+              <a:rPr sz="1000" b="1">
+                <a:solidFill>
+                  <a:srgbClr val="EA580C"/>
+                </a:solidFill>
+                <a:latin typeface="微软雅黑" panose="020B0503020204020204" charset="-122"/>
               </a:rPr>
-              <a:t>DEMO · 图 1 · 知识图谱</a:t>
-            </a:r>
+              <a:t>LIMITS · 我们主动说的不足 · ★ 这一页是差异化</a:t>
+            </a:r>
+            <a:endParaRPr sz="1000" b="1">
+              <a:solidFill>
+                <a:srgbClr val="EA580C"/>
+              </a:solidFill>
+              <a:latin typeface="微软雅黑" panose="020B0503020204020204" charset="-122"/>
+            </a:endParaRPr>
           </a:p>
         </p:txBody>
       </p:sp>
@@ -5657,8 +6434,8 @@
         </p:nvSpPr>
         <p:spPr>
           <a:xfrm>
-            <a:off x="758952" y="658368"/>
-            <a:ext cx="10698480" cy="685800"/>
+            <a:off x="758952" y="548640"/>
+            <a:ext cx="10698480" cy="530352"/>
           </a:xfrm>
           <a:prstGeom prst="rect">
             <a:avLst/>
@@ -5673,55 +6450,125 @@
           <a:p>
             <a:pPr algn="l">
               <a:lnSpc>
-                <a:spcPct val="135000"/>
+                <a:spcPct val="140000"/>
               </a:lnSpc>
             </a:pPr>
             <a:r>
-              <a:rPr sz="3000" b="1">
+              <a:rPr sz="2700" b="1">
                 <a:solidFill>
                   <a:srgbClr val="0F172A"/>
                 </a:solidFill>
-                <a:latin typeface="微软雅黑"/>
+                <a:latin typeface="微软雅黑" panose="020B0503020204020204" charset="-122"/>
               </a:rPr>
-              <a:t>依赖图：213 个知识点 · 229 条边 · 环数 = 0</a:t>
-            </a:r>
-          </a:p>
-        </p:txBody>
-      </p:sp>
-      <p:pic>
-        <p:nvPicPr>
-          <p:cNvPr id="4" name="Picture 3" descr="屏幕截图 2026-10-11 183541.png"/>
-          <p:cNvPicPr>
-            <a:picLocks noChangeAspect="1"/>
-          </p:cNvPicPr>
-          <p:nvPr/>
-        </p:nvPicPr>
-        <p:blipFill>
-          <a:blip r:embed="rId2"/>
-          <a:stretch>
-            <a:fillRect/>
-          </a:stretch>
-        </p:blipFill>
-        <p:spPr>
-          <a:xfrm>
-            <a:off x="2791701" y="1444752"/>
-            <a:ext cx="6608292" cy="4160520"/>
-          </a:xfrm>
-          <a:prstGeom prst="rect">
-            <a:avLst/>
-          </a:prstGeom>
-        </p:spPr>
-      </p:pic>
-      <p:sp>
-        <p:nvSpPr>
-          <p:cNvPr id="5" name="TextBox 4"/>
+              <a:t>两个瑕疵，以及我们怎么处置的</a:t>
+            </a:r>
+            <a:endParaRPr sz="2700" b="1">
+              <a:solidFill>
+                <a:srgbClr val="0F172A"/>
+              </a:solidFill>
+              <a:latin typeface="微软雅黑" panose="020B0503020204020204" charset="-122"/>
+            </a:endParaRPr>
+          </a:p>
+        </p:txBody>
+      </p:sp>
+      <p:sp>
+        <p:nvSpPr>
+          <p:cNvPr id="4" name="Rectangle 3"/>
+          <p:cNvSpPr/>
+          <p:nvPr/>
+        </p:nvSpPr>
+        <p:spPr>
+          <a:xfrm>
+            <a:off x="758952" y="1481328"/>
+            <a:ext cx="10698480" cy="1920240"/>
+          </a:xfrm>
+          <a:prstGeom prst="rect">
+            <a:avLst/>
+          </a:prstGeom>
+          <a:solidFill>
+            <a:srgbClr val="FFF7ED"/>
+          </a:solidFill>
+          <a:ln>
+            <a:noFill/>
+          </a:ln>
+          <a:effectLst/>
+        </p:spPr>
+        <p:style>
+          <a:lnRef idx="1">
+            <a:schemeClr val="accent1"/>
+          </a:lnRef>
+          <a:fillRef idx="3">
+            <a:schemeClr val="accent1"/>
+          </a:fillRef>
+          <a:effectRef idx="2">
+            <a:schemeClr val="accent1"/>
+          </a:effectRef>
+          <a:fontRef idx="minor">
+            <a:schemeClr val="lt1"/>
+          </a:fontRef>
+        </p:style>
+        <p:txBody>
+          <a:bodyPr rtlCol="0" anchor="ctr"/>
+          <a:lstStyle/>
+          <a:p>
+            <a:pPr algn="ctr"/>
+          </a:p>
+        </p:txBody>
+      </p:sp>
+      <p:sp>
+        <p:nvSpPr>
+          <p:cNvPr id="5" name="Rectangle 4"/>
+          <p:cNvSpPr/>
+          <p:nvPr/>
+        </p:nvSpPr>
+        <p:spPr>
+          <a:xfrm>
+            <a:off x="758952" y="1481328"/>
+            <a:ext cx="45720" cy="1920240"/>
+          </a:xfrm>
+          <a:prstGeom prst="rect">
+            <a:avLst/>
+          </a:prstGeom>
+          <a:solidFill>
+            <a:srgbClr val="EA580C"/>
+          </a:solidFill>
+          <a:ln>
+            <a:noFill/>
+          </a:ln>
+          <a:effectLst/>
+        </p:spPr>
+        <p:style>
+          <a:lnRef idx="1">
+            <a:schemeClr val="accent1"/>
+          </a:lnRef>
+          <a:fillRef idx="3">
+            <a:schemeClr val="accent1"/>
+          </a:fillRef>
+          <a:effectRef idx="2">
+            <a:schemeClr val="accent1"/>
+          </a:effectRef>
+          <a:fontRef idx="minor">
+            <a:schemeClr val="lt1"/>
+          </a:fontRef>
+        </p:style>
+        <p:txBody>
+          <a:bodyPr rtlCol="0" anchor="ctr"/>
+          <a:lstStyle/>
+          <a:p>
+            <a:pPr algn="ctr"/>
+          </a:p>
+        </p:txBody>
+      </p:sp>
+      <p:sp>
+        <p:nvSpPr>
+          <p:cNvPr id="6" name="TextBox 5"/>
           <p:cNvSpPr txBox="1"/>
           <p:nvPr/>
         </p:nvSpPr>
         <p:spPr>
           <a:xfrm>
-            <a:off x="758952" y="5806440"/>
-            <a:ext cx="10698480" cy="457200"/>
+            <a:off x="1014983" y="1664208"/>
+            <a:ext cx="10149840" cy="365760"/>
           </a:xfrm>
           <a:prstGeom prst="rect">
             <a:avLst/>
@@ -5736,31 +6583,437 @@
           <a:p>
             <a:pPr algn="l">
               <a:lnSpc>
-                <a:spcPct val="135000"/>
+                <a:spcPct val="140000"/>
               </a:lnSpc>
             </a:pPr>
             <a:r>
+              <a:rPr sz="1600" b="1">
+                <a:solidFill>
+                  <a:srgbClr val="EA580C"/>
+                </a:solidFill>
+                <a:latin typeface="微软雅黑" panose="020B0503020204020204" charset="-122"/>
+              </a:rPr>
+              <a:t>① 数据有过重复</a:t>
+            </a:r>
+            <a:endParaRPr sz="1600" b="1">
+              <a:solidFill>
+                <a:srgbClr val="EA580C"/>
+              </a:solidFill>
+              <a:latin typeface="微软雅黑" panose="020B0503020204020204" charset="-122"/>
+            </a:endParaRPr>
+          </a:p>
+        </p:txBody>
+      </p:sp>
+      <p:sp>
+        <p:nvSpPr>
+          <p:cNvPr id="7" name="TextBox 6"/>
+          <p:cNvSpPr txBox="1"/>
+          <p:nvPr/>
+        </p:nvSpPr>
+        <p:spPr>
+          <a:xfrm>
+            <a:off x="1014983" y="2103120"/>
+            <a:ext cx="10149840" cy="1188720"/>
+          </a:xfrm>
+          <a:prstGeom prst="rect">
+            <a:avLst/>
+          </a:prstGeom>
+          <a:noFill/>
+        </p:spPr>
+        <p:txBody>
+          <a:bodyPr wrap="square">
+            <a:spAutoFit/>
+          </a:bodyPr>
+          <a:lstStyle/>
+          <a:p>
+            <a:pPr algn="l">
+              <a:lnSpc>
+                <a:spcPct val="155000"/>
+              </a:lnSpc>
+            </a:pPr>
+            <a:r>
               <a:rPr sz="1300" b="0">
                 <a:solidFill>
-                  <a:srgbClr val="64748B"/>
-                </a:solidFill>
-                <a:latin typeface="微软雅黑"/>
+                  <a:srgbClr val="334155"/>
+                </a:solidFill>
+                <a:latin typeface="微软雅黑" panose="020B0503020204020204" charset="-122"/>
               </a:rPr>
-              <a:t>环数 0 是工程不变量，可当场复跑；因环路被剪除的边也有独立计数。</a:t>
-            </a:r>
-          </a:p>
-        </p:txBody>
-      </p:sp>
-      <p:sp>
-        <p:nvSpPr>
-          <p:cNvPr id="6" name="Rectangle 5"/>
+              <a:t>早先版本里同一份材料被抽了多遍，副本混进图里。</a:t>
+            </a:r>
+            <a:endParaRPr sz="1300" b="0">
+              <a:solidFill>
+                <a:srgbClr val="334155"/>
+              </a:solidFill>
+              <a:latin typeface="微软雅黑" panose="020B0503020204020204" charset="-122"/>
+            </a:endParaRPr>
+          </a:p>
+          <a:p>
+            <a:pPr algn="l">
+              <a:lnSpc>
+                <a:spcPct val="155000"/>
+              </a:lnSpc>
+            </a:pPr>
+            <a:r>
+              <a:rPr sz="1300" b="0">
+                <a:solidFill>
+                  <a:srgbClr val="334155"/>
+                </a:solidFill>
+                <a:latin typeface="微软雅黑" panose="020B0503020204020204" charset="-122"/>
+              </a:rPr>
+              <a:t>根因是一个可定位的 bug（「章内序号」被当成全局序号用）——</a:t>
+            </a:r>
+            <a:endParaRPr sz="1300" b="0">
+              <a:solidFill>
+                <a:srgbClr val="334155"/>
+              </a:solidFill>
+              <a:latin typeface="微软雅黑" panose="020B0503020204020204" charset="-122"/>
+            </a:endParaRPr>
+          </a:p>
+          <a:p>
+            <a:pPr algn="l">
+              <a:lnSpc>
+                <a:spcPct val="155000"/>
+              </a:lnSpc>
+            </a:pPr>
+            <a:r>
+              <a:rPr sz="1300" b="0">
+                <a:solidFill>
+                  <a:srgbClr val="334155"/>
+                </a:solidFill>
+                <a:latin typeface="微软雅黑" panose="020B0503020204020204" charset="-122"/>
+              </a:rPr>
+              <a:t>我们修了它并重跑：副本从 483（bug 产物）降到 67 ——</a:t>
+            </a:r>
+            <a:endParaRPr sz="1300" b="0">
+              <a:solidFill>
+                <a:srgbClr val="334155"/>
+              </a:solidFill>
+              <a:latin typeface="微软雅黑" panose="020B0503020204020204" charset="-122"/>
+            </a:endParaRPr>
+          </a:p>
+          <a:p>
+            <a:pPr algn="l">
+              <a:lnSpc>
+                <a:spcPct val="155000"/>
+              </a:lnSpc>
+            </a:pPr>
+            <a:r>
+              <a:rPr sz="1300" b="0">
+                <a:solidFill>
+                  <a:srgbClr val="334155"/>
+                </a:solidFill>
+                <a:latin typeface="微软雅黑" panose="020B0503020204020204" charset="-122"/>
+              </a:rPr>
+              <a:t>而剩下那 67 个是材料本身的真重复，我们只标注、不删数据。</a:t>
+            </a:r>
+            <a:endParaRPr sz="1300" b="0">
+              <a:solidFill>
+                <a:srgbClr val="334155"/>
+              </a:solidFill>
+              <a:latin typeface="微软雅黑" panose="020B0503020204020204" charset="-122"/>
+            </a:endParaRPr>
+          </a:p>
+        </p:txBody>
+      </p:sp>
+      <p:sp>
+        <p:nvSpPr>
+          <p:cNvPr id="8" name="Rectangle 7"/>
           <p:cNvSpPr/>
           <p:nvPr/>
         </p:nvSpPr>
         <p:spPr>
           <a:xfrm>
-            <a:off x="0" y="6291072"/>
-            <a:ext cx="12191695" cy="566928"/>
+            <a:off x="758952" y="3566159"/>
+            <a:ext cx="10698480" cy="1920240"/>
+          </a:xfrm>
+          <a:prstGeom prst="rect">
+            <a:avLst/>
+          </a:prstGeom>
+          <a:solidFill>
+            <a:srgbClr val="FFF7ED"/>
+          </a:solidFill>
+          <a:ln>
+            <a:noFill/>
+          </a:ln>
+          <a:effectLst/>
+        </p:spPr>
+        <p:style>
+          <a:lnRef idx="1">
+            <a:schemeClr val="accent1"/>
+          </a:lnRef>
+          <a:fillRef idx="3">
+            <a:schemeClr val="accent1"/>
+          </a:fillRef>
+          <a:effectRef idx="2">
+            <a:schemeClr val="accent1"/>
+          </a:effectRef>
+          <a:fontRef idx="minor">
+            <a:schemeClr val="lt1"/>
+          </a:fontRef>
+        </p:style>
+        <p:txBody>
+          <a:bodyPr rtlCol="0" anchor="ctr"/>
+          <a:lstStyle/>
+          <a:p>
+            <a:pPr algn="ctr"/>
+          </a:p>
+        </p:txBody>
+      </p:sp>
+      <p:sp>
+        <p:nvSpPr>
+          <p:cNvPr id="9" name="Rectangle 8"/>
+          <p:cNvSpPr/>
+          <p:nvPr/>
+        </p:nvSpPr>
+        <p:spPr>
+          <a:xfrm>
+            <a:off x="758952" y="3566159"/>
+            <a:ext cx="45720" cy="1920240"/>
+          </a:xfrm>
+          <a:prstGeom prst="rect">
+            <a:avLst/>
+          </a:prstGeom>
+          <a:solidFill>
+            <a:srgbClr val="EA580C"/>
+          </a:solidFill>
+          <a:ln>
+            <a:noFill/>
+          </a:ln>
+          <a:effectLst/>
+        </p:spPr>
+        <p:style>
+          <a:lnRef idx="1">
+            <a:schemeClr val="accent1"/>
+          </a:lnRef>
+          <a:fillRef idx="3">
+            <a:schemeClr val="accent1"/>
+          </a:fillRef>
+          <a:effectRef idx="2">
+            <a:schemeClr val="accent1"/>
+          </a:effectRef>
+          <a:fontRef idx="minor">
+            <a:schemeClr val="lt1"/>
+          </a:fontRef>
+        </p:style>
+        <p:txBody>
+          <a:bodyPr rtlCol="0" anchor="ctr"/>
+          <a:lstStyle/>
+          <a:p>
+            <a:pPr algn="ctr"/>
+          </a:p>
+        </p:txBody>
+      </p:sp>
+      <p:sp>
+        <p:nvSpPr>
+          <p:cNvPr id="10" name="TextBox 9"/>
+          <p:cNvSpPr txBox="1"/>
+          <p:nvPr/>
+        </p:nvSpPr>
+        <p:spPr>
+          <a:xfrm>
+            <a:off x="1014983" y="3749039"/>
+            <a:ext cx="10149840" cy="365760"/>
+          </a:xfrm>
+          <a:prstGeom prst="rect">
+            <a:avLst/>
+          </a:prstGeom>
+          <a:noFill/>
+        </p:spPr>
+        <p:txBody>
+          <a:bodyPr wrap="square">
+            <a:spAutoFit/>
+          </a:bodyPr>
+          <a:lstStyle/>
+          <a:p>
+            <a:pPr algn="l">
+              <a:lnSpc>
+                <a:spcPct val="140000"/>
+              </a:lnSpc>
+            </a:pPr>
+            <a:r>
+              <a:rPr sz="1600" b="1">
+                <a:solidFill>
+                  <a:srgbClr val="EA580C"/>
+                </a:solidFill>
+                <a:latin typeface="微软雅黑" panose="020B0503020204020204" charset="-122"/>
+              </a:rPr>
+              <a:t>② 有一条边与 AI 判向相反</a:t>
+            </a:r>
+            <a:endParaRPr sz="1600" b="1">
+              <a:solidFill>
+                <a:srgbClr val="EA580C"/>
+              </a:solidFill>
+              <a:latin typeface="微软雅黑" panose="020B0503020204020204" charset="-122"/>
+            </a:endParaRPr>
+          </a:p>
+        </p:txBody>
+      </p:sp>
+      <p:sp>
+        <p:nvSpPr>
+          <p:cNvPr id="11" name="TextBox 10"/>
+          <p:cNvSpPr txBox="1"/>
+          <p:nvPr/>
+        </p:nvSpPr>
+        <p:spPr>
+          <a:xfrm>
+            <a:off x="1014983" y="4187951"/>
+            <a:ext cx="10149840" cy="1188720"/>
+          </a:xfrm>
+          <a:prstGeom prst="rect">
+            <a:avLst/>
+          </a:prstGeom>
+          <a:noFill/>
+        </p:spPr>
+        <p:txBody>
+          <a:bodyPr wrap="square">
+            <a:spAutoFit/>
+          </a:bodyPr>
+          <a:lstStyle/>
+          <a:p>
+            <a:pPr algn="l">
+              <a:lnSpc>
+                <a:spcPct val="155000"/>
+              </a:lnSpc>
+            </a:pPr>
+            <a:r>
+              <a:rPr sz="1300" b="0">
+                <a:solidFill>
+                  <a:srgbClr val="334155"/>
+                </a:solidFill>
+                <a:latin typeface="微软雅黑" panose="020B0503020204020204" charset="-122"/>
+              </a:rPr>
+              <a:t>AI 按文档顺序抽出的方向是「滑动窗口 → TCP」，</a:t>
+            </a:r>
+            <a:endParaRPr sz="1300" b="0">
+              <a:solidFill>
+                <a:srgbClr val="334155"/>
+              </a:solidFill>
+              <a:latin typeface="微软雅黑" panose="020B0503020204020204" charset="-122"/>
+            </a:endParaRPr>
+          </a:p>
+          <a:p>
+            <a:pPr algn="l">
+              <a:lnSpc>
+                <a:spcPct val="155000"/>
+              </a:lnSpc>
+            </a:pPr>
+            <a:r>
+              <a:rPr sz="1300" b="0">
+                <a:solidFill>
+                  <a:srgbClr val="334155"/>
+                </a:solidFill>
+                <a:latin typeface="微软雅黑" panose="020B0503020204020204" charset="-122"/>
+              </a:rPr>
+              <a:t>而我们读原文判定：要先懂 TCP 的字节流。</a:t>
+            </a:r>
+            <a:endParaRPr sz="1300" b="0">
+              <a:solidFill>
+                <a:srgbClr val="334155"/>
+              </a:solidFill>
+              <a:latin typeface="微软雅黑" panose="020B0503020204020204" charset="-122"/>
+            </a:endParaRPr>
+          </a:p>
+          <a:p>
+            <a:pPr algn="l">
+              <a:lnSpc>
+                <a:spcPct val="155000"/>
+              </a:lnSpc>
+            </a:pPr>
+            <a:r>
+              <a:rPr sz="1300" b="0">
+                <a:solidFill>
+                  <a:srgbClr val="334155"/>
+                </a:solidFill>
+                <a:latin typeface="微软雅黑" panose="020B0503020204020204" charset="-122"/>
+              </a:rPr>
+              <a:t>我们不灌它，留在复核队列 ——</a:t>
+            </a:r>
+            <a:endParaRPr sz="1300" b="0">
+              <a:solidFill>
+                <a:srgbClr val="334155"/>
+              </a:solidFill>
+              <a:latin typeface="微软雅黑" panose="020B0503020204020204" charset="-122"/>
+            </a:endParaRPr>
+          </a:p>
+          <a:p>
+            <a:pPr algn="l">
+              <a:lnSpc>
+                <a:spcPct val="155000"/>
+              </a:lnSpc>
+            </a:pPr>
+            <a:r>
+              <a:rPr sz="1300" b="0">
+                <a:solidFill>
+                  <a:srgbClr val="334155"/>
+                </a:solidFill>
+                <a:latin typeface="微软雅黑" panose="020B0503020204020204" charset="-122"/>
+              </a:rPr>
+              <a:t>它正好是「人做裁决」的实例：AI 不假装自己判准了。</a:t>
+            </a:r>
+            <a:endParaRPr sz="1300" b="0">
+              <a:solidFill>
+                <a:srgbClr val="334155"/>
+              </a:solidFill>
+              <a:latin typeface="微软雅黑" panose="020B0503020204020204" charset="-122"/>
+            </a:endParaRPr>
+          </a:p>
+        </p:txBody>
+      </p:sp>
+      <p:sp>
+        <p:nvSpPr>
+          <p:cNvPr id="12" name="TextBox 11"/>
+          <p:cNvSpPr txBox="1"/>
+          <p:nvPr/>
+        </p:nvSpPr>
+        <p:spPr>
+          <a:xfrm>
+            <a:off x="758952" y="5715000"/>
+            <a:ext cx="10698480" cy="365760"/>
+          </a:xfrm>
+          <a:prstGeom prst="rect">
+            <a:avLst/>
+          </a:prstGeom>
+          <a:noFill/>
+        </p:spPr>
+        <p:txBody>
+          <a:bodyPr wrap="square">
+            <a:spAutoFit/>
+          </a:bodyPr>
+          <a:lstStyle/>
+          <a:p>
+            <a:pPr algn="l">
+              <a:lnSpc>
+                <a:spcPct val="140000"/>
+              </a:lnSpc>
+            </a:pPr>
+            <a:r>
+              <a:rPr sz="1500" b="1">
+                <a:solidFill>
+                  <a:srgbClr val="0F172A"/>
+                </a:solidFill>
+                <a:latin typeface="微软雅黑" panose="020B0503020204020204" charset="-122"/>
+              </a:rPr>
+              <a:t>⇒ 我们宁可显示「不知道」，不显示「像知道」。</a:t>
+            </a:r>
+            <a:endParaRPr sz="1500" b="1">
+              <a:solidFill>
+                <a:srgbClr val="0F172A"/>
+              </a:solidFill>
+              <a:latin typeface="微软雅黑" panose="020B0503020204020204" charset="-122"/>
+            </a:endParaRPr>
+          </a:p>
+        </p:txBody>
+      </p:sp>
+      <p:sp>
+        <p:nvSpPr>
+          <p:cNvPr id="13" name="Rectangle 12"/>
+          <p:cNvSpPr/>
+          <p:nvPr/>
+        </p:nvSpPr>
+        <p:spPr>
+          <a:xfrm>
+            <a:off x="0" y="6355080"/>
+            <a:ext cx="12191695" cy="502920"/>
           </a:xfrm>
           <a:prstGeom prst="rect">
             <a:avLst/>
@@ -5797,14 +7050,14 @@
       </p:sp>
       <p:sp>
         <p:nvSpPr>
-          <p:cNvPr id="7" name="TextBox 6"/>
+          <p:cNvPr id="14" name="TextBox 13"/>
           <p:cNvSpPr txBox="1"/>
           <p:nvPr/>
         </p:nvSpPr>
         <p:spPr>
           <a:xfrm>
-            <a:off x="758952" y="6382512"/>
-            <a:ext cx="7315200" cy="365760"/>
+            <a:off x="758952" y="6437376"/>
+            <a:ext cx="7315200" cy="329184"/>
           </a:xfrm>
           <a:prstGeom prst="rect">
             <a:avLst/>
@@ -5819,31 +7072,37 @@
           <a:p>
             <a:pPr algn="l">
               <a:lnSpc>
-                <a:spcPct val="135000"/>
+                <a:spcPct val="140000"/>
               </a:lnSpc>
             </a:pPr>
             <a:r>
-              <a:rPr sz="1200" b="0">
+              <a:rPr sz="1100" b="0">
                 <a:solidFill>
                   <a:srgbClr val="64748B"/>
                 </a:solidFill>
-                <a:latin typeface="微软雅黑"/>
+                <a:latin typeface="微软雅黑" panose="020B0503020204020204" charset="-122"/>
               </a:rPr>
-              <a:t>析知 XiZhi · 多模态教学智能体</a:t>
-            </a:r>
-          </a:p>
-        </p:txBody>
-      </p:sp>
-      <p:sp>
-        <p:nvSpPr>
-          <p:cNvPr id="8" name="TextBox 7"/>
+              <a:t>析知 XiZhi · 多模态教学智能体 · 豆包战队</a:t>
+            </a:r>
+            <a:endParaRPr sz="1100" b="0">
+              <a:solidFill>
+                <a:srgbClr val="64748B"/>
+              </a:solidFill>
+              <a:latin typeface="微软雅黑" panose="020B0503020204020204" charset="-122"/>
+            </a:endParaRPr>
+          </a:p>
+        </p:txBody>
+      </p:sp>
+      <p:sp>
+        <p:nvSpPr>
+          <p:cNvPr id="15" name="TextBox 14"/>
           <p:cNvSpPr txBox="1"/>
           <p:nvPr/>
         </p:nvSpPr>
         <p:spPr>
           <a:xfrm>
-            <a:off x="9997135" y="6382512"/>
-            <a:ext cx="1463040" cy="365760"/>
+            <a:off x="10362895" y="6437376"/>
+            <a:ext cx="1097280" cy="329184"/>
           </a:xfrm>
           <a:prstGeom prst="rect">
             <a:avLst/>
@@ -5858,18 +7117,24 @@
           <a:p>
             <a:pPr algn="r">
               <a:lnSpc>
-                <a:spcPct val="135000"/>
+                <a:spcPct val="140000"/>
               </a:lnSpc>
             </a:pPr>
             <a:r>
-              <a:rPr sz="1200" b="0">
+              <a:rPr sz="1100" b="0">
                 <a:solidFill>
                   <a:srgbClr val="64748B"/>
                 </a:solidFill>
-                <a:latin typeface="微软雅黑"/>
+                <a:latin typeface="微软雅黑" panose="020B0503020204020204" charset="-122"/>
               </a:rPr>
-              <a:t>04 / 7</a:t>
-            </a:r>
+              <a:t>4 / 5</a:t>
+            </a:r>
+            <a:endParaRPr sz="1100" b="0">
+              <a:solidFill>
+                <a:srgbClr val="64748B"/>
+              </a:solidFill>
+              <a:latin typeface="微软雅黑" panose="020B0503020204020204" charset="-122"/>
+            </a:endParaRPr>
           </a:p>
         </p:txBody>
       </p:sp>
@@ -5882,7 +7147,7 @@
 </file>
 
 <file path=ppt/slides/slide5.xml><?xml version="1.0" encoding="utf-8"?>
-<p:sld xmlns:a="http://schemas.openxmlformats.org/drawingml/2006/main" xmlns:p="http://schemas.openxmlformats.org/presentationml/2006/main" xmlns:r="http://schemas.openxmlformats.org/officeDocument/2006/relationships">
+<p:sld xmlns:a="http://schemas.openxmlformats.org/drawingml/2006/main" xmlns:r="http://schemas.openxmlformats.org/officeDocument/2006/relationships" xmlns:p="http://schemas.openxmlformats.org/presentationml/2006/main">
   <p:cSld>
     <p:spTree>
       <p:nvGrpSpPr>
@@ -5893,14 +7158,58 @@
       <p:grpSpPr/>
       <p:sp>
         <p:nvSpPr>
-          <p:cNvPr id="2" name="TextBox 1"/>
+          <p:cNvPr id="2" name="Rectangle 1"/>
+          <p:cNvSpPr/>
+          <p:nvPr/>
+        </p:nvSpPr>
+        <p:spPr>
+          <a:xfrm>
+            <a:off x="0" y="0"/>
+            <a:ext cx="12191695" cy="1920240"/>
+          </a:xfrm>
+          <a:prstGeom prst="rect">
+            <a:avLst/>
+          </a:prstGeom>
+          <a:solidFill>
+            <a:srgbClr val="0F172A"/>
+          </a:solidFill>
+          <a:ln>
+            <a:noFill/>
+          </a:ln>
+          <a:effectLst/>
+        </p:spPr>
+        <p:style>
+          <a:lnRef idx="1">
+            <a:schemeClr val="accent1"/>
+          </a:lnRef>
+          <a:fillRef idx="3">
+            <a:schemeClr val="accent1"/>
+          </a:fillRef>
+          <a:effectRef idx="2">
+            <a:schemeClr val="accent1"/>
+          </a:effectRef>
+          <a:fontRef idx="minor">
+            <a:schemeClr val="lt1"/>
+          </a:fontRef>
+        </p:style>
+        <p:txBody>
+          <a:bodyPr rtlCol="0" anchor="ctr"/>
+          <a:lstStyle/>
+          <a:p>
+            <a:pPr algn="ctr"/>
+          </a:p>
+        </p:txBody>
+      </p:sp>
+      <p:sp>
+        <p:nvSpPr>
+          <p:cNvPr id="3" name="TextBox 2"/>
           <p:cNvSpPr txBox="1"/>
           <p:nvPr/>
         </p:nvSpPr>
         <p:spPr>
           <a:xfrm>
-            <a:off x="758952" y="384048"/>
-            <a:ext cx="10058400" cy="274320"/>
+            <a:off x="758952" y="640080"/>
+            <a:ext cx="10058400" cy="685800"/>
           </a:xfrm>
           <a:prstGeom prst="rect">
             <a:avLst/>
@@ -5915,31 +7224,37 @@
           <a:p>
             <a:pPr algn="l">
               <a:lnSpc>
-                <a:spcPct val="135000"/>
+                <a:spcPct val="140000"/>
               </a:lnSpc>
             </a:pPr>
             <a:r>
-              <a:rPr sz="1100" b="1">
-                <a:solidFill>
-                  <a:srgbClr val="06B6D4"/>
-                </a:solidFill>
-                <a:latin typeface="微软雅黑"/>
+              <a:rPr sz="4000" b="1">
+                <a:solidFill>
+                  <a:srgbClr val="FFFFFF"/>
+                </a:solidFill>
+                <a:latin typeface="微软雅黑" panose="020B0503020204020204" charset="-122"/>
               </a:rPr>
-              <a:t>DEMO · 图 2 · 学习路径</a:t>
-            </a:r>
-          </a:p>
-        </p:txBody>
-      </p:sp>
-      <p:sp>
-        <p:nvSpPr>
-          <p:cNvPr id="3" name="TextBox 2"/>
+              <a:t>谢谢</a:t>
+            </a:r>
+            <a:endParaRPr sz="4000" b="1">
+              <a:solidFill>
+                <a:srgbClr val="FFFFFF"/>
+              </a:solidFill>
+              <a:latin typeface="微软雅黑" panose="020B0503020204020204" charset="-122"/>
+            </a:endParaRPr>
+          </a:p>
+        </p:txBody>
+      </p:sp>
+      <p:sp>
+        <p:nvSpPr>
+          <p:cNvPr id="5" name="TextBox 4"/>
           <p:cNvSpPr txBox="1"/>
           <p:nvPr/>
         </p:nvSpPr>
         <p:spPr>
           <a:xfrm>
-            <a:off x="758952" y="658368"/>
-            <a:ext cx="10698480" cy="685800"/>
+            <a:off x="758952" y="2468880"/>
+            <a:ext cx="1645920" cy="365760"/>
           </a:xfrm>
           <a:prstGeom prst="rect">
             <a:avLst/>
@@ -5954,55 +7269,37 @@
           <a:p>
             <a:pPr algn="l">
               <a:lnSpc>
-                <a:spcPct val="135000"/>
+                <a:spcPct val="140000"/>
               </a:lnSpc>
             </a:pPr>
             <a:r>
-              <a:rPr sz="3000" b="1">
+              <a:rPr sz="1500" b="1">
                 <a:solidFill>
                   <a:srgbClr val="0F172A"/>
                 </a:solidFill>
-                <a:latin typeface="微软雅黑"/>
+                <a:latin typeface="微软雅黑" panose="020B0503020204020204" charset="-122"/>
               </a:rPr>
-              <a:t>可解释的学习路径：每一步都带理由 + 教材原文</a:t>
-            </a:r>
-          </a:p>
-        </p:txBody>
-      </p:sp>
-      <p:pic>
-        <p:nvPicPr>
-          <p:cNvPr id="4" name="Picture 3" descr="屏幕截图 2026-10-11 183448.png"/>
-          <p:cNvPicPr>
-            <a:picLocks noChangeAspect="1"/>
-          </p:cNvPicPr>
-          <p:nvPr/>
-        </p:nvPicPr>
-        <p:blipFill>
-          <a:blip r:embed="rId2"/>
-          <a:stretch>
-            <a:fillRect/>
-          </a:stretch>
-        </p:blipFill>
-        <p:spPr>
-          <a:xfrm>
-            <a:off x="2608674" y="1444752"/>
-            <a:ext cx="6974345" cy="4160520"/>
-          </a:xfrm>
-          <a:prstGeom prst="rect">
-            <a:avLst/>
-          </a:prstGeom>
-        </p:spPr>
-      </p:pic>
-      <p:sp>
-        <p:nvSpPr>
-          <p:cNvPr id="5" name="TextBox 4"/>
+              <a:t>在线演示</a:t>
+            </a:r>
+            <a:endParaRPr sz="1500" b="1">
+              <a:solidFill>
+                <a:srgbClr val="0F172A"/>
+              </a:solidFill>
+              <a:latin typeface="微软雅黑" panose="020B0503020204020204" charset="-122"/>
+            </a:endParaRPr>
+          </a:p>
+        </p:txBody>
+      </p:sp>
+      <p:sp>
+        <p:nvSpPr>
+          <p:cNvPr id="6" name="TextBox 5"/>
           <p:cNvSpPr txBox="1"/>
           <p:nvPr/>
         </p:nvSpPr>
         <p:spPr>
           <a:xfrm>
-            <a:off x="758952" y="5806440"/>
-            <a:ext cx="10698480" cy="457200"/>
+            <a:off x="2514600" y="2468880"/>
+            <a:ext cx="8961120" cy="365760"/>
           </a:xfrm>
           <a:prstGeom prst="rect">
             <a:avLst/>
@@ -6017,31 +7314,172 @@
           <a:p>
             <a:pPr algn="l">
               <a:lnSpc>
-                <a:spcPct val="135000"/>
+                <a:spcPct val="140000"/>
               </a:lnSpc>
             </a:pPr>
             <a:r>
+              <a:rPr sz="1400" b="0">
+                <a:solidFill>
+                  <a:srgbClr val="3B82F6"/>
+                </a:solidFill>
+                <a:latin typeface="Consolas" panose="020B0609020204030204"/>
+              </a:rPr>
+              <a:t>http://120.77.177.171:8000</a:t>
+            </a:r>
+            <a:endParaRPr sz="1400" b="0">
+              <a:solidFill>
+                <a:srgbClr val="3B82F6"/>
+              </a:solidFill>
+              <a:latin typeface="Consolas" panose="020B0609020204030204"/>
+            </a:endParaRPr>
+          </a:p>
+        </p:txBody>
+      </p:sp>
+      <p:sp>
+        <p:nvSpPr>
+          <p:cNvPr id="7" name="TextBox 6"/>
+          <p:cNvSpPr txBox="1"/>
+          <p:nvPr/>
+        </p:nvSpPr>
+        <p:spPr>
+          <a:xfrm>
+            <a:off x="758952" y="3017520"/>
+            <a:ext cx="1645920" cy="365760"/>
+          </a:xfrm>
+          <a:prstGeom prst="rect">
+            <a:avLst/>
+          </a:prstGeom>
+          <a:noFill/>
+        </p:spPr>
+        <p:txBody>
+          <a:bodyPr wrap="square">
+            <a:spAutoFit/>
+          </a:bodyPr>
+          <a:lstStyle/>
+          <a:p>
+            <a:pPr algn="l">
+              <a:lnSpc>
+                <a:spcPct val="140000"/>
+              </a:lnSpc>
+            </a:pPr>
+            <a:r>
+              <a:rPr sz="1500" b="1">
+                <a:solidFill>
+                  <a:srgbClr val="0F172A"/>
+                </a:solidFill>
+                <a:latin typeface="微软雅黑" panose="020B0503020204020204" charset="-122"/>
+              </a:rPr>
+              <a:t>源码仓库</a:t>
+            </a:r>
+            <a:endParaRPr sz="1500" b="1">
+              <a:solidFill>
+                <a:srgbClr val="0F172A"/>
+              </a:solidFill>
+              <a:latin typeface="微软雅黑" panose="020B0503020204020204" charset="-122"/>
+            </a:endParaRPr>
+          </a:p>
+        </p:txBody>
+      </p:sp>
+      <p:sp>
+        <p:nvSpPr>
+          <p:cNvPr id="8" name="TextBox 7"/>
+          <p:cNvSpPr txBox="1"/>
+          <p:nvPr/>
+        </p:nvSpPr>
+        <p:spPr>
+          <a:xfrm>
+            <a:off x="2514600" y="3017520"/>
+            <a:ext cx="8961120" cy="365760"/>
+          </a:xfrm>
+          <a:prstGeom prst="rect">
+            <a:avLst/>
+          </a:prstGeom>
+          <a:noFill/>
+        </p:spPr>
+        <p:txBody>
+          <a:bodyPr wrap="square">
+            <a:spAutoFit/>
+          </a:bodyPr>
+          <a:lstStyle/>
+          <a:p>
+            <a:pPr algn="l">
+              <a:lnSpc>
+                <a:spcPct val="140000"/>
+              </a:lnSpc>
+            </a:pPr>
+            <a:r>
+              <a:rPr sz="1400" b="0">
+                <a:solidFill>
+                  <a:srgbClr val="3B82F6"/>
+                </a:solidFill>
+                <a:latin typeface="Consolas" panose="020B0609020204030204"/>
+              </a:rPr>
+              <a:t>https://gitee.com/mikey_code/multimodal-teaching-agent</a:t>
+            </a:r>
+            <a:endParaRPr sz="1400" b="0">
+              <a:solidFill>
+                <a:srgbClr val="3B82F6"/>
+              </a:solidFill>
+              <a:latin typeface="Consolas" panose="020B0609020204030204"/>
+            </a:endParaRPr>
+          </a:p>
+        </p:txBody>
+      </p:sp>
+      <p:sp>
+        <p:nvSpPr>
+          <p:cNvPr id="11" name="TextBox 10"/>
+          <p:cNvSpPr txBox="1"/>
+          <p:nvPr/>
+        </p:nvSpPr>
+        <p:spPr>
+          <a:xfrm>
+            <a:off x="758952" y="4572000"/>
+            <a:ext cx="10698480" cy="502920"/>
+          </a:xfrm>
+          <a:prstGeom prst="rect">
+            <a:avLst/>
+          </a:prstGeom>
+          <a:noFill/>
+        </p:spPr>
+        <p:txBody>
+          <a:bodyPr wrap="square">
+            <a:spAutoFit/>
+          </a:bodyPr>
+          <a:lstStyle/>
+          <a:p>
+            <a:pPr algn="l">
+              <a:lnSpc>
+                <a:spcPct val="140000"/>
+              </a:lnSpc>
+            </a:pPr>
+            <a:r>
               <a:rPr sz="1300" b="0">
                 <a:solidFill>
                   <a:srgbClr val="64748B"/>
                 </a:solidFill>
-                <a:latin typeface="微软雅黑"/>
+                <a:latin typeface="微软雅黑" panose="020B0503020204020204" charset="-122"/>
               </a:rPr>
-              <a:t>以「慢启动的第二种场景」为目标的实测 3 步路径，每条前置都附来源依据。</a:t>
-            </a:r>
-          </a:p>
-        </p:txBody>
-      </p:sp>
-      <p:sp>
-        <p:nvSpPr>
-          <p:cNvPr id="6" name="Rectangle 5"/>
+              <a:t>豆包战队 · 深圳大学计算机与软件学院 · 人工智能专业</a:t>
+            </a:r>
+            <a:endParaRPr sz="1300" b="0">
+              <a:solidFill>
+                <a:srgbClr val="64748B"/>
+              </a:solidFill>
+              <a:latin typeface="微软雅黑" panose="020B0503020204020204" charset="-122"/>
+            </a:endParaRPr>
+          </a:p>
+        </p:txBody>
+      </p:sp>
+      <p:sp>
+        <p:nvSpPr>
+          <p:cNvPr id="12" name="Rectangle 11"/>
           <p:cNvSpPr/>
           <p:nvPr/>
         </p:nvSpPr>
         <p:spPr>
           <a:xfrm>
-            <a:off x="0" y="6291072"/>
-            <a:ext cx="12191695" cy="566928"/>
+            <a:off x="758952" y="5166360"/>
+            <a:ext cx="10698480" cy="658368"/>
           </a:xfrm>
           <a:prstGeom prst="rect">
             <a:avLst/>
@@ -6078,14 +7516,14 @@
       </p:sp>
       <p:sp>
         <p:nvSpPr>
-          <p:cNvPr id="7" name="TextBox 6"/>
+          <p:cNvPr id="13" name="TextBox 12"/>
           <p:cNvSpPr txBox="1"/>
           <p:nvPr/>
         </p:nvSpPr>
         <p:spPr>
           <a:xfrm>
-            <a:off x="758952" y="6382512"/>
-            <a:ext cx="7315200" cy="365760"/>
+            <a:off x="987552" y="5321808"/>
+            <a:ext cx="10241280" cy="365760"/>
           </a:xfrm>
           <a:prstGeom prst="rect">
             <a:avLst/>
@@ -6100,767 +7538,24 @@
           <a:p>
             <a:pPr algn="l">
               <a:lnSpc>
-                <a:spcPct val="135000"/>
+                <a:spcPct val="140000"/>
               </a:lnSpc>
             </a:pPr>
             <a:r>
-              <a:rPr sz="1200" b="0">
-                <a:solidFill>
-                  <a:srgbClr val="64748B"/>
-                </a:solidFill>
-                <a:latin typeface="微软雅黑"/>
-              </a:rPr>
-              <a:t>析知 XiZhi · 多模态教学智能体</a:t>
-            </a:r>
-          </a:p>
-        </p:txBody>
-      </p:sp>
-      <p:sp>
-        <p:nvSpPr>
-          <p:cNvPr id="8" name="TextBox 7"/>
-          <p:cNvSpPr txBox="1"/>
-          <p:nvPr/>
-        </p:nvSpPr>
-        <p:spPr>
-          <a:xfrm>
-            <a:off x="9997135" y="6382512"/>
-            <a:ext cx="1463040" cy="365760"/>
-          </a:xfrm>
-          <a:prstGeom prst="rect">
-            <a:avLst/>
-          </a:prstGeom>
-          <a:noFill/>
-        </p:spPr>
-        <p:txBody>
-          <a:bodyPr wrap="square">
-            <a:spAutoFit/>
-          </a:bodyPr>
-          <a:lstStyle/>
-          <a:p>
-            <a:pPr algn="r">
-              <a:lnSpc>
-                <a:spcPct val="135000"/>
-              </a:lnSpc>
-            </a:pPr>
-            <a:r>
-              <a:rPr sz="1200" b="0">
-                <a:solidFill>
-                  <a:srgbClr val="64748B"/>
-                </a:solidFill>
-                <a:latin typeface="微软雅黑"/>
-              </a:rPr>
-              <a:t>05 / 7</a:t>
-            </a:r>
-          </a:p>
-        </p:txBody>
-      </p:sp>
-    </p:spTree>
-  </p:cSld>
-  <p:clrMapOvr>
-    <a:masterClrMapping/>
-  </p:clrMapOvr>
-</p:sld>
-</file>
-
-<file path=ppt/slides/slide6.xml><?xml version="1.0" encoding="utf-8"?>
-<p:sld xmlns:a="http://schemas.openxmlformats.org/drawingml/2006/main" xmlns:p="http://schemas.openxmlformats.org/presentationml/2006/main" xmlns:r="http://schemas.openxmlformats.org/officeDocument/2006/relationships">
-  <p:cSld>
-    <p:spTree>
-      <p:nvGrpSpPr>
-        <p:cNvPr id="1" name=""/>
-        <p:cNvGrpSpPr/>
-        <p:nvPr/>
-      </p:nvGrpSpPr>
-      <p:grpSpPr/>
-      <p:sp>
-        <p:nvSpPr>
-          <p:cNvPr id="2" name="TextBox 1"/>
-          <p:cNvSpPr txBox="1"/>
-          <p:nvPr/>
-        </p:nvSpPr>
-        <p:spPr>
-          <a:xfrm>
-            <a:off x="758952" y="384048"/>
-            <a:ext cx="10058400" cy="274320"/>
-          </a:xfrm>
-          <a:prstGeom prst="rect">
-            <a:avLst/>
-          </a:prstGeom>
-          <a:noFill/>
-        </p:spPr>
-        <p:txBody>
-          <a:bodyPr wrap="square">
-            <a:spAutoFit/>
-          </a:bodyPr>
-          <a:lstStyle/>
-          <a:p>
-            <a:pPr algn="l">
-              <a:lnSpc>
-                <a:spcPct val="135000"/>
-              </a:lnSpc>
-            </a:pPr>
-            <a:r>
-              <a:rPr sz="1100" b="1">
-                <a:solidFill>
-                  <a:srgbClr val="06B6D4"/>
-                </a:solidFill>
-                <a:latin typeface="微软雅黑"/>
-              </a:rPr>
-              <a:t>DEMO · 图 3 · 多轮答疑</a:t>
-            </a:r>
-          </a:p>
-        </p:txBody>
-      </p:sp>
-      <p:sp>
-        <p:nvSpPr>
-          <p:cNvPr id="3" name="TextBox 2"/>
-          <p:cNvSpPr txBox="1"/>
-          <p:nvPr/>
-        </p:nvSpPr>
-        <p:spPr>
-          <a:xfrm>
-            <a:off x="758952" y="658368"/>
-            <a:ext cx="10698480" cy="685800"/>
-          </a:xfrm>
-          <a:prstGeom prst="rect">
-            <a:avLst/>
-          </a:prstGeom>
-          <a:noFill/>
-        </p:spPr>
-        <p:txBody>
-          <a:bodyPr wrap="square">
-            <a:spAutoFit/>
-          </a:bodyPr>
-          <a:lstStyle/>
-          <a:p>
-            <a:pPr algn="l">
-              <a:lnSpc>
-                <a:spcPct val="135000"/>
-              </a:lnSpc>
-            </a:pPr>
-            <a:r>
-              <a:rPr sz="3000" b="1">
-                <a:solidFill>
-                  <a:srgbClr val="0F172A"/>
-                </a:solidFill>
-                <a:latin typeface="微软雅黑"/>
-              </a:rPr>
-              <a:t>苏格拉底答疑：首轮只反问，连续 2 次答不上才直讲</a:t>
-            </a:r>
-          </a:p>
-        </p:txBody>
-      </p:sp>
-      <p:pic>
-        <p:nvPicPr>
-          <p:cNvPr id="4" name="Picture 3" descr="屏幕截图 2026-10-11 183515.png"/>
-          <p:cNvPicPr>
-            <a:picLocks noChangeAspect="1"/>
-          </p:cNvPicPr>
-          <p:nvPr/>
-        </p:nvPicPr>
-        <p:blipFill>
-          <a:blip r:embed="rId2"/>
-          <a:stretch>
-            <a:fillRect/>
-          </a:stretch>
-        </p:blipFill>
-        <p:spPr>
-          <a:xfrm>
-            <a:off x="2078503" y="1444752"/>
-            <a:ext cx="8034688" cy="4160520"/>
-          </a:xfrm>
-          <a:prstGeom prst="rect">
-            <a:avLst/>
-          </a:prstGeom>
-        </p:spPr>
-      </p:pic>
-      <p:sp>
-        <p:nvSpPr>
-          <p:cNvPr id="5" name="TextBox 4"/>
-          <p:cNvSpPr txBox="1"/>
-          <p:nvPr/>
-        </p:nvSpPr>
-        <p:spPr>
-          <a:xfrm>
-            <a:off x="758952" y="5806440"/>
-            <a:ext cx="10698480" cy="457200"/>
-          </a:xfrm>
-          <a:prstGeom prst="rect">
-            <a:avLst/>
-          </a:prstGeom>
-          <a:noFill/>
-        </p:spPr>
-        <p:txBody>
-          <a:bodyPr wrap="square">
-            <a:spAutoFit/>
-          </a:bodyPr>
-          <a:lstStyle/>
-          <a:p>
-            <a:pPr algn="l">
-              <a:lnSpc>
-                <a:spcPct val="135000"/>
-              </a:lnSpc>
-            </a:pPr>
-            <a:r>
-              <a:rPr sz="1300" b="0">
-                <a:solidFill>
-                  <a:srgbClr val="64748B"/>
-                </a:solidFill>
-                <a:latin typeface="微软雅黑"/>
-              </a:rPr>
-              <a:t>降级由代码层强制，不依赖模型自觉；材料里没有的内容明确拒答（幻觉率 0）。</a:t>
-            </a:r>
-          </a:p>
-        </p:txBody>
-      </p:sp>
-      <p:sp>
-        <p:nvSpPr>
-          <p:cNvPr id="6" name="Rectangle 5"/>
-          <p:cNvSpPr/>
-          <p:nvPr/>
-        </p:nvSpPr>
-        <p:spPr>
-          <a:xfrm>
-            <a:off x="0" y="6291072"/>
-            <a:ext cx="12191695" cy="566928"/>
-          </a:xfrm>
-          <a:prstGeom prst="rect">
-            <a:avLst/>
-          </a:prstGeom>
-          <a:solidFill>
-            <a:srgbClr val="F8FAFC"/>
-          </a:solidFill>
-          <a:ln>
-            <a:noFill/>
-          </a:ln>
-          <a:effectLst/>
-        </p:spPr>
-        <p:style>
-          <a:lnRef idx="1">
-            <a:schemeClr val="accent1"/>
-          </a:lnRef>
-          <a:fillRef idx="3">
-            <a:schemeClr val="accent1"/>
-          </a:fillRef>
-          <a:effectRef idx="2">
-            <a:schemeClr val="accent1"/>
-          </a:effectRef>
-          <a:fontRef idx="minor">
-            <a:schemeClr val="lt1"/>
-          </a:fontRef>
-        </p:style>
-        <p:txBody>
-          <a:bodyPr rtlCol="0" anchor="ctr"/>
-          <a:lstStyle/>
-          <a:p>
-            <a:pPr algn="ctr"/>
-          </a:p>
-        </p:txBody>
-      </p:sp>
-      <p:sp>
-        <p:nvSpPr>
-          <p:cNvPr id="7" name="TextBox 6"/>
-          <p:cNvSpPr txBox="1"/>
-          <p:nvPr/>
-        </p:nvSpPr>
-        <p:spPr>
-          <a:xfrm>
-            <a:off x="758952" y="6382512"/>
-            <a:ext cx="7315200" cy="365760"/>
-          </a:xfrm>
-          <a:prstGeom prst="rect">
-            <a:avLst/>
-          </a:prstGeom>
-          <a:noFill/>
-        </p:spPr>
-        <p:txBody>
-          <a:bodyPr wrap="square">
-            <a:spAutoFit/>
-          </a:bodyPr>
-          <a:lstStyle/>
-          <a:p>
-            <a:pPr algn="l">
-              <a:lnSpc>
-                <a:spcPct val="135000"/>
-              </a:lnSpc>
-            </a:pPr>
-            <a:r>
-              <a:rPr sz="1200" b="0">
-                <a:solidFill>
-                  <a:srgbClr val="64748B"/>
-                </a:solidFill>
-                <a:latin typeface="微软雅黑"/>
-              </a:rPr>
-              <a:t>析知 XiZhi · 多模态教学智能体</a:t>
-            </a:r>
-          </a:p>
-        </p:txBody>
-      </p:sp>
-      <p:sp>
-        <p:nvSpPr>
-          <p:cNvPr id="8" name="TextBox 7"/>
-          <p:cNvSpPr txBox="1"/>
-          <p:nvPr/>
-        </p:nvSpPr>
-        <p:spPr>
-          <a:xfrm>
-            <a:off x="9997135" y="6382512"/>
-            <a:ext cx="1463040" cy="365760"/>
-          </a:xfrm>
-          <a:prstGeom prst="rect">
-            <a:avLst/>
-          </a:prstGeom>
-          <a:noFill/>
-        </p:spPr>
-        <p:txBody>
-          <a:bodyPr wrap="square">
-            <a:spAutoFit/>
-          </a:bodyPr>
-          <a:lstStyle/>
-          <a:p>
-            <a:pPr algn="r">
-              <a:lnSpc>
-                <a:spcPct val="135000"/>
-              </a:lnSpc>
-            </a:pPr>
-            <a:r>
-              <a:rPr sz="1200" b="0">
-                <a:solidFill>
-                  <a:srgbClr val="64748B"/>
-                </a:solidFill>
-                <a:latin typeface="微软雅黑"/>
-              </a:rPr>
-              <a:t>06 / 7</a:t>
-            </a:r>
-          </a:p>
-        </p:txBody>
-      </p:sp>
-    </p:spTree>
-  </p:cSld>
-  <p:clrMapOvr>
-    <a:masterClrMapping/>
-  </p:clrMapOvr>
-</p:sld>
-</file>
-
-<file path=ppt/slides/slide7.xml><?xml version="1.0" encoding="utf-8"?>
-<p:sld xmlns:a="http://schemas.openxmlformats.org/drawingml/2006/main" xmlns:p="http://schemas.openxmlformats.org/presentationml/2006/main" xmlns:r="http://schemas.openxmlformats.org/officeDocument/2006/relationships">
-  <p:cSld>
-    <p:spTree>
-      <p:nvGrpSpPr>
-        <p:cNvPr id="1" name=""/>
-        <p:cNvGrpSpPr/>
-        <p:nvPr/>
-      </p:nvGrpSpPr>
-      <p:grpSpPr/>
-      <p:sp>
-        <p:nvSpPr>
-          <p:cNvPr id="2" name="Rectangle 1"/>
-          <p:cNvSpPr/>
-          <p:nvPr/>
-        </p:nvSpPr>
-        <p:spPr>
-          <a:xfrm>
-            <a:off x="0" y="0"/>
-            <a:ext cx="12191695" cy="2194560"/>
-          </a:xfrm>
-          <a:prstGeom prst="rect">
-            <a:avLst/>
-          </a:prstGeom>
-          <a:solidFill>
-            <a:srgbClr val="0F172A"/>
-          </a:solidFill>
-          <a:ln>
-            <a:noFill/>
-          </a:ln>
-          <a:effectLst/>
-        </p:spPr>
-        <p:style>
-          <a:lnRef idx="1">
-            <a:schemeClr val="accent1"/>
-          </a:lnRef>
-          <a:fillRef idx="3">
-            <a:schemeClr val="accent1"/>
-          </a:fillRef>
-          <a:effectRef idx="2">
-            <a:schemeClr val="accent1"/>
-          </a:effectRef>
-          <a:fontRef idx="minor">
-            <a:schemeClr val="lt1"/>
-          </a:fontRef>
-        </p:style>
-        <p:txBody>
-          <a:bodyPr rtlCol="0" anchor="ctr"/>
-          <a:lstStyle/>
-          <a:p>
-            <a:pPr algn="ctr"/>
-          </a:p>
-        </p:txBody>
-      </p:sp>
-      <p:sp>
-        <p:nvSpPr>
-          <p:cNvPr id="3" name="TextBox 2"/>
-          <p:cNvSpPr txBox="1"/>
-          <p:nvPr/>
-        </p:nvSpPr>
-        <p:spPr>
-          <a:xfrm>
-            <a:off x="758952" y="777240"/>
-            <a:ext cx="10058400" cy="731520"/>
-          </a:xfrm>
-          <a:prstGeom prst="rect">
-            <a:avLst/>
-          </a:prstGeom>
-          <a:noFill/>
-        </p:spPr>
-        <p:txBody>
-          <a:bodyPr wrap="square">
-            <a:spAutoFit/>
-          </a:bodyPr>
-          <a:lstStyle/>
-          <a:p>
-            <a:pPr algn="l">
-              <a:lnSpc>
-                <a:spcPct val="135000"/>
-              </a:lnSpc>
-            </a:pPr>
-            <a:r>
-              <a:rPr sz="4400" b="1">
-                <a:solidFill>
-                  <a:srgbClr val="FFFFFF"/>
-                </a:solidFill>
-                <a:latin typeface="微软雅黑"/>
-              </a:rPr>
-              <a:t>谢谢</a:t>
-            </a:r>
-          </a:p>
-        </p:txBody>
-      </p:sp>
-      <p:sp>
-        <p:nvSpPr>
-          <p:cNvPr id="4" name="TextBox 3"/>
-          <p:cNvSpPr txBox="1"/>
-          <p:nvPr/>
-        </p:nvSpPr>
-        <p:spPr>
-          <a:xfrm>
-            <a:off x="777240" y="1481328"/>
-            <a:ext cx="10058400" cy="457200"/>
-          </a:xfrm>
-          <a:prstGeom prst="rect">
-            <a:avLst/>
-          </a:prstGeom>
-          <a:noFill/>
-        </p:spPr>
-        <p:txBody>
-          <a:bodyPr wrap="square">
-            <a:spAutoFit/>
-          </a:bodyPr>
-          <a:lstStyle/>
-          <a:p>
-            <a:pPr algn="l">
-              <a:lnSpc>
-                <a:spcPct val="135000"/>
-              </a:lnSpc>
-            </a:pPr>
-            <a:r>
-              <a:rPr sz="1600" b="0">
-                <a:solidFill>
-                  <a:srgbClr val="93C5FD"/>
-                </a:solidFill>
-                <a:latin typeface="微软雅黑"/>
-              </a:rPr>
-              <a:t>欢迎提问 —— 包括「怎么证明环数真的是 0」</a:t>
-            </a:r>
-          </a:p>
-        </p:txBody>
-      </p:sp>
-      <p:sp>
-        <p:nvSpPr>
-          <p:cNvPr id="5" name="TextBox 4"/>
-          <p:cNvSpPr txBox="1"/>
-          <p:nvPr/>
-        </p:nvSpPr>
-        <p:spPr>
-          <a:xfrm>
-            <a:off x="758952" y="2743200"/>
-            <a:ext cx="1828800" cy="365760"/>
-          </a:xfrm>
-          <a:prstGeom prst="rect">
-            <a:avLst/>
-          </a:prstGeom>
-          <a:noFill/>
-        </p:spPr>
-        <p:txBody>
-          <a:bodyPr wrap="square">
-            <a:spAutoFit/>
-          </a:bodyPr>
-          <a:lstStyle/>
-          <a:p>
-            <a:pPr algn="l">
-              <a:lnSpc>
-                <a:spcPct val="135000"/>
-              </a:lnSpc>
-            </a:pPr>
-            <a:r>
               <a:rPr sz="1500" b="1">
                 <a:solidFill>
-                  <a:srgbClr val="0F172A"/>
-                </a:solidFill>
-                <a:latin typeface="微软雅黑"/>
-              </a:rPr>
-              <a:t>在线演示</a:t>
-            </a:r>
-          </a:p>
-        </p:txBody>
-      </p:sp>
-      <p:sp>
-        <p:nvSpPr>
-          <p:cNvPr id="6" name="TextBox 5"/>
-          <p:cNvSpPr txBox="1"/>
-          <p:nvPr/>
-        </p:nvSpPr>
-        <p:spPr>
-          <a:xfrm>
-            <a:off x="2651760" y="2743200"/>
-            <a:ext cx="8778240" cy="365760"/>
-          </a:xfrm>
-          <a:prstGeom prst="rect">
-            <a:avLst/>
-          </a:prstGeom>
-          <a:noFill/>
-        </p:spPr>
-        <p:txBody>
-          <a:bodyPr wrap="square">
-            <a:spAutoFit/>
-          </a:bodyPr>
-          <a:lstStyle/>
-          <a:p>
-            <a:pPr algn="l">
-              <a:lnSpc>
-                <a:spcPct val="135000"/>
-              </a:lnSpc>
-            </a:pPr>
-            <a:r>
-              <a:rPr sz="1500" b="0">
-                <a:solidFill>
                   <a:srgbClr val="3B82F6"/>
                 </a:solidFill>
-                <a:latin typeface="Consolas"/>
-              </a:rPr>
-              <a:t>http://120.77.177.171:8000</a:t>
-            </a:r>
-          </a:p>
-        </p:txBody>
-      </p:sp>
-      <p:sp>
-        <p:nvSpPr>
-          <p:cNvPr id="7" name="TextBox 6"/>
-          <p:cNvSpPr txBox="1"/>
-          <p:nvPr/>
-        </p:nvSpPr>
-        <p:spPr>
-          <a:xfrm>
-            <a:off x="758952" y="3310128"/>
-            <a:ext cx="1828800" cy="365760"/>
-          </a:xfrm>
-          <a:prstGeom prst="rect">
-            <a:avLst/>
-          </a:prstGeom>
-          <a:noFill/>
-        </p:spPr>
-        <p:txBody>
-          <a:bodyPr wrap="square">
-            <a:spAutoFit/>
-          </a:bodyPr>
-          <a:lstStyle/>
-          <a:p>
-            <a:pPr algn="l">
-              <a:lnSpc>
-                <a:spcPct val="135000"/>
-              </a:lnSpc>
-            </a:pPr>
-            <a:r>
-              <a:rPr sz="1500" b="1">
-                <a:solidFill>
-                  <a:srgbClr val="0F172A"/>
-                </a:solidFill>
-                <a:latin typeface="微软雅黑"/>
-              </a:rPr>
-              <a:t>源码仓库</a:t>
-            </a:r>
-          </a:p>
-        </p:txBody>
-      </p:sp>
-      <p:sp>
-        <p:nvSpPr>
-          <p:cNvPr id="8" name="TextBox 7"/>
-          <p:cNvSpPr txBox="1"/>
-          <p:nvPr/>
-        </p:nvSpPr>
-        <p:spPr>
-          <a:xfrm>
-            <a:off x="2651760" y="3310128"/>
-            <a:ext cx="8778240" cy="365760"/>
-          </a:xfrm>
-          <a:prstGeom prst="rect">
-            <a:avLst/>
-          </a:prstGeom>
-          <a:noFill/>
-        </p:spPr>
-        <p:txBody>
-          <a:bodyPr wrap="square">
-            <a:spAutoFit/>
-          </a:bodyPr>
-          <a:lstStyle/>
-          <a:p>
-            <a:pPr algn="l">
-              <a:lnSpc>
-                <a:spcPct val="135000"/>
-              </a:lnSpc>
-            </a:pPr>
-            <a:r>
-              <a:rPr sz="1500" b="0">
-                <a:solidFill>
-                  <a:srgbClr val="3B82F6"/>
-                </a:solidFill>
-                <a:latin typeface="Consolas"/>
-              </a:rPr>
-              <a:t>https://gitee.com/mikey_code/multimodal-teaching-agent</a:t>
-            </a:r>
-          </a:p>
-        </p:txBody>
-      </p:sp>
-      <p:sp>
-        <p:nvSpPr>
-          <p:cNvPr id="9" name="TextBox 8"/>
-          <p:cNvSpPr txBox="1"/>
-          <p:nvPr/>
-        </p:nvSpPr>
-        <p:spPr>
-          <a:xfrm>
-            <a:off x="758952" y="3877056"/>
-            <a:ext cx="1828800" cy="365760"/>
-          </a:xfrm>
-          <a:prstGeom prst="rect">
-            <a:avLst/>
-          </a:prstGeom>
-          <a:noFill/>
-        </p:spPr>
-        <p:txBody>
-          <a:bodyPr wrap="square">
-            <a:spAutoFit/>
-          </a:bodyPr>
-          <a:lstStyle/>
-          <a:p>
-            <a:pPr algn="l">
-              <a:lnSpc>
-                <a:spcPct val="135000"/>
-              </a:lnSpc>
-            </a:pPr>
-            <a:r>
-              <a:rPr sz="1500" b="1">
-                <a:solidFill>
-                  <a:srgbClr val="0F172A"/>
-                </a:solidFill>
-                <a:latin typeface="微软雅黑"/>
-              </a:rPr>
-              <a:t>交付物</a:t>
-            </a:r>
-          </a:p>
-        </p:txBody>
-      </p:sp>
-      <p:sp>
-        <p:nvSpPr>
-          <p:cNvPr id="10" name="TextBox 9"/>
-          <p:cNvSpPr txBox="1"/>
-          <p:nvPr/>
-        </p:nvSpPr>
-        <p:spPr>
-          <a:xfrm>
-            <a:off x="2651760" y="3877056"/>
-            <a:ext cx="8778240" cy="365760"/>
-          </a:xfrm>
-          <a:prstGeom prst="rect">
-            <a:avLst/>
-          </a:prstGeom>
-          <a:noFill/>
-        </p:spPr>
-        <p:txBody>
-          <a:bodyPr wrap="square">
-            <a:spAutoFit/>
-          </a:bodyPr>
-          <a:lstStyle/>
-          <a:p>
-            <a:pPr algn="l">
-              <a:lnSpc>
-                <a:spcPct val="135000"/>
-              </a:lnSpc>
-            </a:pPr>
-            <a:r>
-              <a:rPr sz="1500" b="0">
-                <a:solidFill>
-                  <a:srgbClr val="3B82F6"/>
-                </a:solidFill>
-                <a:latin typeface="微软雅黑"/>
-              </a:rPr>
-              <a:t>在线链接 · 源码仓库 · 3 分钟演示视频 · 作品介绍 PPT · 对话记录</a:t>
-            </a:r>
-          </a:p>
-        </p:txBody>
-      </p:sp>
-      <p:sp>
-        <p:nvSpPr>
-          <p:cNvPr id="11" name="TextBox 10"/>
-          <p:cNvSpPr txBox="1"/>
-          <p:nvPr/>
-        </p:nvSpPr>
-        <p:spPr>
-          <a:xfrm>
-            <a:off x="758952" y="4754880"/>
-            <a:ext cx="10698480" cy="822960"/>
-          </a:xfrm>
-          <a:prstGeom prst="rect">
-            <a:avLst/>
-          </a:prstGeom>
-          <a:noFill/>
-        </p:spPr>
-        <p:txBody>
-          <a:bodyPr wrap="square">
-            <a:spAutoFit/>
-          </a:bodyPr>
-          <a:lstStyle/>
-          <a:p>
-            <a:pPr algn="l">
-              <a:lnSpc>
-                <a:spcPct val="160000"/>
-              </a:lnSpc>
-            </a:pPr>
-            <a:r>
-              <a:rPr sz="1300" b="0">
-                <a:solidFill>
-                  <a:srgbClr val="64748B"/>
-                </a:solidFill>
-                <a:latin typeface="微软雅黑"/>
-              </a:rPr>
-              <a:t>豆包战队 · 深圳大学计算机与软件学院 · 人工智能专业</a:t>
-            </a:r>
-          </a:p>
-          <a:p>
-            <a:pPr algn="l">
-              <a:lnSpc>
-                <a:spcPct val="160000"/>
-              </a:lnSpc>
-            </a:pPr>
-            <a:r>
-              <a:rPr sz="1300" b="0">
-                <a:solidFill>
-                  <a:srgbClr val="64748B"/>
-                </a:solidFill>
-                <a:latin typeface="微软雅黑"/>
+                <a:latin typeface="微软雅黑" panose="020B0503020204020204" charset="-122"/>
               </a:rPr>
               <a:t>⭐ 我们宁可显示「不知道」，不显示「像知道」</a:t>
             </a:r>
+            <a:endParaRPr sz="1500" b="1">
+              <a:solidFill>
+                <a:srgbClr val="3B82F6"/>
+              </a:solidFill>
+              <a:latin typeface="微软雅黑" panose="020B0503020204020204" charset="-122"/>
+            </a:endParaRPr>
           </a:p>
         </p:txBody>
       </p:sp>
@@ -7188,6 +7883,10 @@
       </a:style>
     </a:lnDef>
   </a:objectDefaults>
-  <a:extraClrSchemeLst/>
+  <a:extLst>
+    <a:ext uri="{05A4C25C-085E-4340-85A3-A5531E510DB2}">
+      <thm15:themeFamily xmlns:thm15="http://schemas.microsoft.com/office/thememl/2012/main" name="Office Theme" id="{62F939B6-93AF-4DB8-9C6B-D6C7DFDC589F}" vid="{4A3C46E8-61CC-4603-A589-7422A47A8E4A}"/>
+    </a:ext>
+  </a:extLst>
 </a:theme>
 </file>